--- a/carbon_breakpoints_takeaway_figures/what_bends_the_curve_final.pptx
+++ b/carbon_breakpoints_takeaway_figures/what_bends_the_curve_final.pptx
@@ -593,7 +593,7 @@
           <a:lstStyle/>
           <a:p>
             <a:r>
-              <a:t>This is the hinge of the talk: the non-attribution is not a failure of Paris — it is the reason the analysis must descend to the national level, where attribution machinery actually has power.</a:t>
+              <a:t>The hinge of the talk: the non-attribution is not a failure of Paris — it is the reason the analysis must descend to the national level, where attribution machinery has power.</a:t>
             </a:r>
           </a:p>
         </p:txBody>
@@ -663,7 +663,7 @@
           <a:lstStyle/>
           <a:p>
             <a:r>
-              <a:t>No common treaty era: breaks scatter 1970–2013 and pile up around oil shocks, post-Cold-War upheaval, crises, and the renewables era. Bottom: among 71 documented episodes, events sit near the estimated breaks far more often than restricted random dates allow (45% vs 17% within 2 years; 80% vs 37% within 5; 70% vs 33% inside the episode) — the historical classifications carry real temporal information.</a:t>
+              <a:t>No common treaty era: breaks scatter 1970–2013 and pile up around oil shocks, post-Cold-War upheaval, crises, and the renewables era. Event alignment: 45% vs 17% within 2 years; 80% vs 37% within 5; 70% vs 33% inside the episode.</a:t>
             </a:r>
           </a:p>
         </p:txBody>
@@ -733,7 +733,7 @@
           <a:lstStyle/>
           <a:p>
             <a:r>
-              <a:t>One square per country. Fuel and energy markets 22, restructuring 18, political disruption 11, macro shocks 9, development and access 6 — and climate policy with low-carbon technology in 9 of 97. 22 remain honestly unresolved. Mechanisms are structured author-coded interpretations against documentary sources — not causal estimates.</a:t>
+              <a:t>Fuel and energy markets 22, restructuring 18, political disruption 11, macro shocks 9, development and access 6, policy 9, unresolved 22. Author-coded against authoritative sources with a stopping rule — interpretations, not causal estimates.</a:t>
             </a:r>
           </a:p>
         </p:txBody>
@@ -873,7 +873,7 @@
           <a:lstStyle/>
           <a:p>
             <a:r>
-              <a:t>Shocks flow into contraction; restructuring often ends in 'intensity gain, CO2 rising'. Only nine countries end in constructive persistent decarbonization. The gray band on the left axis is the distinct 22 with no attributed mechanism.</a:t>
+              <a:t>Shocks flow into contraction; restructuring often ends in 'intensity gain, CO2 rising'. Only nine countries end in constructive persistent decarbonization.</a:t>
             </a:r>
           </a:p>
         </p:txBody>
@@ -943,7 +943,7 @@
           <a:lstStyle/>
           <a:p>
             <a:r>
-              <a:t>Raw quadrant counts: 55 favorable bends coincide with still-rising CO2; only 19 with falling CO2. The stricter quality classification — adding persistence and mechanism — narrows these to 12 improving-but-rising and 9 constructive. Green triangles are the 9 policy-enabled cases: Bhutan and Paraguay improve intensity while absolute emissions still rise — policy-enabled and constructive overlap but are not identical.</a:t>
+              <a:t>Raw counts: 55 favorable bends with rising CO2; 19 with falling CO2. The stricter classification narrows these to 12 and 9. Green triangles: the 9 policy-enabled cases — Bhutan and Paraguay improve intensity while emissions still rise, so policy-enabled and constructive are overlapping but different sets.</a:t>
             </a:r>
           </a:p>
         </p:txBody>
@@ -1013,7 +1013,7 @@
           <a:lstStyle/>
           <a:p>
             <a:r>
-              <a:t>The defining test: intensity AND absolute CO2 both fall after the break. Six of nine are policy-enabled; Hungary, Nauru, and Ireland arrived via restructuring. Caveat: Nauru is a micro-state whose 'restructuring' is the phosphate collapse — treat with care. This is the paper's constructive core: policy made physical in fuel mix, infrastructure, and economic structure.</a:t>
+              <a:t>Six of nine are policy-enabled; Hungary, Nauru, and Ireland arrived via restructuring. Caveat: Nauru is a micro-state whose 'restructuring' is the phosphate collapse — treat with care.</a:t>
             </a:r>
           </a:p>
         </p:txBody>
@@ -1083,7 +1083,7 @@
           <a:lstStyle/>
           <a:p>
             <a:r>
-              <a:t>Three routes around the constructive verdict: fuel substitution (5), evidence limits (4), collapse (1). Netherlands 1975 is gas-substitution decarbonization forty years before the US shale version. Somalia 1985 is the caution: collapse mimics decarbonization in every raw statistic; only the persistence screen catches it. Even genuine emission-cutters span 1975–2012 — no treaty era here either.</a:t>
+              <a:t>Routes around the constructive verdict: fuel substitution (5), evidence limits (4), collapse (1). Netherlands 1975: gas substitution forty years before US shale. Somalia 1985: collapse mimics decarbonization in every raw statistic; only the persistence screen catches it. Breaks span 1975–2012 — no treaty era here either.</a:t>
             </a:r>
           </a:p>
         </p:txBody>
@@ -1153,7 +1153,7 @@
           <a:lstStyle/>
           <a:p>
             <a:r>
-              <a:t>Left: primary mechanism by country — fuel-market transformations cluster in the Americas and MENA, restructuring across Asia-Pacific, policy-enabled cases in northern Europe. Right: transition quality — dark-green outlines mark the nine; much of the map is contraction, incompleteness, or intensity gains overwhelmed by growth.</a:t>
+              <a:t>Fuel-market transformations cluster in the Americas and MENA; restructuring across Asia-Pacific; policy-enabled cases in northern Europe. Right: much of the map is contraction, incompleteness, or intensity gains overwhelmed by growth.</a:t>
             </a:r>
           </a:p>
         </p:txBody>
@@ -1223,7 +1223,7 @@
           <a:lstStyle/>
           <a:p>
             <a:r>
-              <a:t>Policy-enabled cases rank high on independent assessments: median CAT percentile ~64 vs 34 for other classified breaks; CCPI ~91 vs 44. But CAT covers only 3 of the 9 and CCPI 2 — every covered country is shown as a dot so the thin coverage is visible. Corroborative, not definitive.</a:t>
+              <a:t>Median CAT percentile ~64 vs 34; CCPI ~91 vs 44. Corroborative, not definitive.</a:t>
             </a:r>
           </a:p>
         </p:txBody>
@@ -1433,7 +1433,7 @@
           <a:lstStyle/>
           <a:p>
             <a:r>
-              <a:t>97 eligible breaks classified by realized transition quality — and none of this heterogeneity aligns on a treaty date. The treaty question dissolves into 97 national stories; nine end in unambiguous decarbonization.</a:t>
+              <a:t>None of this heterogeneity aligns on a treaty date. The treaty question dissolves into 97 national stories; nine end in unambiguous decarbonization.</a:t>
             </a:r>
           </a:p>
         </p:txBody>
@@ -1503,7 +1503,7 @@
           <a:lstStyle/>
           <a:p>
             <a:r>
-              <a:t>End on the closing line and the four-part method signature. If one sentence survives the talk, it is this one.</a:t>
+              <a:t>End on the closing line and the four-part method signature.</a:t>
             </a:r>
           </a:p>
         </p:txBody>
@@ -1573,7 +1573,7 @@
           <a:lstStyle/>
           <a:p>
             <a:r>
-              <a:t>One methods slide on the estimator, one on the sample. Emphasize: 'when, not why' — the design lock's central discipline.</a:t>
+              <a:t>Keep this conversational: two lines and a kink, tried at every year; then shake the data to see if the date holds still. The 'two doors' framing sets up the mechanism logic used throughout Acts II-III.</a:t>
             </a:r>
           </a:p>
         </p:txBody>
@@ -1643,7 +1643,7 @@
           <a:lstStyle/>
           <a:p>
             <a:r>
-              <a:t>The funnel figure is from the current deck. The five-step ladder is the frozen attribution standard — it returns in Act I applied to Paris itself.</a:t>
+              <a:t>The placebo idea in one line: a significant result at the treaty year means little if 1990 and 1994 are just as 'significant'. The ladder is the paper's discipline — and Act I applies it to Paris.</a:t>
             </a:r>
           </a:p>
         </p:txBody>
@@ -1713,7 +1713,7 @@
           <a:lstStyle/>
           <a:p>
             <a:r>
-              <a:t>Act I is reframed relative to earlier drafts: not 'treaties failed' but 'the record shows a real recent acceleration whose timing cannot yet separate Paris from the renewables cost decline.'</a:t>
+              <a:t>Act I is reframed: not 'treaties failed' but 'the record shows a real recent acceleration whose timing cannot yet separate Paris from the renewables cost decline.'</a:t>
             </a:r>
           </a:p>
         </p:txBody>
@@ -1783,7 +1783,7 @@
           <a:lstStyle/>
           <a:p>
             <a:r>
-              <a:t>C/GDP breaks ~1973, E/GDP ~1974 — the oil-shock era. C/E's point estimate is 1992 but its interval spans 1978–2011: it does not uniquely identify Rio. Multiple-break models show several episodes, not one intervention. Robust to consumption-based emissions, excluding former Soviet economies, PPP GDP.</a:t>
+              <a:t>C/GDP breaks ~1973, E/GDP ~1974 — the oil-shock era. C/E's point estimate is 1992 but its interval spans 1978–2011: it does not uniquely identify Rio. Robust to consumption-based emissions, excluding former Soviet economies, PPP GDP.</a:t>
             </a:r>
           </a:p>
         </p:txBody>
@@ -1853,7 +1853,7 @@
           <a:lstStyle/>
           <a:p>
             <a:r>
-              <a:t>The post-2015 points fall below the extrapolated Rio-to-Paris trend: a real supply-side acceleration (C/E −0.7 pp/yr, NW t=4.3; C/GDP −0.9, t=2.9). But onsets from 2011–2016 fit the full record about equally well (best 2013), and E/GDP shows no acceleration. So the acceleration is what an effective Paris should look like — and it cannot yet be separated from the renewables cost collapse that preceded the treaty.</a:t>
+              <a:t>A real supply-side acceleration (C/E −0.7 pp/yr, NW t=4.3; C/GDP −0.9, t=2.9). But onsets from 2011–2016 fit the full record about equally well (best 2013), and E/GDP shows no acceleration. What an effective Paris should look like — and not yet separable from the renewables cost collapse that preceded the treaty.</a:t>
             </a:r>
           </a:p>
         </p:txBody>
@@ -1923,7 +1923,7 @@
           <a:lstStyle/>
           <a:p>
             <a:r>
-              <a:t>Kaya growth accounting by era. Emissions growth slowed from +2.1 to +0.4%/yr after 2015 — but roughly two-thirds of the slowdown is slower GDP growth; one-third is the cleaner fuel mix. The dotted line marks the intensity decline needed to hold emissions flat: the world is still short of it.</a:t>
+              <a:t>Emissions growth slowed from +2.1 to +0.4%/yr after 2015 — but roughly two-thirds of the slowdown is slower GDP growth; one-third is the cleaner fuel mix. The gap to the dotted line is the remaining task.</a:t>
             </a:r>
           </a:p>
         </p:txBody>
@@ -1993,7 +1993,7 @@
           <a:lstStyle/>
           <a:p>
             <a:r>
-              <a:t>Top: the model-fit profile across candidate break years is a plateau — why a significant treaty-year hinge is weak evidence alone. Bottom: the evidentiary funnel. Nominal treaty-date significance is common (48–69% of series); date-uniqueness is rare (Rio: 10 C/GDP, 21 C/E, 34 E/GDP series; Paris: 14, 5, 6). Applied to Paris's own decade, the same discipline dates the global acceleration's onset to ~2013.</a:t>
+              <a:t>Nominal treaty-date significance is common (48–69% of series); date-uniqueness is rare (Rio: 10/21/34 series by component; Paris: 14/5/6). The same discipline applied to Paris's decade dates the global acceleration's onset to ~2013.</a:t>
             </a:r>
           </a:p>
         </p:txBody>
@@ -5059,7 +5059,7 @@
               </a:spcAft>
             </a:pPr>
             <a:r>
-              <a:rPr sz="1500" b="1">
+              <a:rPr sz="1500" b="1" i="0">
                 <a:solidFill>
                   <a:srgbClr val="1B7837"/>
                 </a:solidFill>
@@ -5098,7 +5098,7 @@
               </a:spcAft>
             </a:pPr>
             <a:r>
-              <a:rPr sz="1350" b="1">
+              <a:rPr sz="1350" b="1" i="0">
                 <a:solidFill>
                   <a:srgbClr val="212121"/>
                 </a:solidFill>
@@ -5107,7 +5107,7 @@
               <a:t>204 jurisdictions     </a:t>
             </a:r>
             <a:r>
-              <a:rPr sz="1350" b="1">
+              <a:rPr sz="1350" b="1" i="0">
                 <a:solidFill>
                   <a:srgbClr val="212121"/>
                 </a:solidFill>
@@ -5116,7 +5116,7 @@
               <a:t>97 eligible national breaks     </a:t>
             </a:r>
             <a:r>
-              <a:rPr sz="1350" b="1">
+              <a:rPr sz="1350" b="1" i="0">
                 <a:solidFill>
                   <a:srgbClr val="212121"/>
                 </a:solidFill>
@@ -5125,7 +5125,7 @@
               <a:t>7 mechanism families     </a:t>
             </a:r>
             <a:r>
-              <a:rPr sz="1350" b="1">
+              <a:rPr sz="1350" b="1" i="0">
                 <a:solidFill>
                   <a:srgbClr val="1B7837"/>
                 </a:solidFill>
@@ -5162,8 +5162,8 @@
         </p:nvSpPr>
         <p:spPr>
           <a:xfrm>
-            <a:off x="502920" y="256032"/>
-            <a:ext cx="11201400" cy="1051560"/>
+            <a:off x="502920" y="274320"/>
+            <a:ext cx="11201400" cy="914400"/>
           </a:xfrm>
           <a:prstGeom prst="rect">
             <a:avLst/>
@@ -5198,7 +5198,7 @@
               </a:spcAft>
             </a:pPr>
             <a:r>
-              <a:rPr sz="2700" b="1" i="0">
+              <a:rPr sz="2400" b="1" i="0">
                 <a:solidFill>
                   <a:srgbClr val="212121"/>
                 </a:solidFill>
@@ -5253,7 +5253,7 @@
               </a:spcAft>
             </a:pPr>
             <a:r>
-              <a:rPr sz="1350" b="1">
+              <a:rPr sz="1350" b="1" i="0">
                 <a:solidFill>
                   <a:srgbClr val="1B7837"/>
                 </a:solidFill>
@@ -5262,13 +5262,13 @@
               <a:t>•  </a:t>
             </a:r>
             <a:r>
-              <a:rPr sz="1350" b="0">
+              <a:rPr sz="1350" b="0" i="0">
                 <a:solidFill>
                   <a:srgbClr val="555555"/>
                 </a:solidFill>
                 <a:latin typeface="Calibri"/>
               </a:rPr>
-              <a:t>A real post-2013 supply-side acceleration: C/E falling −0.5%/yr after a flat quarter-century; C/GDP −0.9 pp/yr faster than the Rio-to-Paris trend (Newey–West).</a:t>
+              <a:t>A real post-2013 supply-side acceleration: the fuel mix is improving −0.5%/yr after a flat quarter-century; overall intensity is falling ~0.9 pp/yr faster than its Rio-to-Paris trend.</a:t>
             </a:r>
           </a:p>
           <a:p>
@@ -5278,7 +5278,7 @@
               </a:spcAft>
             </a:pPr>
             <a:r>
-              <a:rPr sz="1350" b="1">
+              <a:rPr sz="1350" b="1" i="0">
                 <a:solidFill>
                   <a:srgbClr val="1B7837"/>
                 </a:solidFill>
@@ -5287,7 +5287,7 @@
               <a:t>•  </a:t>
             </a:r>
             <a:r>
-              <a:rPr sz="1350" b="0">
+              <a:rPr sz="1350" b="0" i="0">
                 <a:solidFill>
                   <a:srgbClr val="555555"/>
                 </a:solidFill>
@@ -5303,7 +5303,7 @@
               </a:spcAft>
             </a:pPr>
             <a:r>
-              <a:rPr sz="1350" b="1">
+              <a:rPr sz="1350" b="1" i="0">
                 <a:solidFill>
                   <a:srgbClr val="1B7837"/>
                 </a:solidFill>
@@ -5312,13 +5312,13 @@
               <a:t>•  </a:t>
             </a:r>
             <a:r>
-              <a:rPr sz="1350" b="0">
+              <a:rPr sz="1350" b="0" i="0">
                 <a:solidFill>
                   <a:srgbClr val="555555"/>
                 </a:solidFill>
                 <a:latin typeface="Calibri"/>
               </a:rPr>
-              <a:t>No acceleration on the demand side (E/GDP): efficiency and structure continue their 50-year trend.</a:t>
+              <a:t>No acceleration on the demand side: energy efficiency continues its 50-year trend, no faster.</a:t>
             </a:r>
           </a:p>
         </p:txBody>
@@ -5367,7 +5367,7 @@
               </a:spcAft>
             </a:pPr>
             <a:r>
-              <a:rPr sz="1350" b="1">
+              <a:rPr sz="1350" b="1" i="0">
                 <a:solidFill>
                   <a:srgbClr val="B33A3A"/>
                 </a:solidFill>
@@ -5376,13 +5376,13 @@
               <a:t>•  </a:t>
             </a:r>
             <a:r>
-              <a:rPr sz="1350" b="0">
+              <a:rPr sz="1350" b="0" i="0">
                 <a:solidFill>
                   <a:srgbClr val="555555"/>
                 </a:solidFill>
                 <a:latin typeface="Calibri"/>
               </a:rPr>
-              <a:t>Timing: candidate onsets 2011–2016 fit about equally well (best 2013) — indistinguishable from the renewables cost collapse that preceded Paris.</a:t>
+              <a:t>Timing: start years from 2011 to 2016 fit about equally well (best: 2013) — indistinguishable from the renewables cost collapse that preceded Paris.</a:t>
             </a:r>
           </a:p>
           <a:p>
@@ -5392,7 +5392,7 @@
               </a:spcAft>
             </a:pPr>
             <a:r>
-              <a:rPr sz="1350" b="1">
+              <a:rPr sz="1350" b="1" i="0">
                 <a:solidFill>
                   <a:srgbClr val="B33A3A"/>
                 </a:solidFill>
@@ -5401,13 +5401,13 @@
               <a:t>•  </a:t>
             </a:r>
             <a:r>
-              <a:rPr sz="1350" b="0">
+              <a:rPr sz="1350" b="0" i="0">
                 <a:solidFill>
                   <a:srgbClr val="555555"/>
                 </a:solidFill>
                 <a:latin typeface="Calibri"/>
               </a:rPr>
-              <a:t>Power: with 8 post-Paris years, only an acceleration ≈0.8 pp/yr is detectable at 80% power — Paris would have had to double a 50-year trend to prove itself already.</a:t>
+              <a:t>Power: with only 8 post-Paris years, we could only detect a very large acceleration — Paris would have had to double a 50-year trend to prove itself already.</a:t>
             </a:r>
           </a:p>
           <a:p>
@@ -5417,7 +5417,7 @@
               </a:spcAft>
             </a:pPr>
             <a:r>
-              <a:rPr sz="1350" b="1">
+              <a:rPr sz="1350" b="1" i="0">
                 <a:solidFill>
                   <a:srgbClr val="B33A3A"/>
                 </a:solidFill>
@@ -5426,7 +5426,7 @@
               <a:t>•  </a:t>
             </a:r>
             <a:r>
-              <a:rPr sz="1350" b="0">
+              <a:rPr sz="1350" b="0" i="0">
                 <a:solidFill>
                   <a:srgbClr val="555555"/>
                 </a:solidFill>
@@ -5442,7 +5442,7 @@
               </a:spcAft>
             </a:pPr>
             <a:r>
-              <a:rPr sz="1350" b="1">
+              <a:rPr sz="1350" b="1" i="0">
                 <a:solidFill>
                   <a:srgbClr val="B33A3A"/>
                 </a:solidFill>
@@ -5451,13 +5451,13 @@
               <a:t>•  </a:t>
             </a:r>
             <a:r>
-              <a:rPr sz="1350" b="0">
+              <a:rPr sz="1350" b="0" i="0">
                 <a:solidFill>
                   <a:srgbClr val="555555"/>
                 </a:solidFill>
                 <a:latin typeface="Calibri"/>
               </a:rPr>
-              <a:t>Design: Paris works through NDCs and national transformation — its signature should appear country by country. So we look there.</a:t>
+              <a:t>Design: Paris works through national pledges and national transformation — its signature should appear country by country. So we look there.</a:t>
             </a:r>
           </a:p>
         </p:txBody>
@@ -5488,8 +5488,8 @@
         </p:nvSpPr>
         <p:spPr>
           <a:xfrm>
-            <a:off x="502920" y="256032"/>
-            <a:ext cx="11201400" cy="1051560"/>
+            <a:off x="502920" y="274320"/>
+            <a:ext cx="11201400" cy="914400"/>
           </a:xfrm>
           <a:prstGeom prst="rect">
             <a:avLst/>
@@ -5524,20 +5524,68 @@
               </a:spcAft>
             </a:pPr>
             <a:r>
-              <a:rPr sz="2700" b="1" i="0">
+              <a:rPr sz="2400" b="1" i="0">
                 <a:solidFill>
                   <a:srgbClr val="212121"/>
                 </a:solidFill>
                 <a:latin typeface="Calibri"/>
               </a:rPr>
-              <a:t>97 national breaks across five decades — tracking economic history</a:t>
+              <a:t>97 national breaks, five decades of economic history</a:t>
+            </a:r>
+          </a:p>
+        </p:txBody>
+      </p:sp>
+      <p:sp>
+        <p:nvSpPr>
+          <p:cNvPr id="3" name="TextBox 2"/>
+          <p:cNvSpPr txBox="1"/>
+          <p:nvPr/>
+        </p:nvSpPr>
+        <p:spPr>
+          <a:xfrm>
+            <a:off x="502920" y="1207008"/>
+            <a:ext cx="11201400" cy="603504"/>
+          </a:xfrm>
+          <a:prstGeom prst="rect">
+            <a:avLst/>
+          </a:prstGeom>
+          <a:noFill/>
+        </p:spPr>
+        <p:txBody>
+          <a:bodyPr wrap="square">
+            <a:spAutoFit/>
+          </a:bodyPr>
+          <a:lstStyle/>
+          <a:p>
+            <a:pPr algn="l">
+              <a:spcAft>
+                <a:spcPts val="0"/>
+              </a:spcAft>
+            </a:pPr>
+            <a:r>
+              <a:rPr sz="1250" b="1" i="0">
+                <a:solidFill>
+                  <a:srgbClr val="3A66A5"/>
+                </a:solidFill>
+                <a:latin typeface="Calibri"/>
+              </a:rPr>
+              <a:t>How to read it:  </a:t>
+            </a:r>
+            <a:r>
+              <a:rPr sz="1250" b="0" i="0">
+                <a:solidFill>
+                  <a:srgbClr val="555555"/>
+                </a:solidFill>
+                <a:latin typeface="Calibri"/>
+              </a:rPr>
+              <a:t>Top: each dot is one country, placed at its estimated break year; green triangles are the nine policy-enabled cases. Shaded bands mark major economic and political episodes; Rio and Paris are the two dashed lines. Bottom: how often a documented historical event falls near a country's break (red) versus what randomly chosen years would produce (blue).</a:t>
             </a:r>
           </a:p>
         </p:txBody>
       </p:sp>
       <p:pic>
         <p:nvPicPr>
-          <p:cNvPr id="3" name="Picture 2" descr="takeaway_fig03_when_and_why_curves_bend.png"/>
+          <p:cNvPr id="4" name="Picture 3" descr="takeaway_fig03_when_and_why_curves_bend.png"/>
           <p:cNvPicPr>
             <a:picLocks noChangeAspect="1"/>
           </p:cNvPicPr>
@@ -5551,8 +5599,8 @@
         </p:blipFill>
         <p:spPr>
           <a:xfrm>
-            <a:off x="2760116" y="1325880"/>
-            <a:ext cx="6668719" cy="5129783"/>
+            <a:off x="3015691" y="1865376"/>
+            <a:ext cx="6157569" cy="4736592"/>
           </a:xfrm>
           <a:prstGeom prst="rect">
             <a:avLst/>
@@ -5585,8 +5633,8 @@
         </p:nvSpPr>
         <p:spPr>
           <a:xfrm>
-            <a:off x="502920" y="256032"/>
-            <a:ext cx="11201400" cy="1051560"/>
+            <a:off x="502920" y="274320"/>
+            <a:ext cx="11201400" cy="914400"/>
           </a:xfrm>
           <a:prstGeom prst="rect">
             <a:avLst/>
@@ -5621,20 +5669,68 @@
               </a:spcAft>
             </a:pPr>
             <a:r>
-              <a:rPr sz="2700" b="1" i="0">
+              <a:rPr sz="2400" b="1" i="0">
                 <a:solidFill>
                   <a:srgbClr val="212121"/>
                 </a:solidFill>
                 <a:latin typeface="Calibri"/>
               </a:rPr>
-              <a:t>What accompanied the bends: mostly markets, restructuring, disruption</a:t>
+              <a:t>What accompanied the bends</a:t>
+            </a:r>
+          </a:p>
+        </p:txBody>
+      </p:sp>
+      <p:sp>
+        <p:nvSpPr>
+          <p:cNvPr id="3" name="TextBox 2"/>
+          <p:cNvSpPr txBox="1"/>
+          <p:nvPr/>
+        </p:nvSpPr>
+        <p:spPr>
+          <a:xfrm>
+            <a:off x="502920" y="1207008"/>
+            <a:ext cx="11201400" cy="603504"/>
+          </a:xfrm>
+          <a:prstGeom prst="rect">
+            <a:avLst/>
+          </a:prstGeom>
+          <a:noFill/>
+        </p:spPr>
+        <p:txBody>
+          <a:bodyPr wrap="square">
+            <a:spAutoFit/>
+          </a:bodyPr>
+          <a:lstStyle/>
+          <a:p>
+            <a:pPr algn="l">
+              <a:spcAft>
+                <a:spcPts val="0"/>
+              </a:spcAft>
+            </a:pPr>
+            <a:r>
+              <a:rPr sz="1250" b="1" i="0">
+                <a:solidFill>
+                  <a:srgbClr val="3A66A5"/>
+                </a:solidFill>
+                <a:latin typeface="Calibri"/>
+              </a:rPr>
+              <a:t>How to read it:  </a:t>
+            </a:r>
+            <a:r>
+              <a:rPr sz="1250" b="0" i="0">
+                <a:solidFill>
+                  <a:srgbClr val="555555"/>
+                </a:solidFill>
+                <a:latin typeface="Calibri"/>
+              </a:rPr>
+              <a:t>One square per country, grouped by the historical process best supported by documentary evidence around its break. Green marks the countries where climate policy and low-carbon technology are that best-supported process; light gray means the record cannot yet explain the break — reported honestly rather than forced into a category.</a:t>
             </a:r>
           </a:p>
         </p:txBody>
       </p:sp>
       <p:pic>
         <p:nvPicPr>
-          <p:cNvPr id="3" name="Picture 2" descr="takeaway_fig04_mechanism_census.png"/>
+          <p:cNvPr id="4" name="Picture 3" descr="takeaway_fig04_mechanism_census.png"/>
           <p:cNvPicPr>
             <a:picLocks noChangeAspect="1"/>
           </p:cNvPicPr>
@@ -5648,8 +5744,8 @@
         </p:blipFill>
         <p:spPr>
           <a:xfrm>
-            <a:off x="787802" y="1325880"/>
-            <a:ext cx="10613346" cy="5129783"/>
+            <a:off x="1194553" y="1865376"/>
+            <a:ext cx="9799845" cy="4736592"/>
           </a:xfrm>
           <a:prstGeom prst="rect">
             <a:avLst/>
@@ -5682,8 +5778,8 @@
         </p:nvSpPr>
         <p:spPr>
           <a:xfrm>
-            <a:off x="502920" y="256032"/>
-            <a:ext cx="11201400" cy="1051560"/>
+            <a:off x="502920" y="274320"/>
+            <a:ext cx="11201400" cy="914400"/>
           </a:xfrm>
           <a:prstGeom prst="rect">
             <a:avLst/>
@@ -5718,7 +5814,7 @@
               </a:spcAft>
             </a:pPr>
             <a:r>
-              <a:rPr sz="2700" b="1" i="0">
+              <a:rPr sz="2400" b="1" i="0">
                 <a:solidFill>
                   <a:srgbClr val="212121"/>
                 </a:solidFill>
@@ -5773,7 +5869,7 @@
               </a:spcAft>
             </a:pPr>
             <a:r>
-              <a:rPr sz="1200" b="1">
+              <a:rPr sz="1200" b="1" i="0">
                 <a:solidFill>
                   <a:srgbClr val="212121"/>
                 </a:solidFill>
@@ -5782,7 +5878,7 @@
               <a:t>Policy-enabled low carbon — </a:t>
             </a:r>
             <a:r>
-              <a:rPr sz="1200" b="0">
+              <a:rPr sz="1200" b="0" i="0">
                 <a:solidFill>
                   <a:srgbClr val="555555"/>
                 </a:solidFill>
@@ -5798,7 +5894,7 @@
               </a:spcAft>
             </a:pPr>
             <a:r>
-              <a:rPr sz="1200" b="1">
+              <a:rPr sz="1200" b="1" i="0">
                 <a:solidFill>
                   <a:srgbClr val="212121"/>
                 </a:solidFill>
@@ -5807,7 +5903,7 @@
               <a:t>Fuel &amp; energy markets — </a:t>
             </a:r>
             <a:r>
-              <a:rPr sz="1200" b="0">
+              <a:rPr sz="1200" b="0" i="0">
                 <a:solidFill>
                   <a:srgbClr val="555555"/>
                 </a:solidFill>
@@ -5823,7 +5919,7 @@
               </a:spcAft>
             </a:pPr>
             <a:r>
-              <a:rPr sz="1200" b="1">
+              <a:rPr sz="1200" b="1" i="0">
                 <a:solidFill>
                   <a:srgbClr val="212121"/>
                 </a:solidFill>
@@ -5832,7 +5928,7 @@
               <a:t>Economic restructuring — </a:t>
             </a:r>
             <a:r>
-              <a:rPr sz="1200" b="0">
+              <a:rPr sz="1200" b="0" i="0">
                 <a:solidFill>
                   <a:srgbClr val="555555"/>
                 </a:solidFill>
@@ -5848,7 +5944,7 @@
               </a:spcAft>
             </a:pPr>
             <a:r>
-              <a:rPr sz="1200" b="1">
+              <a:rPr sz="1200" b="1" i="0">
                 <a:solidFill>
                   <a:srgbClr val="212121"/>
                 </a:solidFill>
@@ -5857,7 +5953,7 @@
               <a:t>Macroeconomic shock — </a:t>
             </a:r>
             <a:r>
-              <a:rPr sz="1200" b="0">
+              <a:rPr sz="1200" b="0" i="0">
                 <a:solidFill>
                   <a:srgbClr val="555555"/>
                 </a:solidFill>
@@ -5873,7 +5969,7 @@
               </a:spcAft>
             </a:pPr>
             <a:r>
-              <a:rPr sz="1200" b="1">
+              <a:rPr sz="1200" b="1" i="0">
                 <a:solidFill>
                   <a:srgbClr val="212121"/>
                 </a:solidFill>
@@ -5882,7 +5978,7 @@
               <a:t>Political disruption — </a:t>
             </a:r>
             <a:r>
-              <a:rPr sz="1200" b="0">
+              <a:rPr sz="1200" b="0" i="0">
                 <a:solidFill>
                   <a:srgbClr val="555555"/>
                 </a:solidFill>
@@ -5898,7 +5994,7 @@
               </a:spcAft>
             </a:pPr>
             <a:r>
-              <a:rPr sz="1200" b="1">
+              <a:rPr sz="1200" b="1" i="0">
                 <a:solidFill>
                   <a:srgbClr val="212121"/>
                 </a:solidFill>
@@ -5907,7 +6003,7 @@
               <a:t>Development &amp; energy access — </a:t>
             </a:r>
             <a:r>
-              <a:rPr sz="1200" b="0">
+              <a:rPr sz="1200" b="0" i="0">
                 <a:solidFill>
                   <a:srgbClr val="555555"/>
                 </a:solidFill>
@@ -5923,7 +6019,7 @@
               </a:spcAft>
             </a:pPr>
             <a:r>
-              <a:rPr sz="1200" b="1">
+              <a:rPr sz="1200" b="1" i="0">
                 <a:solidFill>
                   <a:srgbClr val="212121"/>
                 </a:solidFill>
@@ -5932,7 +6028,7 @@
               <a:t>No attributed mechanism — </a:t>
             </a:r>
             <a:r>
-              <a:rPr sz="1200" b="0">
+              <a:rPr sz="1200" b="0" i="0">
                 <a:solidFill>
                   <a:srgbClr val="555555"/>
                 </a:solidFill>
@@ -5993,7 +6089,7 @@
                 </a:solidFill>
                 <a:latin typeface="Calibri"/>
               </a:rPr>
-              <a:t>favorable? persistent? absolute CO2 falling? constructive mechanism?</a:t>
+              <a:t>Did the trend improve? Did it last? Did absolute CO2 actually fall? Was the underlying process constructive?</a:t>
             </a:r>
           </a:p>
           <a:p>
@@ -6003,7 +6099,7 @@
               </a:spcAft>
             </a:pPr>
             <a:r>
-              <a:rPr sz="1200" b="1">
+              <a:rPr sz="1200" b="1" i="0">
                 <a:solidFill>
                   <a:srgbClr val="212121"/>
                 </a:solidFill>
@@ -6012,7 +6108,7 @@
               <a:t>Constructive persistent decarbonization </a:t>
             </a:r>
             <a:r>
-              <a:rPr sz="1200" b="1">
+              <a:rPr sz="1200" b="1" i="0">
                 <a:solidFill>
                   <a:srgbClr val="1B7837"/>
                 </a:solidFill>
@@ -6021,7 +6117,7 @@
               <a:t>(9) — </a:t>
             </a:r>
             <a:r>
-              <a:rPr sz="1200" b="0">
+              <a:rPr sz="1200" b="0" i="0">
                 <a:solidFill>
                   <a:srgbClr val="555555"/>
                 </a:solidFill>
@@ -6037,7 +6133,7 @@
               </a:spcAft>
             </a:pPr>
             <a:r>
-              <a:rPr sz="1200" b="1">
+              <a:rPr sz="1200" b="1" i="0">
                 <a:solidFill>
                   <a:srgbClr val="212121"/>
                 </a:solidFill>
@@ -6046,7 +6142,7 @@
               <a:t>Persistent fuel substitution </a:t>
             </a:r>
             <a:r>
-              <a:rPr sz="1200" b="1">
+              <a:rPr sz="1200" b="1" i="0">
                 <a:solidFill>
                   <a:srgbClr val="8A8A8A"/>
                 </a:solidFill>
@@ -6055,7 +6151,7 @@
               <a:t>(13) — </a:t>
             </a:r>
             <a:r>
-              <a:rPr sz="1200" b="0">
+              <a:rPr sz="1200" b="0" i="0">
                 <a:solidFill>
                   <a:srgbClr val="555555"/>
                 </a:solidFill>
@@ -6071,7 +6167,7 @@
               </a:spcAft>
             </a:pPr>
             <a:r>
-              <a:rPr sz="1200" b="1">
+              <a:rPr sz="1200" b="1" i="0">
                 <a:solidFill>
                   <a:srgbClr val="212121"/>
                 </a:solidFill>
@@ -6080,7 +6176,7 @@
               <a:t>Intensity gain; CO2 still rising </a:t>
             </a:r>
             <a:r>
-              <a:rPr sz="1200" b="1">
+              <a:rPr sz="1200" b="1" i="0">
                 <a:solidFill>
                   <a:srgbClr val="8A8A8A"/>
                 </a:solidFill>
@@ -6089,7 +6185,7 @@
               <a:t>(12) — </a:t>
             </a:r>
             <a:r>
-              <a:rPr sz="1200" b="0">
+              <a:rPr sz="1200" b="0" i="0">
                 <a:solidFill>
                   <a:srgbClr val="555555"/>
                 </a:solidFill>
@@ -6105,7 +6201,7 @@
               </a:spcAft>
             </a:pPr>
             <a:r>
-              <a:rPr sz="1200" b="1">
+              <a:rPr sz="1200" b="1" i="0">
                 <a:solidFill>
                   <a:srgbClr val="212121"/>
                 </a:solidFill>
@@ -6114,7 +6210,7 @@
               <a:t>Contractionary / disruptive </a:t>
             </a:r>
             <a:r>
-              <a:rPr sz="1200" b="1">
+              <a:rPr sz="1200" b="1" i="0">
                 <a:solidFill>
                   <a:srgbClr val="8A8A8A"/>
                 </a:solidFill>
@@ -6123,7 +6219,7 @@
               <a:t>(20) — </a:t>
             </a:r>
             <a:r>
-              <a:rPr sz="1200" b="0">
+              <a:rPr sz="1200" b="0" i="0">
                 <a:solidFill>
                   <a:srgbClr val="555555"/>
                 </a:solidFill>
@@ -6139,7 +6235,7 @@
               </a:spcAft>
             </a:pPr>
             <a:r>
-              <a:rPr sz="1200" b="1">
+              <a:rPr sz="1200" b="1" i="0">
                 <a:solidFill>
                   <a:srgbClr val="212121"/>
                 </a:solidFill>
@@ -6148,7 +6244,7 @@
               <a:t>Incomplete / nonpersistent </a:t>
             </a:r>
             <a:r>
-              <a:rPr sz="1200" b="1">
+              <a:rPr sz="1200" b="1" i="0">
                 <a:solidFill>
                   <a:srgbClr val="8A8A8A"/>
                 </a:solidFill>
@@ -6157,7 +6253,7 @@
               <a:t>(21) — </a:t>
             </a:r>
             <a:r>
-              <a:rPr sz="1200" b="0">
+              <a:rPr sz="1200" b="0" i="0">
                 <a:solidFill>
                   <a:srgbClr val="555555"/>
                 </a:solidFill>
@@ -6173,7 +6269,7 @@
               </a:spcAft>
             </a:pPr>
             <a:r>
-              <a:rPr sz="1200" b="1">
+              <a:rPr sz="1200" b="1" i="0">
                 <a:solidFill>
                   <a:srgbClr val="212121"/>
                 </a:solidFill>
@@ -6182,7 +6278,7 @@
               <a:t>Outcome not classifiable </a:t>
             </a:r>
             <a:r>
-              <a:rPr sz="1200" b="1">
+              <a:rPr sz="1200" b="1" i="0">
                 <a:solidFill>
                   <a:srgbClr val="8A8A8A"/>
                 </a:solidFill>
@@ -6191,7 +6287,7 @@
               <a:t>(22) — </a:t>
             </a:r>
             <a:r>
-              <a:rPr sz="1200" b="0">
+              <a:rPr sz="1200" b="0" i="0">
                 <a:solidFill>
                   <a:srgbClr val="555555"/>
                 </a:solidFill>
@@ -6228,8 +6324,8 @@
         </p:nvSpPr>
         <p:spPr>
           <a:xfrm>
-            <a:off x="502920" y="256032"/>
-            <a:ext cx="11201400" cy="1051560"/>
+            <a:off x="502920" y="274320"/>
+            <a:ext cx="11201400" cy="914400"/>
           </a:xfrm>
           <a:prstGeom prst="rect">
             <a:avLst/>
@@ -6250,7 +6346,7 @@
             <a:r>
               <a:rPr sz="1200" b="1" i="0">
                 <a:solidFill>
-                  <a:srgbClr val="1B7837"/>
+                  <a:srgbClr val="C77F00"/>
                 </a:solidFill>
                 <a:latin typeface="Calibri"/>
               </a:rPr>
@@ -6264,20 +6360,68 @@
               </a:spcAft>
             </a:pPr>
             <a:r>
-              <a:rPr sz="2700" b="1" i="0">
+              <a:rPr sz="2400" b="1" i="0">
                 <a:solidFill>
                   <a:srgbClr val="212121"/>
                 </a:solidFill>
                 <a:latin typeface="Calibri"/>
               </a:rPr>
-              <a:t>From mechanism to verdict: 97 countries flow to six outcomes</a:t>
+              <a:t>From mechanism to verdict: 97 countries, six outcomes</a:t>
+            </a:r>
+          </a:p>
+        </p:txBody>
+      </p:sp>
+      <p:sp>
+        <p:nvSpPr>
+          <p:cNvPr id="3" name="TextBox 2"/>
+          <p:cNvSpPr txBox="1"/>
+          <p:nvPr/>
+        </p:nvSpPr>
+        <p:spPr>
+          <a:xfrm>
+            <a:off x="502920" y="1207008"/>
+            <a:ext cx="11201400" cy="603504"/>
+          </a:xfrm>
+          <a:prstGeom prst="rect">
+            <a:avLst/>
+          </a:prstGeom>
+          <a:noFill/>
+        </p:spPr>
+        <p:txBody>
+          <a:bodyPr wrap="square">
+            <a:spAutoFit/>
+          </a:bodyPr>
+          <a:lstStyle/>
+          <a:p>
+            <a:pPr algn="l">
+              <a:spcAft>
+                <a:spcPts val="0"/>
+              </a:spcAft>
+            </a:pPr>
+            <a:r>
+              <a:rPr sz="1250" b="1" i="0">
+                <a:solidFill>
+                  <a:srgbClr val="3A66A5"/>
+                </a:solidFill>
+                <a:latin typeface="Calibri"/>
+              </a:rPr>
+              <a:t>How to read it:  </a:t>
+            </a:r>
+            <a:r>
+              <a:rPr sz="1250" b="0" i="0">
+                <a:solidFill>
+                  <a:srgbClr val="555555"/>
+                </a:solidFill>
+                <a:latin typeface="Calibri"/>
+              </a:rPr>
+              <a:t>Each ribbon carries countries from the process that accompanied their break (left) to how the outcome is judged (right); ribbon width is the number of countries. Follow any left-hand category to see where those transitions actually ended up.</a:t>
             </a:r>
           </a:p>
         </p:txBody>
       </p:sp>
       <p:pic>
         <p:nvPicPr>
-          <p:cNvPr id="3" name="Picture 2" descr="image4.png"/>
+          <p:cNvPr id="4" name="Picture 3" descr="image4.png"/>
           <p:cNvPicPr>
             <a:picLocks noChangeAspect="1"/>
           </p:cNvPicPr>
@@ -6291,8 +6435,8 @@
         </p:blipFill>
         <p:spPr>
           <a:xfrm>
-            <a:off x="2473452" y="1325880"/>
-            <a:ext cx="7242047" cy="5129783"/>
+            <a:off x="2750999" y="1865376"/>
+            <a:ext cx="6686953" cy="4736592"/>
           </a:xfrm>
           <a:prstGeom prst="rect">
             <a:avLst/>
@@ -6325,8 +6469,8 @@
         </p:nvSpPr>
         <p:spPr>
           <a:xfrm>
-            <a:off x="502920" y="256032"/>
-            <a:ext cx="11201400" cy="1051560"/>
+            <a:off x="502920" y="274320"/>
+            <a:ext cx="11201400" cy="914400"/>
           </a:xfrm>
           <a:prstGeom prst="rect">
             <a:avLst/>
@@ -6347,7 +6491,7 @@
             <a:r>
               <a:rPr sz="1200" b="1" i="0">
                 <a:solidFill>
-                  <a:srgbClr val="1B7837"/>
+                  <a:srgbClr val="C77F00"/>
                 </a:solidFill>
                 <a:latin typeface="Calibri"/>
               </a:rPr>
@@ -6361,20 +6505,68 @@
               </a:spcAft>
             </a:pPr>
             <a:r>
-              <a:rPr sz="2700" b="1" i="0">
+              <a:rPr sz="2400" b="1" i="0">
                 <a:solidFill>
                   <a:srgbClr val="212121"/>
                 </a:solidFill>
                 <a:latin typeface="Calibri"/>
               </a:rPr>
-              <a:t>Lower carbon intensity is not the same as falling emissions</a:t>
+              <a:t>Lower intensity is not the same as falling emissions</a:t>
+            </a:r>
+          </a:p>
+        </p:txBody>
+      </p:sp>
+      <p:sp>
+        <p:nvSpPr>
+          <p:cNvPr id="3" name="TextBox 2"/>
+          <p:cNvSpPr txBox="1"/>
+          <p:nvPr/>
+        </p:nvSpPr>
+        <p:spPr>
+          <a:xfrm>
+            <a:off x="502920" y="1207008"/>
+            <a:ext cx="11201400" cy="603504"/>
+          </a:xfrm>
+          <a:prstGeom prst="rect">
+            <a:avLst/>
+          </a:prstGeom>
+          <a:noFill/>
+        </p:spPr>
+        <p:txBody>
+          <a:bodyPr wrap="square">
+            <a:spAutoFit/>
+          </a:bodyPr>
+          <a:lstStyle/>
+          <a:p>
+            <a:pPr algn="l">
+              <a:spcAft>
+                <a:spcPts val="0"/>
+              </a:spcAft>
+            </a:pPr>
+            <a:r>
+              <a:rPr sz="1250" b="1" i="0">
+                <a:solidFill>
+                  <a:srgbClr val="3A66A5"/>
+                </a:solidFill>
+                <a:latin typeface="Calibri"/>
+              </a:rPr>
+              <a:t>How to read it:  </a:t>
+            </a:r>
+            <a:r>
+              <a:rPr sz="1250" b="0" i="0">
+                <a:solidFill>
+                  <a:srgbClr val="555555"/>
+                </a:solidFill>
+                <a:latin typeface="Calibri"/>
+              </a:rPr>
+              <a:t>Each dot is a country. Further right means its intensity trend improved more after the break; below the dashed horizontal line means absolute emissions are actually falling. Success lives only in the lower right — and most improving countries sit above the line, where growth still outruns their gains.</a:t>
             </a:r>
           </a:p>
         </p:txBody>
       </p:sp>
       <p:pic>
         <p:nvPicPr>
-          <p:cNvPr id="3" name="Picture 2" descr="takeaway_fig05_bend_vs_success.png"/>
+          <p:cNvPr id="4" name="Picture 3" descr="takeaway_fig05_bend_vs_success.png"/>
           <p:cNvPicPr>
             <a:picLocks noChangeAspect="1"/>
           </p:cNvPicPr>
@@ -6388,8 +6580,8 @@
         </p:blipFill>
         <p:spPr>
           <a:xfrm>
-            <a:off x="2247138" y="1325880"/>
-            <a:ext cx="7694675" cy="5129783"/>
+            <a:off x="2542032" y="1865376"/>
+            <a:ext cx="7104888" cy="4736592"/>
           </a:xfrm>
           <a:prstGeom prst="rect">
             <a:avLst/>
@@ -6422,8 +6614,8 @@
         </p:nvSpPr>
         <p:spPr>
           <a:xfrm>
-            <a:off x="502920" y="256032"/>
-            <a:ext cx="11201400" cy="1051560"/>
+            <a:off x="502920" y="274320"/>
+            <a:ext cx="11201400" cy="914400"/>
           </a:xfrm>
           <a:prstGeom prst="rect">
             <a:avLst/>
@@ -6444,7 +6636,7 @@
             <a:r>
               <a:rPr sz="1200" b="1" i="0">
                 <a:solidFill>
-                  <a:srgbClr val="1B7837"/>
+                  <a:srgbClr val="C77F00"/>
                 </a:solidFill>
                 <a:latin typeface="Calibri"/>
               </a:rPr>
@@ -6458,7 +6650,7 @@
               </a:spcAft>
             </a:pPr>
             <a:r>
-              <a:rPr sz="2700" b="1" i="0">
+              <a:rPr sz="2400" b="1" i="0">
                 <a:solidFill>
                   <a:srgbClr val="212121"/>
                 </a:solidFill>
@@ -6478,7 +6670,7 @@
         <p:spPr>
           <a:xfrm>
             <a:off x="502920" y="1207008"/>
-            <a:ext cx="11201400" cy="411480"/>
+            <a:ext cx="11201400" cy="384048"/>
           </a:xfrm>
           <a:prstGeom prst="rect">
             <a:avLst/>
@@ -6497,20 +6689,68 @@
               </a:spcAft>
             </a:pPr>
             <a:r>
-              <a:rPr sz="1350" b="0" i="0">
+              <a:rPr sz="1300" b="1" i="0">
+                <a:solidFill>
+                  <a:srgbClr val="212121"/>
+                </a:solidFill>
+                <a:latin typeface="Calibri"/>
+              </a:rPr>
+              <a:t>Sweden 1986 · Finland 1993 · Hungary 1996 · Switzerland 1999 · Nauru 1999 · Denmark 2002 · Portugal 2004 · United Kingdom 2010 · Ireland 2012</a:t>
+            </a:r>
+          </a:p>
+        </p:txBody>
+      </p:sp>
+      <p:sp>
+        <p:nvSpPr>
+          <p:cNvPr id="4" name="TextBox 3"/>
+          <p:cNvSpPr txBox="1"/>
+          <p:nvPr/>
+        </p:nvSpPr>
+        <p:spPr>
+          <a:xfrm>
+            <a:off x="502920" y="1609344"/>
+            <a:ext cx="11201400" cy="603504"/>
+          </a:xfrm>
+          <a:prstGeom prst="rect">
+            <a:avLst/>
+          </a:prstGeom>
+          <a:noFill/>
+        </p:spPr>
+        <p:txBody>
+          <a:bodyPr wrap="square">
+            <a:spAutoFit/>
+          </a:bodyPr>
+          <a:lstStyle/>
+          <a:p>
+            <a:pPr algn="l">
+              <a:spcAft>
+                <a:spcPts val="0"/>
+              </a:spcAft>
+            </a:pPr>
+            <a:r>
+              <a:rPr sz="1250" b="1" i="0">
+                <a:solidFill>
+                  <a:srgbClr val="3A66A5"/>
+                </a:solidFill>
+                <a:latin typeface="Calibri"/>
+              </a:rPr>
+              <a:t>How to read it:  </a:t>
+            </a:r>
+            <a:r>
+              <a:rPr sz="1250" b="0" i="0">
                 <a:solidFill>
                   <a:srgbClr val="555555"/>
                 </a:solidFill>
                 <a:latin typeface="Calibri"/>
               </a:rPr>
-              <a:t>Sweden 1986 · Finland 1993 · Hungary 1996 · Switzerland 1999 · Nauru 1999 · Denmark 2002 · Portugal 2004 · United Kingdom 2010 · Ireland 2012</a:t>
+              <a:t>Each panel is one country. Both lines are set to 100 at its break year: blue is carbon intensity, red is absolute CO2. The defining test is that both fall together after the break (shaded region) — intensity improved, and total emissions genuinely declined.</a:t>
             </a:r>
           </a:p>
         </p:txBody>
       </p:sp>
       <p:pic>
         <p:nvPicPr>
-          <p:cNvPr id="4" name="Picture 3" descr="image7.png"/>
+          <p:cNvPr id="5" name="Picture 4" descr="image7.png"/>
           <p:cNvPicPr>
             <a:picLocks noChangeAspect="1"/>
           </p:cNvPicPr>
@@ -6524,8 +6764,8 @@
         </p:blipFill>
         <p:spPr>
           <a:xfrm>
-            <a:off x="3068293" y="1664208"/>
-            <a:ext cx="6052365" cy="4791455"/>
+            <a:off x="3357051" y="2267712"/>
+            <a:ext cx="5474849" cy="4334256"/>
           </a:xfrm>
           <a:prstGeom prst="rect">
             <a:avLst/>
@@ -6558,8 +6798,8 @@
         </p:nvSpPr>
         <p:spPr>
           <a:xfrm>
-            <a:off x="502920" y="256032"/>
-            <a:ext cx="11201400" cy="1051560"/>
+            <a:off x="502920" y="274320"/>
+            <a:ext cx="11201400" cy="914400"/>
           </a:xfrm>
           <a:prstGeom prst="rect">
             <a:avLst/>
@@ -6580,7 +6820,7 @@
             <a:r>
               <a:rPr sz="1200" b="1" i="0">
                 <a:solidFill>
-                  <a:srgbClr val="1B7837"/>
+                  <a:srgbClr val="C77F00"/>
                 </a:solidFill>
                 <a:latin typeface="Calibri"/>
               </a:rPr>
@@ -6594,20 +6834,68 @@
               </a:spcAft>
             </a:pPr>
             <a:r>
-              <a:rPr sz="2700" b="1" i="0">
+              <a:rPr sz="2400" b="1" i="0">
                 <a:solidFill>
                   <a:srgbClr val="212121"/>
                 </a:solidFill>
                 <a:latin typeface="Calibri"/>
               </a:rPr>
               <a:t>Nineteen countries cut emissions — ten don't earn the verdict</a:t>
+            </a:r>
+          </a:p>
+        </p:txBody>
+      </p:sp>
+      <p:sp>
+        <p:nvSpPr>
+          <p:cNvPr id="3" name="TextBox 2"/>
+          <p:cNvSpPr txBox="1"/>
+          <p:nvPr/>
+        </p:nvSpPr>
+        <p:spPr>
+          <a:xfrm>
+            <a:off x="502920" y="1207008"/>
+            <a:ext cx="11201400" cy="603504"/>
+          </a:xfrm>
+          <a:prstGeom prst="rect">
+            <a:avLst/>
+          </a:prstGeom>
+          <a:noFill/>
+        </p:spPr>
+        <p:txBody>
+          <a:bodyPr wrap="square">
+            <a:spAutoFit/>
+          </a:bodyPr>
+          <a:lstStyle/>
+          <a:p>
+            <a:pPr algn="l">
+              <a:spcAft>
+                <a:spcPts val="0"/>
+              </a:spcAft>
+            </a:pPr>
+            <a:r>
+              <a:rPr sz="1250" b="1" i="0">
+                <a:solidFill>
+                  <a:srgbClr val="3A66A5"/>
+                </a:solidFill>
+                <a:latin typeface="Calibri"/>
+              </a:rPr>
+              <a:t>How to read it:  </a:t>
+            </a:r>
+            <a:r>
+              <a:rPr sz="1250" b="0" i="0">
+                <a:solidFill>
+                  <a:srgbClr val="555555"/>
+                </a:solidFill>
+                <a:latin typeface="Calibri"/>
+              </a:rPr>
+              <a:t>Each row is a country where absolute CO2 fell after a favorable bend. The whisker is the uncertainty around its break year; rows are grouped by the verdict, and each label names the best-supported mechanism. Falling emissions alone are not enough — the route matters.</a:t>
             </a:r>
           </a:p>
         </p:txBody>
       </p:sp>
       <p:pic>
         <p:nvPicPr>
-          <p:cNvPr id="3" name="Picture 2" descr="image8.png"/>
+          <p:cNvPr id="4" name="Picture 3" descr="image8.png"/>
           <p:cNvPicPr>
             <a:picLocks noChangeAspect="1"/>
           </p:cNvPicPr>
@@ -6621,8 +6909,8 @@
         </p:blipFill>
         <p:spPr>
           <a:xfrm>
-            <a:off x="2473452" y="1325880"/>
-            <a:ext cx="7242047" cy="5129783"/>
+            <a:off x="2750999" y="1865376"/>
+            <a:ext cx="6686953" cy="4736592"/>
           </a:xfrm>
           <a:prstGeom prst="rect">
             <a:avLst/>
@@ -6655,8 +6943,8 @@
         </p:nvSpPr>
         <p:spPr>
           <a:xfrm>
-            <a:off x="502920" y="256032"/>
-            <a:ext cx="11201400" cy="1051560"/>
+            <a:off x="502920" y="274320"/>
+            <a:ext cx="11201400" cy="914400"/>
           </a:xfrm>
           <a:prstGeom prst="rect">
             <a:avLst/>
@@ -6691,20 +6979,68 @@
               </a:spcAft>
             </a:pPr>
             <a:r>
-              <a:rPr sz="2700" b="1" i="0">
+              <a:rPr sz="2400" b="1" i="0">
                 <a:solidFill>
                   <a:srgbClr val="212121"/>
                 </a:solidFill>
                 <a:latin typeface="Calibri"/>
               </a:rPr>
-              <a:t>Mechanisms are regional stories; success concentrates where policy changed physical systems</a:t>
+              <a:t>Mechanisms are regional; success is concentrated</a:t>
+            </a:r>
+          </a:p>
+        </p:txBody>
+      </p:sp>
+      <p:sp>
+        <p:nvSpPr>
+          <p:cNvPr id="3" name="TextBox 2"/>
+          <p:cNvSpPr txBox="1"/>
+          <p:nvPr/>
+        </p:nvSpPr>
+        <p:spPr>
+          <a:xfrm>
+            <a:off x="502920" y="1207008"/>
+            <a:ext cx="11201400" cy="603504"/>
+          </a:xfrm>
+          <a:prstGeom prst="rect">
+            <a:avLst/>
+          </a:prstGeom>
+          <a:noFill/>
+        </p:spPr>
+        <p:txBody>
+          <a:bodyPr wrap="square">
+            <a:spAutoFit/>
+          </a:bodyPr>
+          <a:lstStyle/>
+          <a:p>
+            <a:pPr algn="l">
+              <a:spcAft>
+                <a:spcPts val="0"/>
+              </a:spcAft>
+            </a:pPr>
+            <a:r>
+              <a:rPr sz="1250" b="1" i="0">
+                <a:solidFill>
+                  <a:srgbClr val="3A66A5"/>
+                </a:solidFill>
+                <a:latin typeface="Calibri"/>
+              </a:rPr>
+              <a:t>How to read it:  </a:t>
+            </a:r>
+            <a:r>
+              <a:rPr sz="1250" b="0" i="0">
+                <a:solidFill>
+                  <a:srgbClr val="555555"/>
+                </a:solidFill>
+                <a:latin typeface="Calibri"/>
+              </a:rPr>
+              <a:t>Left map: each country is colored by the process that accompanied its break. Right map: the same countries colored by outcome verdict — dark green marks the nine constructive cases, concentrated in northern Europe.</a:t>
             </a:r>
           </a:p>
         </p:txBody>
       </p:sp>
       <p:pic>
         <p:nvPicPr>
-          <p:cNvPr id="3" name="Picture 2" descr="image9.png"/>
+          <p:cNvPr id="4" name="Picture 3" descr="image9.png"/>
           <p:cNvPicPr>
             <a:picLocks noChangeAspect="1"/>
           </p:cNvPicPr>
@@ -6718,7 +7054,7 @@
         </p:blipFill>
         <p:spPr>
           <a:xfrm>
-            <a:off x="274320" y="2552890"/>
+            <a:off x="274320" y="2781490"/>
             <a:ext cx="5806440" cy="2758059"/>
           </a:xfrm>
           <a:prstGeom prst="rect">
@@ -6728,7 +7064,7 @@
       </p:pic>
       <p:pic>
         <p:nvPicPr>
-          <p:cNvPr id="4" name="Picture 3" descr="image10.png"/>
+          <p:cNvPr id="5" name="Picture 4" descr="image10.png"/>
           <p:cNvPicPr>
             <a:picLocks noChangeAspect="1"/>
           </p:cNvPicPr>
@@ -6742,7 +7078,7 @@
         </p:blipFill>
         <p:spPr>
           <a:xfrm>
-            <a:off x="6172200" y="2552890"/>
+            <a:off x="6172200" y="2781490"/>
             <a:ext cx="5806440" cy="2758059"/>
           </a:xfrm>
           <a:prstGeom prst="rect">
@@ -6776,8 +7112,8 @@
         </p:nvSpPr>
         <p:spPr>
           <a:xfrm>
-            <a:off x="502920" y="256032"/>
-            <a:ext cx="11201400" cy="1051560"/>
+            <a:off x="502920" y="274320"/>
+            <a:ext cx="11201400" cy="914400"/>
           </a:xfrm>
           <a:prstGeom prst="rect">
             <a:avLst/>
@@ -6798,7 +7134,7 @@
             <a:r>
               <a:rPr sz="1200" b="1" i="0">
                 <a:solidFill>
-                  <a:srgbClr val="1B7837"/>
+                  <a:srgbClr val="B33A3A"/>
                 </a:solidFill>
                 <a:latin typeface="Calibri"/>
               </a:rPr>
@@ -6812,20 +7148,68 @@
               </a:spcAft>
             </a:pPr>
             <a:r>
-              <a:rPr sz="2700" b="1" i="0">
+              <a:rPr sz="2400" b="1" i="0">
                 <a:solidFill>
                   <a:srgbClr val="212121"/>
                 </a:solidFill>
                 <a:latin typeface="Calibri"/>
               </a:rPr>
-              <a:t>Independent raters recognize the same countries — on thin coverage</a:t>
+              <a:t>Independent raters recognize the same countries</a:t>
+            </a:r>
+          </a:p>
+        </p:txBody>
+      </p:sp>
+      <p:sp>
+        <p:nvSpPr>
+          <p:cNvPr id="3" name="TextBox 2"/>
+          <p:cNvSpPr txBox="1"/>
+          <p:nvPr/>
+        </p:nvSpPr>
+        <p:spPr>
+          <a:xfrm>
+            <a:off x="502920" y="1207008"/>
+            <a:ext cx="11201400" cy="603504"/>
+          </a:xfrm>
+          <a:prstGeom prst="rect">
+            <a:avLst/>
+          </a:prstGeom>
+          <a:noFill/>
+        </p:spPr>
+        <p:txBody>
+          <a:bodyPr wrap="square">
+            <a:spAutoFit/>
+          </a:bodyPr>
+          <a:lstStyle/>
+          <a:p>
+            <a:pPr algn="l">
+              <a:spcAft>
+                <a:spcPts val="0"/>
+              </a:spcAft>
+            </a:pPr>
+            <a:r>
+              <a:rPr sz="1250" b="1" i="0">
+                <a:solidFill>
+                  <a:srgbClr val="3A66A5"/>
+                </a:solidFill>
+                <a:latin typeface="Calibri"/>
+              </a:rPr>
+              <a:t>How to read it:  </a:t>
+            </a:r>
+            <a:r>
+              <a:rPr sz="1250" b="0" i="0">
+                <a:solidFill>
+                  <a:srgbClr val="555555"/>
+                </a:solidFill>
+                <a:latin typeface="Calibri"/>
+              </a:rPr>
+              <a:t>Each dot is a country covered by the rating, placed by where it ranks among covered countries (right = rated better). Green triangles are our policy-enabled cases; the vertical bars mark each group's median. The policy cases rank high on both ratings — but only 3 and 2 of them are covered, so we show every point rather than hide the small sample.</a:t>
             </a:r>
           </a:p>
         </p:txBody>
       </p:sp>
       <p:pic>
         <p:nvPicPr>
-          <p:cNvPr id="3" name="Picture 2" descr="takeaway_fig06_external_corroboration.png"/>
+          <p:cNvPr id="4" name="Picture 3" descr="takeaway_fig06_external_corroboration.png"/>
           <p:cNvPicPr>
             <a:picLocks noChangeAspect="1"/>
           </p:cNvPicPr>
@@ -6839,8 +7223,8 @@
         </p:blipFill>
         <p:spPr>
           <a:xfrm>
-            <a:off x="598278" y="1325880"/>
-            <a:ext cx="10992394" cy="5129783"/>
+            <a:off x="1019556" y="1865376"/>
+            <a:ext cx="10149840" cy="4736592"/>
           </a:xfrm>
           <a:prstGeom prst="rect">
             <a:avLst/>
@@ -6873,8 +7257,8 @@
         </p:nvSpPr>
         <p:spPr>
           <a:xfrm>
-            <a:off x="502920" y="256032"/>
-            <a:ext cx="11201400" cy="1051560"/>
+            <a:off x="502920" y="274320"/>
+            <a:ext cx="11201400" cy="914400"/>
           </a:xfrm>
           <a:prstGeom prst="rect">
             <a:avLst/>
@@ -6909,7 +7293,7 @@
               </a:spcAft>
             </a:pPr>
             <a:r>
-              <a:rPr sz="2700" b="1" i="0">
+              <a:rPr sz="2400" b="1" i="0">
                 <a:solidFill>
                   <a:srgbClr val="212121"/>
                 </a:solidFill>
@@ -7034,7 +7418,7 @@
                 </a:solidFill>
                 <a:latin typeface="Calibri"/>
               </a:rPr>
-              <a:t>Rather than assuming treaty years are turning points, we estimate structural breaks from the data — globally and for every country with adequate annual series — then use historical evidence to ask why the trend changed.</a:t>
+              <a:t>Rather than assuming treaty years are turning points, we let the data tell us when trends actually changed — globally and for every country with enough annual data — and then use historical evidence to ask why.</a:t>
             </a:r>
           </a:p>
         </p:txBody>
@@ -7079,81 +7463,65 @@
           <a:p>
             <a:pPr algn="l">
               <a:spcAft>
+                <a:spcPts val="400"/>
+              </a:spcAft>
+            </a:pPr>
+            <a:r>
+              <a:rPr sz="1400" b="0" i="0">
+                <a:solidFill>
+                  <a:srgbClr val="555555"/>
+                </a:solidFill>
+                <a:latin typeface="Calibri"/>
+              </a:rPr>
+              <a:t>Emissions can be split into three moving parts:</a:t>
+            </a:r>
+          </a:p>
+          <a:p>
+            <a:pPr algn="l">
+              <a:spcAft>
+                <a:spcPts val="1000"/>
+              </a:spcAft>
+            </a:pPr>
+            <a:r>
+              <a:rPr sz="1400" b="1" i="0">
+                <a:solidFill>
+                  <a:srgbClr val="212121"/>
+                </a:solidFill>
+                <a:latin typeface="Calibri"/>
+              </a:rPr>
+              <a:t>CO2 growth = economic growth + change in fuel mix + change in energy efficiency</a:t>
+            </a:r>
+          </a:p>
+          <a:p>
+            <a:pPr algn="l">
+              <a:spcAft>
+                <a:spcPts val="800"/>
+              </a:spcAft>
+            </a:pPr>
+            <a:r>
+              <a:rPr sz="1400" b="0" i="0">
+                <a:solidFill>
+                  <a:srgbClr val="555555"/>
+                </a:solidFill>
+                <a:latin typeface="Calibri"/>
+              </a:rPr>
+              <a:t>Emissions cannot bend until the fuel mix or efficiency improves faster. Intensity is the leading indicator: any policy effect must show up there first — before it can ever show up in emissions.</a:t>
+            </a:r>
+          </a:p>
+          <a:p>
+            <a:pPr algn="l">
+              <a:spcAft>
                 <a:spcPts val="0"/>
               </a:spcAft>
             </a:pPr>
             <a:r>
-              <a:rPr sz="1400" b="0" i="0">
+              <a:rPr sz="1400" b="1" i="0">
                 <a:solidFill>
                   <a:srgbClr val="212121"/>
                 </a:solidFill>
-                <a:latin typeface="Consolas"/>
-              </a:rPr>
-              <a:t>growth of CO2  =  growth of GDP</a:t>
-            </a:r>
-          </a:p>
-          <a:p>
-            <a:pPr algn="l">
-              <a:spcAft>
-                <a:spcPts val="0"/>
-              </a:spcAft>
-            </a:pPr>
-            <a:r>
-              <a:rPr sz="1400" b="0" i="0">
-                <a:solidFill>
-                  <a:srgbClr val="212121"/>
-                </a:solidFill>
-                <a:latin typeface="Consolas"/>
-              </a:rPr>
-              <a:t>  +  change in C/E  (fuel mix)</a:t>
-            </a:r>
-          </a:p>
-          <a:p>
-            <a:pPr algn="l">
-              <a:spcAft>
-                <a:spcPts val="1000"/>
-              </a:spcAft>
-            </a:pPr>
-            <a:r>
-              <a:rPr sz="1400" b="0" i="0">
-                <a:solidFill>
-                  <a:srgbClr val="212121"/>
-                </a:solidFill>
-                <a:latin typeface="Consolas"/>
-              </a:rPr>
-              <a:t>  +  change in E/GDP  (efficiency)</a:t>
-            </a:r>
-          </a:p>
-          <a:p>
-            <a:pPr algn="l">
-              <a:spcAft>
-                <a:spcPts val="800"/>
-              </a:spcAft>
-            </a:pPr>
-            <a:r>
-              <a:rPr sz="1400" b="0" i="0">
-                <a:solidFill>
-                  <a:srgbClr val="555555"/>
-                </a:solidFill>
-                <a:latin typeface="Calibri"/>
-              </a:rPr>
-              <a:t>Emissions cannot bend until an intensity slope accelerates. Intensity is the leading indicator: any policy signal must appear there first — on carbon or energy intensity, not necessarily on emissions.</a:t>
-            </a:r>
-          </a:p>
-          <a:p>
-            <a:pPr algn="l">
-              <a:spcAft>
-                <a:spcPts val="0"/>
-              </a:spcAft>
-            </a:pPr>
-            <a:r>
-              <a:rPr sz="1400" b="1" i="0">
-                <a:solidFill>
-                  <a:srgbClr val="212121"/>
-                </a:solidFill>
-                <a:latin typeface="Calibri"/>
-              </a:rPr>
-              <a:t>Unless the intensity terms outpace GDP growth, emissions cannot stabilize.</a:t>
+                <a:latin typeface="Calibri"/>
+              </a:rPr>
+              <a:t>Unless intensity improves faster than the economy grows, emissions cannot stabilize.</a:t>
             </a:r>
           </a:p>
         </p:txBody>
@@ -7184,8 +7552,8 @@
         </p:nvSpPr>
         <p:spPr>
           <a:xfrm>
-            <a:off x="502920" y="256032"/>
-            <a:ext cx="11201400" cy="1051560"/>
+            <a:off x="502920" y="274320"/>
+            <a:ext cx="11201400" cy="914400"/>
           </a:xfrm>
           <a:prstGeom prst="rect">
             <a:avLst/>
@@ -7220,7 +7588,7 @@
               </a:spcAft>
             </a:pPr>
             <a:r>
-              <a:rPr sz="2700" b="1" i="0">
+              <a:rPr sz="2400" b="1" i="0">
                 <a:solidFill>
                   <a:srgbClr val="212121"/>
                 </a:solidFill>
@@ -7281,7 +7649,7 @@
                 </a:solidFill>
                 <a:latin typeface="Calibri"/>
               </a:rPr>
-              <a:t>Of 17 countries eligible under both accountings, only 6 agree within 5 years; the median gap is ~12 years. Some 'domestic' transitions partly reflect trade and offshoring — a main result, not a footnote. (Consumption series begin in 1990, so very early production breaks cannot be matched by construction.)</a:t>
+              <a:t>When emissions embodied in trade are assigned to consumers instead of producers, only 6 of 17 comparable countries keep a break within 5 years of their production-based date; the median shift is ~12 years. Some 'domestic' transitions partly reflect offshoring — a main result, not a footnote.</a:t>
             </a:r>
           </a:p>
         </p:txBody>
@@ -7336,7 +7704,7 @@
                 </a:solidFill>
                 <a:latin typeface="Calibri"/>
               </a:rPr>
-              <a:t>Pricing is negatively associated with C/E in country-and-year fixed-effects models (contemporaneous strongest); C/GDP and E/GDP estimates are imprecise. OECD EPS covers only 15 of 28 focal countries. Associational, not causal.</a:t>
+              <a:t>Carbon pricing is associated with a cleaner fuel mix in panel models with country and year controls; effects on the other components are imprecise. Policy-stringency data cover only 15 of 28 focal countries. Associational, not causal.</a:t>
             </a:r>
           </a:p>
         </p:txBody>
@@ -7391,7 +7759,7 @@
                 </a:solidFill>
                 <a:latin typeface="Calibri"/>
               </a:rPr>
-              <a:t>45% of documented events within 2 years of the break vs ~17% by chance; 80% within 5 vs 37%; 70% inside the episode vs 33% — far beyond retrospective storytelling.</a:t>
+              <a:t>45% of documented events fall within 2 years of the estimated break versus ~17% if dates were drawn at random; 80% vs 37% within 5 years; 70% vs 33% inside the episode. The historical classifications carry real temporal information — far beyond retrospective storytelling.</a:t>
             </a:r>
           </a:p>
         </p:txBody>
@@ -7446,7 +7814,7 @@
                 </a:solidFill>
                 <a:latin typeface="Calibri"/>
               </a:rPr>
-              <a:t>Break timing identifies change, not cause. Attribution and outcome classification each leave 22 cases open — restraint that makes the resolved 75% credible. No counterfactual: a treaty that prevents backsliding produces no break at all.</a:t>
+              <a:t>Break timing identifies change, not cause. Attribution and outcome classification each leave 22 cases open — restraint that makes the resolved 75% credible. And there is no counterfactual: a treaty that prevents backsliding produces no break at all.</a:t>
             </a:r>
           </a:p>
         </p:txBody>
@@ -7477,8 +7845,8 @@
         </p:nvSpPr>
         <p:spPr>
           <a:xfrm>
-            <a:off x="502920" y="256032"/>
-            <a:ext cx="11201400" cy="1051560"/>
+            <a:off x="502920" y="274320"/>
+            <a:ext cx="11201400" cy="914400"/>
           </a:xfrm>
           <a:prstGeom prst="rect">
             <a:avLst/>
@@ -7513,20 +7881,68 @@
               </a:spcAft>
             </a:pPr>
             <a:r>
-              <a:rPr sz="2700" b="1" i="0">
+              <a:rPr sz="2400" b="1" i="0">
                 <a:solidFill>
                   <a:srgbClr val="212121"/>
                 </a:solidFill>
                 <a:latin typeface="Calibri"/>
               </a:rPr>
               <a:t>Curves bend everywhere; decarbonization is rare</a:t>
+            </a:r>
+          </a:p>
+        </p:txBody>
+      </p:sp>
+      <p:sp>
+        <p:nvSpPr>
+          <p:cNvPr id="3" name="TextBox 2"/>
+          <p:cNvSpPr txBox="1"/>
+          <p:nvPr/>
+        </p:nvSpPr>
+        <p:spPr>
+          <a:xfrm>
+            <a:off x="502920" y="1207008"/>
+            <a:ext cx="11201400" cy="603504"/>
+          </a:xfrm>
+          <a:prstGeom prst="rect">
+            <a:avLst/>
+          </a:prstGeom>
+          <a:noFill/>
+        </p:spPr>
+        <p:txBody>
+          <a:bodyPr wrap="square">
+            <a:spAutoFit/>
+          </a:bodyPr>
+          <a:lstStyle/>
+          <a:p>
+            <a:pPr algn="l">
+              <a:spcAft>
+                <a:spcPts val="0"/>
+              </a:spcAft>
+            </a:pPr>
+            <a:r>
+              <a:rPr sz="1250" b="1" i="0">
+                <a:solidFill>
+                  <a:srgbClr val="3A66A5"/>
+                </a:solidFill>
+                <a:latin typeface="Calibri"/>
+              </a:rPr>
+              <a:t>How to read it:  </a:t>
+            </a:r>
+            <a:r>
+              <a:rPr sz="1250" b="0" i="0">
+                <a:solidFill>
+                  <a:srgbClr val="555555"/>
+                </a:solidFill>
+                <a:latin typeface="Calibri"/>
+              </a:rPr>
+              <a:t>All 97 breaks looked statistically favorable. The colors show what they turned out to be once persistence, mechanism, and absolute emissions are checked — only the dark green block on the right is unambiguous decarbonization.</a:t>
             </a:r>
           </a:p>
         </p:txBody>
       </p:sp>
       <p:pic>
         <p:nvPicPr>
-          <p:cNvPr id="3" name="Picture 2" descr="image12.png"/>
+          <p:cNvPr id="4" name="Picture 3" descr="image12.png"/>
           <p:cNvPicPr>
             <a:picLocks noChangeAspect="1"/>
           </p:cNvPicPr>
@@ -7540,7 +7956,7 @@
         </p:blipFill>
         <p:spPr>
           <a:xfrm>
-            <a:off x="320040" y="1950182"/>
+            <a:off x="320040" y="2293082"/>
             <a:ext cx="11548872" cy="3881178"/>
           </a:xfrm>
           <a:prstGeom prst="rect">
@@ -7575,7 +7991,7 @@
         <p:spPr>
           <a:xfrm>
             <a:off x="822960" y="1051560"/>
-            <a:ext cx="10515600" cy="1645920"/>
+            <a:ext cx="10515600" cy="1737360"/>
           </a:xfrm>
           <a:prstGeom prst="rect">
             <a:avLst/>
@@ -7650,7 +8066,7 @@
               </a:spcAft>
             </a:pPr>
             <a:r>
-              <a:rPr sz="1400" b="1">
+              <a:rPr sz="1400" b="1" i="0">
                 <a:solidFill>
                   <a:srgbClr val="1B7837"/>
                 </a:solidFill>
@@ -7659,7 +8075,7 @@
               <a:t>—  </a:t>
             </a:r>
             <a:r>
-              <a:rPr sz="1400" b="0">
+              <a:rPr sz="1400" b="0" i="0">
                 <a:solidFill>
                   <a:srgbClr val="555555"/>
                 </a:solidFill>
@@ -7675,7 +8091,7 @@
               </a:spcAft>
             </a:pPr>
             <a:r>
-              <a:rPr sz="1400" b="1">
+              <a:rPr sz="1400" b="1" i="0">
                 <a:solidFill>
                   <a:srgbClr val="1B7837"/>
                 </a:solidFill>
@@ -7684,7 +8100,7 @@
               <a:t>—  </a:t>
             </a:r>
             <a:r>
-              <a:rPr sz="1400" b="0">
+              <a:rPr sz="1400" b="0" i="0">
                 <a:solidFill>
                   <a:srgbClr val="555555"/>
                 </a:solidFill>
@@ -7700,7 +8116,7 @@
               </a:spcAft>
             </a:pPr>
             <a:r>
-              <a:rPr sz="1400" b="1">
+              <a:rPr sz="1400" b="1" i="0">
                 <a:solidFill>
                   <a:srgbClr val="1B7837"/>
                 </a:solidFill>
@@ -7709,7 +8125,7 @@
               <a:t>—  </a:t>
             </a:r>
             <a:r>
-              <a:rPr sz="1400" b="0">
+              <a:rPr sz="1400" b="0" i="0">
                 <a:solidFill>
                   <a:srgbClr val="555555"/>
                 </a:solidFill>
@@ -7725,7 +8141,7 @@
               </a:spcAft>
             </a:pPr>
             <a:r>
-              <a:rPr sz="1400" b="1">
+              <a:rPr sz="1400" b="1" i="0">
                 <a:solidFill>
                   <a:srgbClr val="1B7837"/>
                 </a:solidFill>
@@ -7734,7 +8150,7 @@
               <a:t>—  </a:t>
             </a:r>
             <a:r>
-              <a:rPr sz="1400" b="0">
+              <a:rPr sz="1400" b="0" i="0">
                 <a:solidFill>
                   <a:srgbClr val="555555"/>
                 </a:solidFill>
@@ -7810,8 +8226,8 @@
         </p:nvSpPr>
         <p:spPr>
           <a:xfrm>
-            <a:off x="502920" y="256032"/>
-            <a:ext cx="11201400" cy="1051560"/>
+            <a:off x="502920" y="274320"/>
+            <a:ext cx="11201400" cy="914400"/>
           </a:xfrm>
           <a:prstGeom prst="rect">
             <a:avLst/>
@@ -7836,7 +8252,7 @@
                 </a:solidFill>
                 <a:latin typeface="Calibri"/>
               </a:rPr>
-              <a:t>METHODS</a:t>
+              <a:t>HOW WE MEASURE IT</a:t>
             </a:r>
           </a:p>
           <a:p>
@@ -7846,13 +8262,13 @@
               </a:spcAft>
             </a:pPr>
             <a:r>
-              <a:rPr sz="2700" b="1" i="0">
+              <a:rPr sz="2400" b="1" i="0">
                 <a:solidFill>
                   <a:srgbClr val="212121"/>
                 </a:solidFill>
                 <a:latin typeface="Calibri"/>
               </a:rPr>
-              <a:t>What a breakpoint means — and the Kaya lens</a:t>
+              <a:t>Finding the bend: two straight lines and a kink</a:t>
             </a:r>
           </a:p>
         </p:txBody>
@@ -7865,8 +8281,8 @@
         </p:nvSpPr>
         <p:spPr>
           <a:xfrm>
-            <a:off x="502920" y="1463040"/>
-            <a:ext cx="5577840" cy="4937760"/>
+            <a:off x="502920" y="1417320"/>
+            <a:ext cx="5577840" cy="5029200"/>
           </a:xfrm>
           <a:prstGeom prst="rect">
             <a:avLst/>
@@ -7881,65 +8297,108 @@
           <a:p>
             <a:pPr algn="l">
               <a:spcAft>
-                <a:spcPts val="600"/>
-              </a:spcAft>
-            </a:pPr>
-            <a:r>
-              <a:rPr sz="1600" b="1" i="0">
+                <a:spcPts val="800"/>
+              </a:spcAft>
+            </a:pPr>
+            <a:r>
+              <a:rPr sz="1550" b="1" i="0">
                 <a:solidFill>
                   <a:srgbClr val="212121"/>
                 </a:solidFill>
                 <a:latin typeface="Calibri"/>
               </a:rPr>
-              <a:t>The breakpoint model</a:t>
-            </a:r>
-          </a:p>
-          <a:p>
-            <a:pPr algn="l">
-              <a:spcAft>
-                <a:spcPts val="600"/>
-              </a:spcAft>
-            </a:pPr>
-            <a:r>
-              <a:rPr sz="1400" b="0" i="0">
+              <a:t>Three steps, no assumptions about treaty years</a:t>
+            </a:r>
+          </a:p>
+          <a:p>
+            <a:pPr algn="l">
+              <a:spcAft>
+                <a:spcPts val="800"/>
+              </a:spcAft>
+            </a:pPr>
+            <a:r>
+              <a:rPr sz="1350" b="1" i="0">
+                <a:solidFill>
+                  <a:srgbClr val="3A66A5"/>
+                </a:solidFill>
+                <a:latin typeface="Calibri"/>
+              </a:rPr>
+              <a:t>1.  </a:t>
+            </a:r>
+            <a:r>
+              <a:rPr sz="1350" b="0" i="0">
+                <a:solidFill>
+                  <a:srgbClr val="555555"/>
+                </a:solidFill>
+                <a:latin typeface="Calibri"/>
+              </a:rPr>
+              <a:t>Plot each series on a log scale, so a straight line means a steady percentage change per year.</a:t>
+            </a:r>
+          </a:p>
+          <a:p>
+            <a:pPr algn="l">
+              <a:spcAft>
+                <a:spcPts val="800"/>
+              </a:spcAft>
+            </a:pPr>
+            <a:r>
+              <a:rPr sz="1350" b="1" i="0">
+                <a:solidFill>
+                  <a:srgbClr val="3A66A5"/>
+                </a:solidFill>
+                <a:latin typeface="Calibri"/>
+              </a:rPr>
+              <a:t>2.  </a:t>
+            </a:r>
+            <a:r>
+              <a:rPr sz="1350" b="0" i="0">
+                <a:solidFill>
+                  <a:srgbClr val="555555"/>
+                </a:solidFill>
+                <a:latin typeface="Calibri"/>
+              </a:rPr>
+              <a:t>Fit two straight lines that meet at a kink — the 'breakpoint'. Try every possible kink year and keep the one that fits the data best. That year is the estimate of when the trend changed.</a:t>
+            </a:r>
+          </a:p>
+          <a:p>
+            <a:pPr algn="l">
+              <a:spcAft>
+                <a:spcPts val="1200"/>
+              </a:spcAft>
+            </a:pPr>
+            <a:r>
+              <a:rPr sz="1350" b="1" i="0">
+                <a:solidFill>
+                  <a:srgbClr val="3A66A5"/>
+                </a:solidFill>
+                <a:latin typeface="Calibri"/>
+              </a:rPr>
+              <a:t>3.  </a:t>
+            </a:r>
+            <a:r>
+              <a:rPr sz="1350" b="0" i="0">
+                <a:solidFill>
+                  <a:srgbClr val="555555"/>
+                </a:solidFill>
+                <a:latin typeface="Calibri"/>
+              </a:rPr>
+              <a:t>Stress-test the date: re-estimate it on many statistically reshuffled versions of the series. If the estimated year barely moves, the break is credible; if it jumps around, we say so.</a:t>
+            </a:r>
+          </a:p>
+          <a:p>
+            <a:pPr algn="l">
+              <a:spcAft>
+                <a:spcPts val="800"/>
+              </a:spcAft>
+            </a:pPr>
+            <a:r>
+              <a:rPr sz="1350" b="1" i="0">
                 <a:solidFill>
                   <a:srgbClr val="212121"/>
                 </a:solidFill>
-                <a:latin typeface="Consolas"/>
-              </a:rPr>
-              <a:t>y(t) = a + b·t + d·max(t − k, 0) + e(t)</a:t>
-            </a:r>
-          </a:p>
-          <a:p>
-            <a:pPr algn="l">
-              <a:spcAft>
-                <a:spcPts val="1000"/>
-              </a:spcAft>
-            </a:pPr>
-            <a:r>
-              <a:rPr sz="1350" b="0" i="0">
-                <a:solidFill>
-                  <a:srgbClr val="555555"/>
-                </a:solidFill>
-                <a:latin typeface="Calibri"/>
-              </a:rPr>
-              <a:t>b is the pre-break slope; b + d the post-break slope; d the change. The unrestricted model searches all admissible years for the strongest slope change; a moving-block bootstrap describes how stable that date is under serially dependent noise.</a:t>
-            </a:r>
-          </a:p>
-          <a:p>
-            <a:pPr algn="l">
-              <a:spcAft>
-                <a:spcPts val="1000"/>
-              </a:spcAft>
-            </a:pPr>
-            <a:r>
-              <a:rPr sz="1350" b="0" i="0">
-                <a:solidFill>
-                  <a:srgbClr val="212121"/>
-                </a:solidFill>
-                <a:latin typeface="Calibri"/>
-              </a:rPr>
-              <a:t>A breakpoint identifies when a trend changed — with uncertainty. It is not a peak year, not a policy-adoption date, and never a causal estimate by itself. Historical and external evidence answers why.</a:t>
+                <a:latin typeface="Calibri"/>
+              </a:rPr>
+              <a:t>A breakpoint tells us when a trend changed — never, by itself, why. Historical evidence answers that separately.</a:t>
             </a:r>
           </a:p>
           <a:p>
@@ -7949,13 +8408,13 @@
               </a:spcAft>
             </a:pPr>
             <a:r>
-              <a:rPr sz="1350" b="0" i="0">
-                <a:solidFill>
-                  <a:srgbClr val="555555"/>
-                </a:solidFill>
-                <a:latin typeface="Calibri"/>
-              </a:rPr>
-              <a:t>Inference: Newey–West standard errors for fixed-date tests; BIC for model evidence; moving-block bootstrap for date stability.</a:t>
+              <a:rPr sz="1050" b="0" i="1">
+                <a:solidFill>
+                  <a:srgbClr val="8A8A8A"/>
+                </a:solidFill>
+                <a:latin typeface="Calibri"/>
+              </a:rPr>
+              <a:t>(Formally: y(t) = a + b·t + d·max(t−k, 0); slope b before year k, b+d after. Uncertainty via moving-block bootstrap; autocorrelation-robust standard errors for fixed-date tests.)</a:t>
             </a:r>
           </a:p>
         </p:txBody>
@@ -7968,8 +8427,8 @@
         </p:nvSpPr>
         <p:spPr>
           <a:xfrm>
-            <a:off x="6400800" y="1463040"/>
-            <a:ext cx="5303520" cy="4937760"/>
+            <a:off x="6400800" y="1417320"/>
+            <a:ext cx="5303520" cy="5029200"/>
           </a:xfrm>
           <a:prstGeom prst="rect">
             <a:avLst/>
@@ -7984,17 +8443,17 @@
           <a:p>
             <a:pPr algn="l">
               <a:spcAft>
-                <a:spcPts val="600"/>
-              </a:spcAft>
-            </a:pPr>
-            <a:r>
-              <a:rPr sz="1600" b="1" i="0">
+                <a:spcPts val="800"/>
+              </a:spcAft>
+            </a:pPr>
+            <a:r>
+              <a:rPr sz="1550" b="1" i="0">
                 <a:solidFill>
                   <a:srgbClr val="212121"/>
                 </a:solidFill>
                 <a:latin typeface="Calibri"/>
               </a:rPr>
-              <a:t>The Kaya decomposition</a:t>
+              <a:t>Two doors for any improvement</a:t>
             </a:r>
           </a:p>
           <a:p>
@@ -8004,104 +8463,79 @@
               </a:spcAft>
             </a:pPr>
             <a:r>
-              <a:rPr sz="1500" b="0" i="0">
+              <a:rPr sz="1350" b="0" i="0">
+                <a:solidFill>
+                  <a:srgbClr val="555555"/>
+                </a:solidFill>
+                <a:latin typeface="Calibri"/>
+              </a:rPr>
+              <a:t>Carbon intensity — CO2 per dollar of output — can only improve through one of two doors:</a:t>
+            </a:r>
+          </a:p>
+          <a:p>
+            <a:pPr algn="l">
+              <a:spcAft>
+                <a:spcPts val="800"/>
+              </a:spcAft>
+            </a:pPr>
+            <a:r>
+              <a:rPr sz="1350" b="1" i="0">
+                <a:solidFill>
+                  <a:srgbClr val="1B7837"/>
+                </a:solidFill>
+                <a:latin typeface="Calibri"/>
+              </a:rPr>
+              <a:t>Cleaner energy (C/E):  </a:t>
+            </a:r>
+            <a:r>
+              <a:rPr sz="1350" b="0" i="0">
+                <a:solidFill>
+                  <a:srgbClr val="555555"/>
+                </a:solidFill>
+                <a:latin typeface="Calibri"/>
+              </a:rPr>
+              <a:t>less CO2 per unit of energy — fuel switching, nuclear, renewables, the power system.</a:t>
+            </a:r>
+          </a:p>
+          <a:p>
+            <a:pPr algn="l">
+              <a:spcAft>
+                <a:spcPts val="1000"/>
+              </a:spcAft>
+            </a:pPr>
+            <a:r>
+              <a:rPr sz="1350" b="1" i="0">
+                <a:solidFill>
+                  <a:srgbClr val="C77F00"/>
+                </a:solidFill>
+                <a:latin typeface="Calibri"/>
+              </a:rPr>
+              <a:t>Less energy per dollar (E/GDP):  </a:t>
+            </a:r>
+            <a:r>
+              <a:rPr sz="1350" b="0" i="0">
+                <a:solidFill>
+                  <a:srgbClr val="555555"/>
+                </a:solidFill>
+                <a:latin typeface="Calibri"/>
+              </a:rPr>
+              <a:t>efficiency, and changes in what the economy makes — industry versus services.</a:t>
+            </a:r>
+          </a:p>
+          <a:p>
+            <a:pPr algn="l">
+              <a:spcAft>
+                <a:spcPts val="0"/>
+              </a:spcAft>
+            </a:pPr>
+            <a:r>
+              <a:rPr sz="1350" b="0" i="0">
                 <a:solidFill>
                   <a:srgbClr val="212121"/>
                 </a:solidFill>
-                <a:latin typeface="Consolas"/>
-              </a:rPr>
-              <a:t>C/GDP = (C/E) × (E/GDP)</a:t>
-            </a:r>
-          </a:p>
-          <a:p>
-            <a:pPr algn="l">
-              <a:spcAft>
-                <a:spcPts val="600"/>
-              </a:spcAft>
-            </a:pPr>
-            <a:r>
-              <a:rPr sz="1350" b="1">
-                <a:solidFill>
-                  <a:srgbClr val="3A66A5"/>
-                </a:solidFill>
-                <a:latin typeface="Calibri"/>
-              </a:rPr>
-              <a:t>C/GDP — </a:t>
-            </a:r>
-            <a:r>
-              <a:rPr sz="1350" b="0">
-                <a:solidFill>
-                  <a:srgbClr val="555555"/>
-                </a:solidFill>
-                <a:latin typeface="Calibri"/>
-              </a:rPr>
-              <a:t>aggregate carbon intensity of output: the observed outcome.</a:t>
-            </a:r>
-          </a:p>
-          <a:p>
-            <a:pPr algn="l">
-              <a:spcAft>
-                <a:spcPts val="600"/>
-              </a:spcAft>
-            </a:pPr>
-            <a:r>
-              <a:rPr sz="1350" b="1">
-                <a:solidFill>
-                  <a:srgbClr val="1B7837"/>
-                </a:solidFill>
-                <a:latin typeface="Calibri"/>
-              </a:rPr>
-              <a:t>C/E — </a:t>
-            </a:r>
-            <a:r>
-              <a:rPr sz="1350" b="0">
-                <a:solidFill>
-                  <a:srgbClr val="555555"/>
-                </a:solidFill>
-                <a:latin typeface="Calibri"/>
-              </a:rPr>
-              <a:t>supply side: fuel mix, electricity systems, conversion technology.</a:t>
-            </a:r>
-          </a:p>
-          <a:p>
-            <a:pPr algn="l">
-              <a:spcAft>
-                <a:spcPts val="1000"/>
-              </a:spcAft>
-            </a:pPr>
-            <a:r>
-              <a:rPr sz="1350" b="1">
-                <a:solidFill>
-                  <a:srgbClr val="C77F00"/>
-                </a:solidFill>
-                <a:latin typeface="Calibri"/>
-              </a:rPr>
-              <a:t>E/GDP — </a:t>
-            </a:r>
-            <a:r>
-              <a:rPr sz="1350" b="0">
-                <a:solidFill>
-                  <a:srgbClr val="555555"/>
-                </a:solidFill>
-                <a:latin typeface="Calibri"/>
-              </a:rPr>
-              <a:t>demand side: efficiency, sectoral structure, economic composition.</a:t>
-            </a:r>
-          </a:p>
-          <a:p>
-            <a:pPr algn="l">
-              <a:spcAft>
-                <a:spcPts val="0"/>
-              </a:spcAft>
-            </a:pPr>
-            <a:r>
-              <a:rPr sz="1350" b="0" i="0">
-                <a:solidFill>
-                  <a:srgbClr val="212121"/>
-                </a:solidFill>
-                <a:latin typeface="Calibri"/>
-              </a:rPr>
-              <a:t>We estimate all three, for the world aggregate and every country, with one harmonized procedure. The component pattern constrains which mechanisms are plausible.</a:t>
+                <a:latin typeface="Calibri"/>
+              </a:rPr>
+              <a:t>We estimate the bend in the overall series and in both doors, for the world and for every country, with one identical procedure. Which door moved tells us what kind of transition happened — a fuel-mix bend points to energy policy or markets; an efficiency bend often points to economic change.</a:t>
             </a:r>
           </a:p>
         </p:txBody>
@@ -8132,8 +8566,8 @@
         </p:nvSpPr>
         <p:spPr>
           <a:xfrm>
-            <a:off x="502920" y="256032"/>
-            <a:ext cx="11201400" cy="1051560"/>
+            <a:off x="502920" y="274320"/>
+            <a:ext cx="11201400" cy="914400"/>
           </a:xfrm>
           <a:prstGeom prst="rect">
             <a:avLst/>
@@ -8158,7 +8592,7 @@
                 </a:solidFill>
                 <a:latin typeface="Calibri"/>
               </a:rPr>
-              <a:t>METHODS</a:t>
+              <a:t>HOW WE MEASURE IT</a:t>
             </a:r>
           </a:p>
           <a:p>
@@ -8168,13 +8602,13 @@
               </a:spcAft>
             </a:pPr>
             <a:r>
-              <a:rPr sz="2700" b="1" i="0">
+              <a:rPr sz="2400" b="1" i="0">
                 <a:solidFill>
                   <a:srgbClr val="212121"/>
                 </a:solidFill>
                 <a:latin typeface="Calibri"/>
               </a:rPr>
-              <a:t>From 204 jurisdictions to 97 eligible national breaks</a:t>
+              <a:t>Which breaks do we trust — and when does a treaty get credit?</a:t>
             </a:r>
           </a:p>
         </p:txBody>
@@ -8187,8 +8621,8 @@
         </p:nvSpPr>
         <p:spPr>
           <a:xfrm>
-            <a:off x="502920" y="1371600"/>
-            <a:ext cx="4937760" cy="5120640"/>
+            <a:off x="502920" y="1417320"/>
+            <a:ext cx="5029200" cy="5029200"/>
           </a:xfrm>
           <a:prstGeom prst="rect">
             <a:avLst/>
@@ -8203,27 +8637,27 @@
           <a:p>
             <a:pPr algn="l">
               <a:spcAft>
-                <a:spcPts val="600"/>
-              </a:spcAft>
-            </a:pPr>
-            <a:r>
-              <a:rPr sz="1600" b="1" i="0">
+                <a:spcPts val="800"/>
+              </a:spcAft>
+            </a:pPr>
+            <a:r>
+              <a:rPr sz="1550" b="1" i="0">
                 <a:solidFill>
                   <a:srgbClr val="212121"/>
                 </a:solidFill>
                 <a:latin typeface="Calibri"/>
               </a:rPr>
-              <a:t>Eligibility is strict by design</a:t>
-            </a:r>
-          </a:p>
-          <a:p>
-            <a:pPr algn="l">
-              <a:spcAft>
-                <a:spcPts val="500"/>
-              </a:spcAft>
-            </a:pPr>
-            <a:r>
-              <a:rPr sz="1300" b="1">
+              <a:t>A country's break counts only if:</a:t>
+            </a:r>
+          </a:p>
+          <a:p>
+            <a:pPr algn="l">
+              <a:spcAft>
+                <a:spcPts val="700"/>
+              </a:spcAft>
+            </a:pPr>
+            <a:r>
+              <a:rPr sz="1350" b="1" i="0">
                 <a:solidFill>
                   <a:srgbClr val="1B7837"/>
                 </a:solidFill>
@@ -8232,23 +8666,23 @@
               <a:t>•  </a:t>
             </a:r>
             <a:r>
-              <a:rPr sz="1300" b="0">
+              <a:rPr sz="1350" b="0" i="0">
                 <a:solidFill>
                   <a:srgbClr val="555555"/>
                 </a:solidFill>
                 <a:latin typeface="Calibri"/>
               </a:rPr>
-              <a:t>at least 40 annual observations, 10+ years on each side of the break, break 10+ years from the boundary</a:t>
-            </a:r>
-          </a:p>
-          <a:p>
-            <a:pPr algn="l">
-              <a:spcAft>
-                <a:spcPts val="500"/>
-              </a:spcAft>
-            </a:pPr>
-            <a:r>
-              <a:rPr sz="1300" b="1">
+              <a:t>the series is long enough (40+ years, with at least 10 on each side of the break);</a:t>
+            </a:r>
+          </a:p>
+          <a:p>
+            <a:pPr algn="l">
+              <a:spcAft>
+                <a:spcPts val="700"/>
+              </a:spcAft>
+            </a:pPr>
+            <a:r>
+              <a:rPr sz="1350" b="1" i="0">
                 <a:solidFill>
                   <a:srgbClr val="1B7837"/>
                 </a:solidFill>
@@ -8257,23 +8691,23 @@
               <a:t>•  </a:t>
             </a:r>
             <a:r>
-              <a:rPr sz="1300" b="0">
+              <a:rPr sz="1350" b="0" i="0">
                 <a:solidFill>
                   <a:srgbClr val="555555"/>
                 </a:solidFill>
                 <a:latin typeface="Calibri"/>
               </a:rPr>
-              <a:t>BIC improvement of at least 6 over the unbroken trend</a:t>
-            </a:r>
-          </a:p>
-          <a:p>
-            <a:pPr algn="l">
-              <a:spcAft>
-                <a:spcPts val="500"/>
-              </a:spcAft>
-            </a:pPr>
-            <a:r>
-              <a:rPr sz="1300" b="1">
+              <a:t>the two-line model fits clearly better than a single straight line;</a:t>
+            </a:r>
+          </a:p>
+          <a:p>
+            <a:pPr algn="l">
+              <a:spcAft>
+                <a:spcPts val="700"/>
+              </a:spcAft>
+            </a:pPr>
+            <a:r>
+              <a:rPr sz="1350" b="1" i="0">
                 <a:solidFill>
                   <a:srgbClr val="1B7837"/>
                 </a:solidFill>
@@ -8282,23 +8716,23 @@
               <a:t>•  </a:t>
             </a:r>
             <a:r>
-              <a:rPr sz="1300" b="0">
+              <a:rPr sz="1350" b="0" i="0">
                 <a:solidFill>
                   <a:srgbClr val="555555"/>
                 </a:solidFill>
                 <a:latin typeface="Calibri"/>
               </a:rPr>
-              <a:t>70%+ of bootstrap dates within 5 years; interval no wider than 12 years</a:t>
-            </a:r>
-          </a:p>
-          <a:p>
-            <a:pPr algn="l">
-              <a:spcAft>
-                <a:spcPts val="500"/>
-              </a:spcAft>
-            </a:pPr>
-            <a:r>
-              <a:rPr sz="1300" b="1">
+              <a:t>the estimated year stays put when the data are reshuffled; and</a:t>
+            </a:r>
+          </a:p>
+          <a:p>
+            <a:pPr algn="l">
+              <a:spcAft>
+                <a:spcPts val="700"/>
+              </a:spcAft>
+            </a:pPr>
+            <a:r>
+              <a:rPr sz="1350" b="1" i="0">
                 <a:solidFill>
                   <a:srgbClr val="1B7837"/>
                 </a:solidFill>
@@ -8307,73 +8741,213 @@
               <a:t>•  </a:t>
             </a:r>
             <a:r>
-              <a:rPr sz="1300" b="0">
+              <a:rPr sz="1350" b="0" i="0">
                 <a:solidFill>
                   <a:srgbClr val="555555"/>
                 </a:solidFill>
                 <a:latin typeface="Calibri"/>
               </a:rPr>
-              <a:t>standardized slope change of at least 0.25</a:t>
-            </a:r>
-          </a:p>
-          <a:p>
-            <a:pPr algn="l">
-              <a:spcAft>
-                <a:spcPts val="800"/>
-              </a:spcAft>
-            </a:pPr>
-            <a:r>
-              <a:rPr sz="1300" b="0" i="0">
+              <a:t>the change in slope is big enough to matter, not a statistical whisker.</a:t>
+            </a:r>
+          </a:p>
+          <a:p>
+            <a:pPr algn="l">
+              <a:spcAft>
+                <a:spcPts val="0"/>
+              </a:spcAft>
+            </a:pPr>
+            <a:r>
+              <a:rPr sz="1350" b="0" i="0">
                 <a:solidFill>
                   <a:srgbClr val="212121"/>
                 </a:solidFill>
                 <a:latin typeface="Calibri"/>
               </a:rPr>
-              <a:t>204 jurisdictions → 158 estimable → 97 countries with an eligible, stable headline break; nearby component breaks consolidate into 107 transition episodes (15-year grouping; 10/20-year sensitivity).</a:t>
-            </a:r>
-          </a:p>
-          <a:p>
-            <a:pPr algn="l">
-              <a:spcAft>
-                <a:spcPts val="0"/>
-              </a:spcAft>
-            </a:pPr>
-            <a:r>
-              <a:rPr sz="1300" b="1" i="0">
-                <a:solidFill>
-                  <a:srgbClr val="212121"/>
-                </a:solidFill>
-                <a:latin typeface="Calibri"/>
-              </a:rPr>
-              <a:t>Treaty attribution ladder (all five required): Newey–West significance → top 10% vs nearby placebo dates → best date within 3 years of the treaty → compatible unrestricted break → plausible domestic mechanism.</a:t>
-            </a:r>
-          </a:p>
-        </p:txBody>
-      </p:sp>
-      <p:pic>
-        <p:nvPicPr>
-          <p:cNvPr id="4" name="Picture 3" descr="image1.png"/>
-          <p:cNvPicPr>
-            <a:picLocks noChangeAspect="1"/>
-          </p:cNvPicPr>
+              <a:t>204 jurisdictions → 158 with estimable series → 97 countries with a break that passes every test. Breaks close together in time are read as one national transition: 107 episodes in all.</a:t>
+            </a:r>
+          </a:p>
+        </p:txBody>
+      </p:sp>
+      <p:sp>
+        <p:nvSpPr>
+          <p:cNvPr id="4" name="TextBox 3"/>
+          <p:cNvSpPr txBox="1"/>
           <p:nvPr/>
-        </p:nvPicPr>
-        <p:blipFill>
-          <a:blip r:embed="rId2"/>
-          <a:stretch>
-            <a:fillRect/>
-          </a:stretch>
-        </p:blipFill>
+        </p:nvSpPr>
         <p:spPr>
           <a:xfrm>
-            <a:off x="5623560" y="2835783"/>
-            <a:ext cx="6263640" cy="2192274"/>
+            <a:off x="5806440" y="1417320"/>
+            <a:ext cx="5897880" cy="5029200"/>
           </a:xfrm>
           <a:prstGeom prst="rect">
             <a:avLst/>
           </a:prstGeom>
+          <a:noFill/>
         </p:spPr>
-      </p:pic>
+        <p:txBody>
+          <a:bodyPr wrap="square">
+            <a:spAutoFit/>
+          </a:bodyPr>
+          <a:lstStyle/>
+          <a:p>
+            <a:pPr algn="l">
+              <a:spcAft>
+                <a:spcPts val="800"/>
+              </a:spcAft>
+            </a:pPr>
+            <a:r>
+              <a:rPr sz="1550" b="1" i="0">
+                <a:solidFill>
+                  <a:srgbClr val="212121"/>
+                </a:solidFill>
+                <a:latin typeface="Calibri"/>
+              </a:rPr>
+              <a:t>A treaty year gets credit only if all five hold:</a:t>
+            </a:r>
+          </a:p>
+          <a:p>
+            <a:pPr algn="l">
+              <a:spcAft>
+                <a:spcPts val="700"/>
+              </a:spcAft>
+            </a:pPr>
+            <a:r>
+              <a:rPr sz="1350" b="1" i="0">
+                <a:solidFill>
+                  <a:srgbClr val="3A66A5"/>
+                </a:solidFill>
+                <a:latin typeface="Calibri"/>
+              </a:rPr>
+              <a:t>1.  </a:t>
+            </a:r>
+            <a:r>
+              <a:rPr sz="1350" b="0" i="0">
+                <a:solidFill>
+                  <a:srgbClr val="555555"/>
+                </a:solidFill>
+                <a:latin typeface="Calibri"/>
+              </a:rPr>
+              <a:t>the slope genuinely changes at the treaty year (by a robust statistical test);</a:t>
+            </a:r>
+          </a:p>
+          <a:p>
+            <a:pPr algn="l">
+              <a:spcAft>
+                <a:spcPts val="700"/>
+              </a:spcAft>
+            </a:pPr>
+            <a:r>
+              <a:rPr sz="1350" b="1" i="0">
+                <a:solidFill>
+                  <a:srgbClr val="3A66A5"/>
+                </a:solidFill>
+                <a:latin typeface="Calibri"/>
+              </a:rPr>
+              <a:t>2.  </a:t>
+            </a:r>
+            <a:r>
+              <a:rPr sz="1350" b="0" i="0">
+                <a:solidFill>
+                  <a:srgbClr val="555555"/>
+                </a:solidFill>
+                <a:latin typeface="Calibri"/>
+              </a:rPr>
+              <a:t>the treaty year beats nearly all nearby 'placebo' years — because when a trend curves gently, almost any year looks significant;</a:t>
+            </a:r>
+          </a:p>
+          <a:p>
+            <a:pPr algn="l">
+              <a:spcAft>
+                <a:spcPts val="700"/>
+              </a:spcAft>
+            </a:pPr>
+            <a:r>
+              <a:rPr sz="1350" b="1" i="0">
+                <a:solidFill>
+                  <a:srgbClr val="3A66A5"/>
+                </a:solidFill>
+                <a:latin typeface="Calibri"/>
+              </a:rPr>
+              <a:t>3.  </a:t>
+            </a:r>
+            <a:r>
+              <a:rPr sz="1350" b="0" i="0">
+                <a:solidFill>
+                  <a:srgbClr val="555555"/>
+                </a:solidFill>
+                <a:latin typeface="Calibri"/>
+              </a:rPr>
+              <a:t>the best-fitting year is within three years of the treaty;</a:t>
+            </a:r>
+          </a:p>
+          <a:p>
+            <a:pPr algn="l">
+              <a:spcAft>
+                <a:spcPts val="700"/>
+              </a:spcAft>
+            </a:pPr>
+            <a:r>
+              <a:rPr sz="1350" b="1" i="0">
+                <a:solidFill>
+                  <a:srgbClr val="3A66A5"/>
+                </a:solidFill>
+                <a:latin typeface="Calibri"/>
+              </a:rPr>
+              <a:t>4.  </a:t>
+            </a:r>
+            <a:r>
+              <a:rPr sz="1350" b="0" i="0">
+                <a:solidFill>
+                  <a:srgbClr val="555555"/>
+                </a:solidFill>
+                <a:latin typeface="Calibri"/>
+              </a:rPr>
+              <a:t>the data-chosen break agrees with it; and</a:t>
+            </a:r>
+          </a:p>
+          <a:p>
+            <a:pPr algn="l">
+              <a:spcAft>
+                <a:spcPts val="700"/>
+              </a:spcAft>
+            </a:pPr>
+            <a:r>
+              <a:rPr sz="1350" b="1" i="0">
+                <a:solidFill>
+                  <a:srgbClr val="3A66A5"/>
+                </a:solidFill>
+                <a:latin typeface="Calibri"/>
+              </a:rPr>
+              <a:t>5.  </a:t>
+            </a:r>
+            <a:r>
+              <a:rPr sz="1350" b="0" i="0">
+                <a:solidFill>
+                  <a:srgbClr val="555555"/>
+                </a:solidFill>
+                <a:latin typeface="Calibri"/>
+              </a:rPr>
+              <a:t>there is a documented domestic policy story that fits.</a:t>
+            </a:r>
+          </a:p>
+          <a:p>
+            <a:pPr algn="l">
+              <a:spcAft>
+                <a:spcPts val="0"/>
+              </a:spcAft>
+            </a:pPr>
+            <a:r>
+              <a:rPr sz="1350" b="1" i="0">
+                <a:solidFill>
+                  <a:srgbClr val="212121"/>
+                </a:solidFill>
+                <a:latin typeface="Calibri"/>
+              </a:rPr>
+              <a:t>This ladder is deliberately hard to climb. Many series pass step 1; few pass them all. We hold Paris itself to the same standard.</a:t>
+            </a:r>
+          </a:p>
+        </p:txBody>
+      </p:sp>
     </p:spTree>
   </p:cSld>
   <p:clrMapOvr>
@@ -8400,8 +8974,8 @@
         </p:nvSpPr>
         <p:spPr>
           <a:xfrm>
-            <a:off x="502920" y="256032"/>
-            <a:ext cx="11201400" cy="1051560"/>
+            <a:off x="502920" y="274320"/>
+            <a:ext cx="11201400" cy="914400"/>
           </a:xfrm>
           <a:prstGeom prst="rect">
             <a:avLst/>
@@ -8436,7 +9010,7 @@
               </a:spcAft>
             </a:pPr>
             <a:r>
-              <a:rPr sz="2700" b="1" i="0">
+              <a:rPr sz="2400" b="1" i="0">
                 <a:solidFill>
                   <a:srgbClr val="212121"/>
                 </a:solidFill>
@@ -8757,8 +9331,8 @@
         </p:nvSpPr>
         <p:spPr>
           <a:xfrm>
-            <a:off x="502920" y="256032"/>
-            <a:ext cx="11201400" cy="1051560"/>
+            <a:off x="502920" y="274320"/>
+            <a:ext cx="11201400" cy="914400"/>
           </a:xfrm>
           <a:prstGeom prst="rect">
             <a:avLst/>
@@ -8793,20 +9367,68 @@
               </a:spcAft>
             </a:pPr>
             <a:r>
-              <a:rPr sz="2700" b="1" i="0">
+              <a:rPr sz="2400" b="1" i="0">
                 <a:solidFill>
                   <a:srgbClr val="212121"/>
                 </a:solidFill>
                 <a:latin typeface="Calibri"/>
               </a:rPr>
-              <a:t>Global curves first bent in the 1970s — decades before the climate regime</a:t>
+              <a:t>Global curves first bent in the 1970s</a:t>
+            </a:r>
+          </a:p>
+        </p:txBody>
+      </p:sp>
+      <p:sp>
+        <p:nvSpPr>
+          <p:cNvPr id="3" name="TextBox 2"/>
+          <p:cNvSpPr txBox="1"/>
+          <p:nvPr/>
+        </p:nvSpPr>
+        <p:spPr>
+          <a:xfrm>
+            <a:off x="502920" y="1207008"/>
+            <a:ext cx="11201400" cy="603504"/>
+          </a:xfrm>
+          <a:prstGeom prst="rect">
+            <a:avLst/>
+          </a:prstGeom>
+          <a:noFill/>
+        </p:spPr>
+        <p:txBody>
+          <a:bodyPr wrap="square">
+            <a:spAutoFit/>
+          </a:bodyPr>
+          <a:lstStyle/>
+          <a:p>
+            <a:pPr algn="l">
+              <a:spcAft>
+                <a:spcPts val="0"/>
+              </a:spcAft>
+            </a:pPr>
+            <a:r>
+              <a:rPr sz="1250" b="1" i="0">
+                <a:solidFill>
+                  <a:srgbClr val="3A66A5"/>
+                </a:solidFill>
+                <a:latin typeface="Calibri"/>
+              </a:rPr>
+              <a:t>How to read it:  </a:t>
+            </a:r>
+            <a:r>
+              <a:rPr sz="1250" b="0" i="0">
+                <a:solidFill>
+                  <a:srgbClr val="555555"/>
+                </a:solidFill>
+                <a:latin typeface="Calibri"/>
+              </a:rPr>
+              <a:t>Gray dots are the world's CO2 per dollar of output each year (1965 = 100). The red line is the best-fitting pair of straight lines; where they meet — 1973 — is the estimated break. Rio and Paris are marked for comparison: both come long after the bend. The lower panel repeats the estimate for each component; the whiskers show how uncertain each break year is.</a:t>
             </a:r>
           </a:p>
         </p:txBody>
       </p:sp>
       <p:pic>
         <p:nvPicPr>
-          <p:cNvPr id="3" name="Picture 2" descr="takeaway_fig01_global_bend_predates_treaties.png"/>
+          <p:cNvPr id="4" name="Picture 3" descr="takeaway_fig01_global_bend_predates_treaties.png"/>
           <p:cNvPicPr>
             <a:picLocks noChangeAspect="1"/>
           </p:cNvPicPr>
@@ -8820,8 +9442,8 @@
         </p:blipFill>
         <p:spPr>
           <a:xfrm>
-            <a:off x="2854612" y="1325879"/>
-            <a:ext cx="6479727" cy="5129784"/>
+            <a:off x="3102944" y="1865376"/>
+            <a:ext cx="5983063" cy="4736592"/>
           </a:xfrm>
           <a:prstGeom prst="rect">
             <a:avLst/>
@@ -8854,8 +9476,8 @@
         </p:nvSpPr>
         <p:spPr>
           <a:xfrm>
-            <a:off x="502920" y="256032"/>
-            <a:ext cx="11201400" cy="1051560"/>
+            <a:off x="502920" y="274320"/>
+            <a:ext cx="11201400" cy="914400"/>
           </a:xfrm>
           <a:prstGeom prst="rect">
             <a:avLst/>
@@ -8890,20 +9512,68 @@
               </a:spcAft>
             </a:pPr>
             <a:r>
-              <a:rPr sz="2700" b="1" i="0">
+              <a:rPr sz="2400" b="1" i="0">
                 <a:solidFill>
                   <a:srgbClr val="212121"/>
                 </a:solidFill>
                 <a:latin typeface="Calibri"/>
               </a:rPr>
-              <a:t>Paris at ten: intensity is outrunning its old trend — but the bend began earlier</a:t>
+              <a:t>Paris at ten: ahead of trend — but the bend began earlier</a:t>
+            </a:r>
+          </a:p>
+        </p:txBody>
+      </p:sp>
+      <p:sp>
+        <p:nvSpPr>
+          <p:cNvPr id="3" name="TextBox 2"/>
+          <p:cNvSpPr txBox="1"/>
+          <p:nvPr/>
+        </p:nvSpPr>
+        <p:spPr>
+          <a:xfrm>
+            <a:off x="502920" y="1207008"/>
+            <a:ext cx="11201400" cy="603504"/>
+          </a:xfrm>
+          <a:prstGeom prst="rect">
+            <a:avLst/>
+          </a:prstGeom>
+          <a:noFill/>
+        </p:spPr>
+        <p:txBody>
+          <a:bodyPr wrap="square">
+            <a:spAutoFit/>
+          </a:bodyPr>
+          <a:lstStyle/>
+          <a:p>
+            <a:pPr algn="l">
+              <a:spcAft>
+                <a:spcPts val="0"/>
+              </a:spcAft>
+            </a:pPr>
+            <a:r>
+              <a:rPr sz="1250" b="1" i="0">
+                <a:solidFill>
+                  <a:srgbClr val="3A66A5"/>
+                </a:solidFill>
+                <a:latin typeface="Calibri"/>
+              </a:rPr>
+              <a:t>How to read it:  </a:t>
+            </a:r>
+            <a:r>
+              <a:rPr sz="1250" b="0" i="0">
+                <a:solidFill>
+                  <a:srgbClr val="555555"/>
+                </a:solidFill>
+                <a:latin typeface="Calibri"/>
+              </a:rPr>
+              <a:t>We draw the 1990–2015 trend, then extend it past Paris (dashed line) with a band showing where future years should fall if nothing changed. Red dots are the actual years since Paris. Dots below the band mean the world is now improving faster than its old trend — clearly so for the fuel mix, not at all for energy efficiency.</a:t>
             </a:r>
           </a:p>
         </p:txBody>
       </p:sp>
       <p:pic>
         <p:nvPicPr>
-          <p:cNvPr id="3" name="Picture 2" descr="takeaway_fig02a_paris_and_the_long_trend.png"/>
+          <p:cNvPr id="4" name="Picture 3" descr="takeaway_fig02a_paris_and_the_long_trend.png"/>
           <p:cNvPicPr>
             <a:picLocks noChangeAspect="1"/>
           </p:cNvPicPr>
@@ -8917,8 +9587,8 @@
         </p:blipFill>
         <p:spPr>
           <a:xfrm>
-            <a:off x="537210" y="1325880"/>
-            <a:ext cx="11114532" cy="5129783"/>
+            <a:off x="963168" y="1865376"/>
+            <a:ext cx="10262616" cy="4736592"/>
           </a:xfrm>
           <a:prstGeom prst="rect">
             <a:avLst/>
@@ -8951,8 +9621,8 @@
         </p:nvSpPr>
         <p:spPr>
           <a:xfrm>
-            <a:off x="502920" y="256032"/>
-            <a:ext cx="11201400" cy="1051560"/>
+            <a:off x="502920" y="274320"/>
+            <a:ext cx="11201400" cy="914400"/>
           </a:xfrm>
           <a:prstGeom prst="rect">
             <a:avLst/>
@@ -8987,20 +9657,68 @@
               </a:spcAft>
             </a:pPr>
             <a:r>
-              <a:rPr sz="2700" b="1" i="0">
+              <a:rPr sz="2400" b="1" i="0">
                 <a:solidFill>
                   <a:srgbClr val="212121"/>
                 </a:solidFill>
                 <a:latin typeface="Calibri"/>
               </a:rPr>
-              <a:t>The arithmetic of bending the curve: intensity must fall as fast as GDP grows</a:t>
+              <a:t>The arithmetic: intensity must fall as fast as GDP grows</a:t>
+            </a:r>
+          </a:p>
+        </p:txBody>
+      </p:sp>
+      <p:sp>
+        <p:nvSpPr>
+          <p:cNvPr id="3" name="TextBox 2"/>
+          <p:cNvSpPr txBox="1"/>
+          <p:nvPr/>
+        </p:nvSpPr>
+        <p:spPr>
+          <a:xfrm>
+            <a:off x="502920" y="1207008"/>
+            <a:ext cx="11201400" cy="603504"/>
+          </a:xfrm>
+          <a:prstGeom prst="rect">
+            <a:avLst/>
+          </a:prstGeom>
+          <a:noFill/>
+        </p:spPr>
+        <p:txBody>
+          <a:bodyPr wrap="square">
+            <a:spAutoFit/>
+          </a:bodyPr>
+          <a:lstStyle/>
+          <a:p>
+            <a:pPr algn="l">
+              <a:spcAft>
+                <a:spcPts val="0"/>
+              </a:spcAft>
+            </a:pPr>
+            <a:r>
+              <a:rPr sz="1250" b="1" i="0">
+                <a:solidFill>
+                  <a:srgbClr val="3A66A5"/>
+                </a:solidFill>
+                <a:latin typeface="Calibri"/>
+              </a:rPr>
+              <a:t>How to read it:  </a:t>
+            </a:r>
+            <a:r>
+              <a:rPr sz="1250" b="0" i="0">
+                <a:solidFill>
+                  <a:srgbClr val="555555"/>
+                </a:solidFill>
+                <a:latin typeface="Calibri"/>
+              </a:rPr>
+              <a:t>Each bar is an average annual growth rate. By construction, the red emissions bar equals the gray GDP bar plus the two colored intensity bars. Emissions stop growing only when the colored bars together are as long as the gray one — the dotted line marks that target. We are closer than before Paris, but not there.</a:t>
             </a:r>
           </a:p>
         </p:txBody>
       </p:sp>
       <p:pic>
         <p:nvPicPr>
-          <p:cNvPr id="3" name="Picture 2" descr="takeaway_fig02b_stabilization_arithmetic.png"/>
+          <p:cNvPr id="4" name="Picture 3" descr="takeaway_fig02b_stabilization_arithmetic.png"/>
           <p:cNvPicPr>
             <a:picLocks noChangeAspect="1"/>
           </p:cNvPicPr>
@@ -9014,8 +9732,8 @@
         </p:blipFill>
         <p:spPr>
           <a:xfrm>
-            <a:off x="537210" y="1325880"/>
-            <a:ext cx="11114532" cy="5129783"/>
+            <a:off x="963168" y="1865376"/>
+            <a:ext cx="10262616" cy="4736592"/>
           </a:xfrm>
           <a:prstGeom prst="rect">
             <a:avLst/>
@@ -9048,8 +9766,8 @@
         </p:nvSpPr>
         <p:spPr>
           <a:xfrm>
-            <a:off x="502920" y="256032"/>
-            <a:ext cx="11201400" cy="1051560"/>
+            <a:off x="502920" y="274320"/>
+            <a:ext cx="11201400" cy="914400"/>
           </a:xfrm>
           <a:prstGeom prst="rect">
             <a:avLst/>
@@ -9084,20 +9802,68 @@
               </a:spcAft>
             </a:pPr>
             <a:r>
-              <a:rPr sz="2700" b="1" i="0">
+              <a:rPr sz="2400" b="1" i="0">
                 <a:solidFill>
                   <a:srgbClr val="212121"/>
                 </a:solidFill>
                 <a:latin typeface="Calibri"/>
               </a:rPr>
-              <a:t>The placebo discipline: many years look like turning points</a:t>
+              <a:t>Why a treaty-year result needs a placebo test</a:t>
+            </a:r>
+          </a:p>
+        </p:txBody>
+      </p:sp>
+      <p:sp>
+        <p:nvSpPr>
+          <p:cNvPr id="3" name="TextBox 2"/>
+          <p:cNvSpPr txBox="1"/>
+          <p:nvPr/>
+        </p:nvSpPr>
+        <p:spPr>
+          <a:xfrm>
+            <a:off x="502920" y="1207008"/>
+            <a:ext cx="11201400" cy="603504"/>
+          </a:xfrm>
+          <a:prstGeom prst="rect">
+            <a:avLst/>
+          </a:prstGeom>
+          <a:noFill/>
+        </p:spPr>
+        <p:txBody>
+          <a:bodyPr wrap="square">
+            <a:spAutoFit/>
+          </a:bodyPr>
+          <a:lstStyle/>
+          <a:p>
+            <a:pPr algn="l">
+              <a:spcAft>
+                <a:spcPts val="0"/>
+              </a:spcAft>
+            </a:pPr>
+            <a:r>
+              <a:rPr sz="1250" b="1" i="0">
+                <a:solidFill>
+                  <a:srgbClr val="3A66A5"/>
+                </a:solidFill>
+                <a:latin typeface="Calibri"/>
+              </a:rPr>
+              <a:t>How to read it:  </a:t>
+            </a:r>
+            <a:r>
+              <a:rPr sz="1250" b="0" i="0">
+                <a:solidFill>
+                  <a:srgbClr val="555555"/>
+                </a:solidFill>
+                <a:latin typeface="Calibri"/>
+              </a:rPr>
+              <a:t>Top: we place the break at every possible year, one at a time, and record how much better the model fits. Rio fits well — but so do many neighboring years, which is why a good fit at a treaty year proves little on its own. Bottom: the share of country series with a significant change at each treaty year (left point) versus the share where the treaty year also beats its neighbors (right point).</a:t>
             </a:r>
           </a:p>
         </p:txBody>
       </p:sp>
       <p:pic>
         <p:nvPicPr>
-          <p:cNvPr id="3" name="Picture 2" descr="takeaway_fig02_placebo_test.png"/>
+          <p:cNvPr id="4" name="Picture 3" descr="takeaway_fig02_placebo_test.png"/>
           <p:cNvPicPr>
             <a:picLocks noChangeAspect="1"/>
           </p:cNvPicPr>
@@ -9111,8 +9877,8 @@
         </p:blipFill>
         <p:spPr>
           <a:xfrm>
-            <a:off x="3016605" y="1325880"/>
-            <a:ext cx="6155740" cy="5129783"/>
+            <a:off x="3252520" y="1865376"/>
+            <a:ext cx="5683910" cy="4736592"/>
           </a:xfrm>
           <a:prstGeom prst="rect">
             <a:avLst/>

--- a/carbon_breakpoints_takeaway_figures/what_bends_the_curve_final.pptx
+++ b/carbon_breakpoints_takeaway_figures/what_bends_the_curve_final.pptx
@@ -27,6 +27,11 @@
     <p:sldId id="275" r:id="rId27"/>
     <p:sldId id="276" r:id="rId28"/>
     <p:sldId id="277" r:id="rId29"/>
+    <p:sldId id="278" r:id="rId30"/>
+    <p:sldId id="279" r:id="rId31"/>
+    <p:sldId id="280" r:id="rId32"/>
+    <p:sldId id="281" r:id="rId33"/>
+    <p:sldId id="282" r:id="rId34"/>
   </p:sldIdLst>
   <p:sldSz cx="12191695" cy="6858000" type="screen4x3"/>
   <p:notesSz cx="6858000" cy="9144000"/>
@@ -523,7 +528,7 @@
           <a:lstStyle/>
           <a:p>
             <a:r>
-              <a:t>Frame up front: this is a pro-Paris paper that takes measurement seriously. The question is not whether Paris matters, but what the observed record can attribute — and where the policy signal actually lives.</a:t>
+              <a:t>Frame up front: a pro-Paris paper that takes measurement seriously. The question is not whether Paris matters but what the observed record can attribute — and where the policy signal actually lives.</a:t>
             </a:r>
           </a:p>
         </p:txBody>
@@ -593,7 +598,7 @@
           <a:lstStyle/>
           <a:p>
             <a:r>
-              <a:t>The hinge of the talk: the non-attribution is not a failure of Paris — it is the reason the analysis must descend to the national level, where attribution machinery has power.</a:t>
+              <a:t>Rio survivors: 10 C/GDP, 21 C/E, 34 E/GDP series; Paris: 14, 5, 6. The Rio-unique E/GDP cases dissolve on inspection into early-90s upheaval — disruption, adjustment, liberalization — not treaty policy.</a:t>
             </a:r>
           </a:p>
         </p:txBody>
@@ -663,7 +668,7 @@
           <a:lstStyle/>
           <a:p>
             <a:r>
-              <a:t>No common treaty era: breaks scatter 1970–2013 and pile up around oil shocks, post-Cold-War upheaval, crises, and the renewables era. Event alignment: 45% vs 17% within 2 years; 80% vs 37% within 5; 70% vs 33% inside the episode.</a:t>
+              <a:t>The hinge of the talk: the non-attribution is not a failure of Paris — it is the reason the analysis must descend to the national level, where attribution has power.</a:t>
             </a:r>
           </a:p>
         </p:txBody>
@@ -733,7 +738,7 @@
           <a:lstStyle/>
           <a:p>
             <a:r>
-              <a:t>Fuel and energy markets 22, restructuring 18, political disruption 11, macro shocks 9, development and access 6, policy 9, unresolved 22. Author-coded against authoritative sources with a stopping rule — interpretations, not causal estimates.</a:t>
+              <a:t>Act II is deliberately light-touch in this telling: the scatter, the census, then straight to whether the bends counted.</a:t>
             </a:r>
           </a:p>
         </p:txBody>
@@ -803,7 +808,7 @@
           <a:lstStyle/>
           <a:p>
             <a:r>
-              <a:t>The reading key for everything that follows. Note the two distinct 22s: mechanism-unresolved and outcome-unclassifiable are different sets.</a:t>
+              <a:t>45% vs 17% within 2 years; 80% vs 37% within 5; 70% vs 33% inside the documented episode.</a:t>
             </a:r>
           </a:p>
         </p:txBody>
@@ -873,7 +878,7 @@
           <a:lstStyle/>
           <a:p>
             <a:r>
-              <a:t>Shocks flow into contraction; restructuring often ends in 'intensity gain, CO2 rising'. Only nine countries end in constructive persistent decarbonization.</a:t>
+              <a:t>Author-coded against authoritative sources with an explicit stopping rule — structured interpretations, not causal estimates.</a:t>
             </a:r>
           </a:p>
         </p:txBody>
@@ -943,7 +948,7 @@
           <a:lstStyle/>
           <a:p>
             <a:r>
-              <a:t>Raw counts: 55 favorable bends with rising CO2; 19 with falling CO2. The stricter classification narrows these to 12 and 9. Green triangles: the 9 policy-enabled cases — Bhutan and Paraguay improve intensity while emissions still rise, so policy-enabled and constructive are overlapping but different sets.</a:t>
+              <a:t>The taxonomy slide follows as the reading key; then the flow, the quadrant, the nine, and the near-misses.</a:t>
             </a:r>
           </a:p>
         </p:txBody>
@@ -1013,7 +1018,7 @@
           <a:lstStyle/>
           <a:p>
             <a:r>
-              <a:t>Six of nine are policy-enabled; Hungary, Nauru, and Ireland arrived via restructuring. Caveat: Nauru is a micro-state whose 'restructuring' is the phosphate collapse — treat with care.</a:t>
+              <a:t>The reading key for everything that follows. Note the two distinct 22s: mechanism-unresolved and outcome-unclassifiable are different sets.</a:t>
             </a:r>
           </a:p>
         </p:txBody>
@@ -1083,7 +1088,7 @@
           <a:lstStyle/>
           <a:p>
             <a:r>
-              <a:t>Routes around the constructive verdict: fuel substitution (5), evidence limits (4), collapse (1). Netherlands 1975: gas substitution forty years before US shale. Somalia 1985: collapse mimics decarbonization in every raw statistic; only the persistence screen catches it. Breaks span 1975–2012 — no treaty era here either.</a:t>
+              <a:t>Only nine countries end in constructive persistent decarbonization.</a:t>
             </a:r>
           </a:p>
         </p:txBody>
@@ -1153,7 +1158,7 @@
           <a:lstStyle/>
           <a:p>
             <a:r>
-              <a:t>Fuel-market transformations cluster in the Americas and MENA; restructuring across Asia-Pacific; policy-enabled cases in northern Europe. Right: much of the map is contraction, incompleteness, or intensity gains overwhelmed by growth.</a:t>
+              <a:t>Raw counts 55/19; the stricter classification (adding persistence and mechanism) narrows these to 12 and 9.</a:t>
             </a:r>
           </a:p>
         </p:txBody>
@@ -1223,7 +1228,7 @@
           <a:lstStyle/>
           <a:p>
             <a:r>
-              <a:t>Median CAT percentile ~64 vs 34; CCPI ~91 vs 44. Corroborative, not definitive.</a:t>
+              <a:t>This is the paper's constructive core: policy made physical in fuel mix, infrastructure, and economic structure.</a:t>
             </a:r>
           </a:p>
         </p:txBody>
@@ -1293,7 +1298,7 @@
           <a:lstStyle/>
           <a:p>
             <a:r>
-              <a:t>Set the sympathetic frame, then pivot to the identity: the mathematically required location of any policy signal is the intensity slopes. That justifies the paper's whole design.</a:t>
+              <a:t>The sympathetic frame first, then the identity. The identity justifies the paper's design: the mathematically required location of any policy signal is the intensity slopes.</a:t>
             </a:r>
           </a:p>
         </p:txBody>
@@ -1363,7 +1368,7 @@
           <a:lstStyle/>
           <a:p>
             <a:r>
-              <a:t>The credibility slide. If asked about causality: the design lock is explicit about supported vs unsupported claims — lean on it.</a:t>
+              <a:t>Even the genuine emission-cutters span 1975–2012 — no treaty era here either.</a:t>
             </a:r>
           </a:p>
         </p:txBody>
@@ -1433,7 +1438,7 @@
           <a:lstStyle/>
           <a:p>
             <a:r>
-              <a:t>None of this heterogeneity aligns on a treaty date. The treaty question dissolves into 97 national stories; nine end in unambiguous decarbonization.</a:t>
+              <a:t>Left map: mechanism per country. Right map: outcome verdict; dark green outlines the nine.</a:t>
             </a:r>
           </a:p>
         </p:txBody>
@@ -1503,7 +1508,357 @@
           <a:lstStyle/>
           <a:p>
             <a:r>
-              <a:t>End on the closing line and the four-part method signature.</a:t>
+              <a:t>Act IV: validation that carries temporal information; corroboration on thin coverage; accounting humility.</a:t>
+            </a:r>
+          </a:p>
+        </p:txBody>
+      </p:sp>
+      <p:sp>
+        <p:nvSpPr>
+          <p:cNvPr id="4" name="Slide Number Placeholder 3"/>
+          <p:cNvSpPr>
+            <a:spLocks noGrp="1"/>
+          </p:cNvSpPr>
+          <p:nvPr>
+            <p:ph type="sldNum" idx="5" sz="quarter"/>
+          </p:nvPr>
+        </p:nvSpPr>
+        <p:spPr/>
+      </p:sp>
+    </p:spTree>
+  </p:cSld>
+  <p:clrMapOvr>
+    <a:masterClrMapping/>
+  </p:clrMapOvr>
+</p:notes>
+</file>
+
+<file path=ppt/notesSlides/notesSlide23.xml><?xml version="1.0" encoding="utf-8"?>
+<p:notes xmlns:a="http://schemas.openxmlformats.org/drawingml/2006/main" xmlns:p="http://schemas.openxmlformats.org/presentationml/2006/main" xmlns:r="http://schemas.openxmlformats.org/officeDocument/2006/relationships">
+  <p:cSld>
+    <p:spTree>
+      <p:nvGrpSpPr>
+        <p:cNvPr id="1" name=""/>
+        <p:cNvGrpSpPr/>
+        <p:nvPr/>
+      </p:nvGrpSpPr>
+      <p:grpSpPr>
+        <a:xfrm>
+          <a:off x="0" y="0"/>
+          <a:ext cx="0" cy="0"/>
+          <a:chOff x="0" y="0"/>
+          <a:chExt cx="0" cy="0"/>
+        </a:xfrm>
+      </p:grpSpPr>
+      <p:sp>
+        <p:nvSpPr>
+          <p:cNvPr id="2" name="Slide Image Placeholder 1"/>
+          <p:cNvSpPr>
+            <a:spLocks noGrp="1"/>
+          </p:cNvSpPr>
+          <p:nvPr>
+            <p:ph type="sldImg" idx="2"/>
+          </p:nvPr>
+        </p:nvSpPr>
+        <p:spPr/>
+      </p:sp>
+      <p:sp>
+        <p:nvSpPr>
+          <p:cNvPr id="3" name="Notes Placeholder 2"/>
+          <p:cNvSpPr>
+            <a:spLocks noGrp="1"/>
+          </p:cNvSpPr>
+          <p:nvPr>
+            <p:ph type="body" idx="3" sz="quarter"/>
+          </p:nvPr>
+        </p:nvSpPr>
+        <p:spPr/>
+        <p:txBody>
+          <a:bodyPr/>
+          <a:lstStyle/>
+          <a:p>
+            <a:r>
+              <a:t>Corroborative, not definitive.</a:t>
+            </a:r>
+          </a:p>
+        </p:txBody>
+      </p:sp>
+      <p:sp>
+        <p:nvSpPr>
+          <p:cNvPr id="4" name="Slide Number Placeholder 3"/>
+          <p:cNvSpPr>
+            <a:spLocks noGrp="1"/>
+          </p:cNvSpPr>
+          <p:nvPr>
+            <p:ph type="sldNum" idx="5" sz="quarter"/>
+          </p:nvPr>
+        </p:nvSpPr>
+        <p:spPr/>
+      </p:sp>
+    </p:spTree>
+  </p:cSld>
+  <p:clrMapOvr>
+    <a:masterClrMapping/>
+  </p:clrMapOvr>
+</p:notes>
+</file>
+
+<file path=ppt/notesSlides/notesSlide24.xml><?xml version="1.0" encoding="utf-8"?>
+<p:notes xmlns:a="http://schemas.openxmlformats.org/drawingml/2006/main" xmlns:p="http://schemas.openxmlformats.org/presentationml/2006/main" xmlns:r="http://schemas.openxmlformats.org/officeDocument/2006/relationships">
+  <p:cSld>
+    <p:spTree>
+      <p:nvGrpSpPr>
+        <p:cNvPr id="1" name=""/>
+        <p:cNvGrpSpPr/>
+        <p:nvPr/>
+      </p:nvGrpSpPr>
+      <p:grpSpPr>
+        <a:xfrm>
+          <a:off x="0" y="0"/>
+          <a:ext cx="0" cy="0"/>
+          <a:chOff x="0" y="0"/>
+          <a:chExt cx="0" cy="0"/>
+        </a:xfrm>
+      </p:grpSpPr>
+      <p:sp>
+        <p:nvSpPr>
+          <p:cNvPr id="2" name="Slide Image Placeholder 1"/>
+          <p:cNvSpPr>
+            <a:spLocks noGrp="1"/>
+          </p:cNvSpPr>
+          <p:nvPr>
+            <p:ph type="sldImg" idx="2"/>
+          </p:nvPr>
+        </p:nvSpPr>
+        <p:spPr/>
+      </p:sp>
+      <p:sp>
+        <p:nvSpPr>
+          <p:cNvPr id="3" name="Notes Placeholder 2"/>
+          <p:cNvSpPr>
+            <a:spLocks noGrp="1"/>
+          </p:cNvSpPr>
+          <p:nvPr>
+            <p:ph type="body" idx="3" sz="quarter"/>
+          </p:nvPr>
+        </p:nvSpPr>
+        <p:spPr/>
+        <p:txBody>
+          <a:bodyPr/>
+          <a:lstStyle/>
+          <a:p>
+            <a:r>
+              <a:t>The credibility slide. If pressed on causality, lean on the design lock's explicit list of supported and unsupported claims.</a:t>
+            </a:r>
+          </a:p>
+        </p:txBody>
+      </p:sp>
+      <p:sp>
+        <p:nvSpPr>
+          <p:cNvPr id="4" name="Slide Number Placeholder 3"/>
+          <p:cNvSpPr>
+            <a:spLocks noGrp="1"/>
+          </p:cNvSpPr>
+          <p:nvPr>
+            <p:ph type="sldNum" idx="5" sz="quarter"/>
+          </p:nvPr>
+        </p:nvSpPr>
+        <p:spPr/>
+      </p:sp>
+    </p:spTree>
+  </p:cSld>
+  <p:clrMapOvr>
+    <a:masterClrMapping/>
+  </p:clrMapOvr>
+</p:notes>
+</file>
+
+<file path=ppt/notesSlides/notesSlide25.xml><?xml version="1.0" encoding="utf-8"?>
+<p:notes xmlns:a="http://schemas.openxmlformats.org/drawingml/2006/main" xmlns:p="http://schemas.openxmlformats.org/presentationml/2006/main" xmlns:r="http://schemas.openxmlformats.org/officeDocument/2006/relationships">
+  <p:cSld>
+    <p:spTree>
+      <p:nvGrpSpPr>
+        <p:cNvPr id="1" name=""/>
+        <p:cNvGrpSpPr/>
+        <p:nvPr/>
+      </p:nvGrpSpPr>
+      <p:grpSpPr>
+        <a:xfrm>
+          <a:off x="0" y="0"/>
+          <a:ext cx="0" cy="0"/>
+          <a:chOff x="0" y="0"/>
+          <a:chExt cx="0" cy="0"/>
+        </a:xfrm>
+      </p:grpSpPr>
+      <p:sp>
+        <p:nvSpPr>
+          <p:cNvPr id="2" name="Slide Image Placeholder 1"/>
+          <p:cNvSpPr>
+            <a:spLocks noGrp="1"/>
+          </p:cNvSpPr>
+          <p:nvPr>
+            <p:ph type="sldImg" idx="2"/>
+          </p:nvPr>
+        </p:nvSpPr>
+        <p:spPr/>
+      </p:sp>
+      <p:sp>
+        <p:nvSpPr>
+          <p:cNvPr id="3" name="Notes Placeholder 2"/>
+          <p:cNvSpPr>
+            <a:spLocks noGrp="1"/>
+          </p:cNvSpPr>
+          <p:nvPr>
+            <p:ph type="body" idx="3" sz="quarter"/>
+          </p:nvPr>
+        </p:nvSpPr>
+        <p:spPr/>
+        <p:txBody>
+          <a:bodyPr/>
+          <a:lstStyle/>
+          <a:p>
+            <a:r>
+              <a:t>The bridge to the close: heterogeneous national mechanisms, not one universal treaty break.</a:t>
+            </a:r>
+          </a:p>
+        </p:txBody>
+      </p:sp>
+      <p:sp>
+        <p:nvSpPr>
+          <p:cNvPr id="4" name="Slide Number Placeholder 3"/>
+          <p:cNvSpPr>
+            <a:spLocks noGrp="1"/>
+          </p:cNvSpPr>
+          <p:nvPr>
+            <p:ph type="sldNum" idx="5" sz="quarter"/>
+          </p:nvPr>
+        </p:nvSpPr>
+        <p:spPr/>
+      </p:sp>
+    </p:spTree>
+  </p:cSld>
+  <p:clrMapOvr>
+    <a:masterClrMapping/>
+  </p:clrMapOvr>
+</p:notes>
+</file>
+
+<file path=ppt/notesSlides/notesSlide26.xml><?xml version="1.0" encoding="utf-8"?>
+<p:notes xmlns:a="http://schemas.openxmlformats.org/drawingml/2006/main" xmlns:p="http://schemas.openxmlformats.org/presentationml/2006/main" xmlns:r="http://schemas.openxmlformats.org/officeDocument/2006/relationships">
+  <p:cSld>
+    <p:spTree>
+      <p:nvGrpSpPr>
+        <p:cNvPr id="1" name=""/>
+        <p:cNvGrpSpPr/>
+        <p:nvPr/>
+      </p:nvGrpSpPr>
+      <p:grpSpPr>
+        <a:xfrm>
+          <a:off x="0" y="0"/>
+          <a:ext cx="0" cy="0"/>
+          <a:chOff x="0" y="0"/>
+          <a:chExt cx="0" cy="0"/>
+        </a:xfrm>
+      </p:grpSpPr>
+      <p:sp>
+        <p:nvSpPr>
+          <p:cNvPr id="2" name="Slide Image Placeholder 1"/>
+          <p:cNvSpPr>
+            <a:spLocks noGrp="1"/>
+          </p:cNvSpPr>
+          <p:nvPr>
+            <p:ph type="sldImg" idx="2"/>
+          </p:nvPr>
+        </p:nvSpPr>
+        <p:spPr/>
+      </p:sp>
+      <p:sp>
+        <p:nvSpPr>
+          <p:cNvPr id="3" name="Notes Placeholder 2"/>
+          <p:cNvSpPr>
+            <a:spLocks noGrp="1"/>
+          </p:cNvSpPr>
+          <p:nvPr>
+            <p:ph type="body" idx="3" sz="quarter"/>
+          </p:nvPr>
+        </p:nvSpPr>
+        <p:spPr/>
+        <p:txBody>
+          <a:bodyPr/>
+          <a:lstStyle/>
+          <a:p>
+            <a:r>
+              <a:t>The forward-looking beat: what would count as evidence at Paris+20, and the methods question posed to the field.</a:t>
+            </a:r>
+          </a:p>
+        </p:txBody>
+      </p:sp>
+      <p:sp>
+        <p:nvSpPr>
+          <p:cNvPr id="4" name="Slide Number Placeholder 3"/>
+          <p:cNvSpPr>
+            <a:spLocks noGrp="1"/>
+          </p:cNvSpPr>
+          <p:nvPr>
+            <p:ph type="sldNum" idx="5" sz="quarter"/>
+          </p:nvPr>
+        </p:nvSpPr>
+        <p:spPr/>
+      </p:sp>
+    </p:spTree>
+  </p:cSld>
+  <p:clrMapOvr>
+    <a:masterClrMapping/>
+  </p:clrMapOvr>
+</p:notes>
+</file>
+
+<file path=ppt/notesSlides/notesSlide27.xml><?xml version="1.0" encoding="utf-8"?>
+<p:notes xmlns:a="http://schemas.openxmlformats.org/drawingml/2006/main" xmlns:p="http://schemas.openxmlformats.org/presentationml/2006/main" xmlns:r="http://schemas.openxmlformats.org/officeDocument/2006/relationships">
+  <p:cSld>
+    <p:spTree>
+      <p:nvGrpSpPr>
+        <p:cNvPr id="1" name=""/>
+        <p:cNvGrpSpPr/>
+        <p:nvPr/>
+      </p:nvGrpSpPr>
+      <p:grpSpPr>
+        <a:xfrm>
+          <a:off x="0" y="0"/>
+          <a:ext cx="0" cy="0"/>
+          <a:chOff x="0" y="0"/>
+          <a:chExt cx="0" cy="0"/>
+        </a:xfrm>
+      </p:grpSpPr>
+      <p:sp>
+        <p:nvSpPr>
+          <p:cNvPr id="2" name="Slide Image Placeholder 1"/>
+          <p:cNvSpPr>
+            <a:spLocks noGrp="1"/>
+          </p:cNvSpPr>
+          <p:nvPr>
+            <p:ph type="sldImg" idx="2"/>
+          </p:nvPr>
+        </p:nvSpPr>
+        <p:spPr/>
+      </p:sp>
+      <p:sp>
+        <p:nvSpPr>
+          <p:cNvPr id="3" name="Notes Placeholder 2"/>
+          <p:cNvSpPr>
+            <a:spLocks noGrp="1"/>
+          </p:cNvSpPr>
+          <p:nvPr>
+            <p:ph type="body" idx="3" sz="quarter"/>
+          </p:nvPr>
+        </p:nvSpPr>
+        <p:spPr/>
+        <p:txBody>
+          <a:bodyPr/>
+          <a:lstStyle/>
+          <a:p>
+            <a:r>
+              <a:t>End on the closing line and the method signature.</a:t>
             </a:r>
           </a:p>
         </p:txBody>
@@ -1573,7 +1928,7 @@
           <a:lstStyle/>
           <a:p>
             <a:r>
-              <a:t>Keep this conversational: two lines and a kink, tried at every year; then shake the data to see if the date holds still. The 'two doors' framing sets up the mechanism logic used throughout Acts II-III.</a:t>
+              <a:t>Act I is the reframed one: not 'treaties failed' but 'a real acceleration whose timing cannot yet separate Paris from the renewables cost decline'.</a:t>
             </a:r>
           </a:p>
         </p:txBody>
@@ -1643,7 +1998,7 @@
           <a:lstStyle/>
           <a:p>
             <a:r>
-              <a:t>The placebo idea in one line: a significant result at the treaty year means little if 1990 and 1994 are just as 'significant'. The ladder is the paper's discipline — and Act I applies it to Paris.</a:t>
+              <a:t>Keep it conversational: two lines and a kink, tried at every year; then shake the data and see if the date holds still. The two-doors framing carries the mechanism logic of Acts II-III.</a:t>
             </a:r>
           </a:p>
         </p:txBody>
@@ -1713,7 +2068,7 @@
           <a:lstStyle/>
           <a:p>
             <a:r>
-              <a:t>Act I is reframed: not 'treaties failed' but 'the record shows a real recent acceleration whose timing cannot yet separate Paris from the renewables cost decline.'</a:t>
+              <a:t>The placebo idea in one line: significance at the treaty year means little if 1990 and 1994 are just as significant. The ladder is the paper's discipline — and Act I turns it on Paris.</a:t>
             </a:r>
           </a:p>
         </p:txBody>
@@ -1783,7 +2138,7 @@
           <a:lstStyle/>
           <a:p>
             <a:r>
-              <a:t>C/GDP breaks ~1973, E/GDP ~1974 — the oil-shock era. C/E's point estimate is 1992 but its interval spans 1978–2011: it does not uniquely identify Rio. Robust to consumption-based emissions, excluding former Soviet economies, PPP GDP.</a:t>
+              <a:t>Three numbers carry Act I: the old bend, the slowdown, and the awkward onset date.</a:t>
             </a:r>
           </a:p>
         </p:txBody>
@@ -1853,7 +2208,7 @@
           <a:lstStyle/>
           <a:p>
             <a:r>
-              <a:t>A real supply-side acceleration (C/E −0.7 pp/yr, NW t=4.3; C/GDP −0.9, t=2.9). But onsets from 2011–2016 fit the full record about equally well (best 2013), and E/GDP shows no acceleration. What an effective Paris should look like — and not yet separable from the renewables cost collapse that preceded the treaty.</a:t>
+              <a:t>Robust to consumption-based emissions, excluding former Soviet economies, PPP GDP. Multiple-break models show several episodes, not one intervention.</a:t>
             </a:r>
           </a:p>
         </p:txBody>
@@ -1923,7 +2278,7 @@
           <a:lstStyle/>
           <a:p>
             <a:r>
-              <a:t>Emissions growth slowed from +2.1 to +0.4%/yr after 2015 — but roughly two-thirds of the slowdown is slower GDP growth; one-third is the cleaner fuel mix. The gap to the dotted line is the remaining task.</a:t>
+              <a:t>C/E −0.7 pp/yr (NW t=4.3); C/GDP −0.9 (t=2.9); E/GDP −0.3 (t=1.5, ns). Onset plateau 2011–2016, best 2013 — indistinguishable from the renewables cost collapse.</a:t>
             </a:r>
           </a:p>
         </p:txBody>
@@ -1993,7 +2348,7 @@
           <a:lstStyle/>
           <a:p>
             <a:r>
-              <a:t>Nominal treaty-date significance is common (48–69% of series); date-uniqueness is rare (Rio: 10/21/34 series by component; Paris: 14/5/6). The same discipline applied to Paris's decade dates the global acceleration's onset to ~2013.</a:t>
+              <a:t>Emissions +2.1 to +0.4%/yr after 2015. Decomposition: ~1.1pp slower GDP growth (incl. COVID), ~0.5pp fuel mix, ~0.1pp efficiency.</a:t>
             </a:r>
           </a:p>
         </p:txBody>
@@ -5007,8 +5362,8 @@
         </p:nvSpPr>
         <p:spPr>
           <a:xfrm>
-            <a:off x="822960" y="1554480"/>
-            <a:ext cx="10515600" cy="3291840"/>
+            <a:off x="822960" y="1463040"/>
+            <a:ext cx="10515600" cy="3383280"/>
           </a:xfrm>
           <a:prstGeom prst="rect">
             <a:avLst/>
@@ -5027,29 +5382,29 @@
               </a:spcAft>
             </a:pPr>
             <a:r>
-              <a:rPr sz="4800" b="1" i="0">
+              <a:rPr sz="4600" b="1" i="0">
                 <a:solidFill>
                   <a:srgbClr val="212121"/>
                 </a:solidFill>
                 <a:latin typeface="Calibri"/>
               </a:rPr>
-              <a:t>WHAT BENDS THE CURVE?</a:t>
-            </a:r>
-          </a:p>
-          <a:p>
-            <a:pPr algn="l">
-              <a:spcAft>
-                <a:spcPts val="1600"/>
-              </a:spcAft>
-            </a:pPr>
-            <a:r>
-              <a:rPr sz="2000" b="0" i="0">
+              <a:t>What Bends the Curve?</a:t>
+            </a:r>
+          </a:p>
+          <a:p>
+            <a:pPr algn="l">
+              <a:spcAft>
+                <a:spcPts val="1400"/>
+              </a:spcAft>
+            </a:pPr>
+            <a:r>
+              <a:rPr sz="1900" b="0" i="0">
                 <a:solidFill>
                   <a:srgbClr val="555555"/>
                 </a:solidFill>
                 <a:latin typeface="Calibri"/>
               </a:rPr>
-              <a:t>Paris at ten: long trends, a new acceleration, and the national transformations that carry the signal</a:t>
+              <a:t>An argument in four acts, on why the global carbon-intensity record cannot yet hand Paris the credit it may deserve — and where the policy signal actually lives.</a:t>
             </a:r>
           </a:p>
           <a:p>
@@ -5059,7 +5414,7 @@
               </a:spcAft>
             </a:pPr>
             <a:r>
-              <a:rPr sz="1500" b="1" i="0">
+              <a:rPr sz="1400" b="1" i="0">
                 <a:solidFill>
                   <a:srgbClr val="1B7837"/>
                 </a:solidFill>
@@ -5078,7 +5433,7 @@
         </p:nvSpPr>
         <p:spPr>
           <a:xfrm>
-            <a:off x="822960" y="5394960"/>
+            <a:off x="822960" y="5440680"/>
             <a:ext cx="10515600" cy="822960"/>
           </a:xfrm>
           <a:prstGeom prst="rect">
@@ -5098,40 +5453,13 @@
               </a:spcAft>
             </a:pPr>
             <a:r>
-              <a:rPr sz="1350" b="1" i="0">
+              <a:rPr sz="1300" b="1" i="0">
                 <a:solidFill>
                   <a:srgbClr val="212121"/>
                 </a:solidFill>
                 <a:latin typeface="Calibri"/>
               </a:rPr>
-              <a:t>204 jurisdictions     </a:t>
-            </a:r>
-            <a:r>
-              <a:rPr sz="1350" b="1" i="0">
-                <a:solidFill>
-                  <a:srgbClr val="212121"/>
-                </a:solidFill>
-                <a:latin typeface="Calibri"/>
-              </a:rPr>
-              <a:t>97 eligible national breaks     </a:t>
-            </a:r>
-            <a:r>
-              <a:rPr sz="1350" b="1" i="0">
-                <a:solidFill>
-                  <a:srgbClr val="212121"/>
-                </a:solidFill>
-                <a:latin typeface="Calibri"/>
-              </a:rPr>
-              <a:t>7 mechanism families     </a:t>
-            </a:r>
-            <a:r>
-              <a:rPr sz="1350" b="1" i="0">
-                <a:solidFill>
-                  <a:srgbClr val="1B7837"/>
-                </a:solidFill>
-                <a:latin typeface="Calibri"/>
-              </a:rPr>
-              <a:t>9 constructive decarbonizations</a:t>
+              <a:t>204 jurisdictions · 97 eligible national breaks · 107 transition episodes · 7 mechanism families · 9 constructive decarbonizations</a:t>
             </a:r>
           </a:p>
         </p:txBody>
@@ -5188,7 +5516,7 @@
                 </a:solidFill>
                 <a:latin typeface="Calibri"/>
               </a:rPr>
-              <a:t>ACT I · VERDICT</a:t>
+              <a:t>ACT I · THE PLACEBO DISCIPLINE</a:t>
             </a:r>
           </a:p>
           <a:p>
@@ -5204,7 +5532,7 @@
                 </a:solidFill>
                 <a:latin typeface="Calibri"/>
               </a:rPr>
-              <a:t>The global record can show an acceleration — not yet its author</a:t>
+              <a:t>Any smooth curve makes many years look significant</a:t>
             </a:r>
           </a:p>
         </p:txBody>
@@ -5217,8 +5545,8 @@
         </p:nvSpPr>
         <p:spPr>
           <a:xfrm>
-            <a:off x="502920" y="1463040"/>
-            <a:ext cx="5532120" cy="4937760"/>
+            <a:off x="502920" y="1188720"/>
+            <a:ext cx="11201400" cy="731520"/>
           </a:xfrm>
           <a:prstGeom prst="rect">
             <a:avLst/>
@@ -5233,92 +5561,17 @@
           <a:p>
             <a:pPr algn="l">
               <a:spcAft>
-                <a:spcPts val="600"/>
-              </a:spcAft>
-            </a:pPr>
-            <a:r>
-              <a:rPr sz="1600" b="1" i="0">
-                <a:solidFill>
-                  <a:srgbClr val="1B7837"/>
-                </a:solidFill>
-                <a:latin typeface="Calibri"/>
-              </a:rPr>
-              <a:t>What the data establishes</a:t>
-            </a:r>
-          </a:p>
-          <a:p>
-            <a:pPr algn="l">
-              <a:spcAft>
-                <a:spcPts val="700"/>
-              </a:spcAft>
-            </a:pPr>
-            <a:r>
-              <a:rPr sz="1350" b="1" i="0">
-                <a:solidFill>
-                  <a:srgbClr val="1B7837"/>
-                </a:solidFill>
-                <a:latin typeface="Calibri"/>
-              </a:rPr>
-              <a:t>•  </a:t>
-            </a:r>
-            <a:r>
-              <a:rPr sz="1350" b="0" i="0">
+                <a:spcPts val="0"/>
+              </a:spcAft>
+            </a:pPr>
+            <a:r>
+              <a:rPr sz="1300" b="0" i="0">
                 <a:solidFill>
                   <a:srgbClr val="555555"/>
                 </a:solidFill>
                 <a:latin typeface="Calibri"/>
               </a:rPr>
-              <a:t>A real post-2013 supply-side acceleration: the fuel mix is improving −0.5%/yr after a flat quarter-century; overall intensity is falling ~0.9 pp/yr faster than its Rio-to-Paris trend.</a:t>
-            </a:r>
-          </a:p>
-          <a:p>
-            <a:pPr algn="l">
-              <a:spcAft>
-                <a:spcPts val="700"/>
-              </a:spcAft>
-            </a:pPr>
-            <a:r>
-              <a:rPr sz="1350" b="1" i="0">
-                <a:solidFill>
-                  <a:srgbClr val="1B7837"/>
-                </a:solidFill>
-                <a:latin typeface="Calibri"/>
-              </a:rPr>
-              <a:t>•  </a:t>
-            </a:r>
-            <a:r>
-              <a:rPr sz="1350" b="0" i="0">
-                <a:solidFill>
-                  <a:srgbClr val="555555"/>
-                </a:solidFill>
-                <a:latin typeface="Calibri"/>
-              </a:rPr>
-              <a:t>Emissions growth slowed from +2.1 to +0.4%/yr — the direction an effective Paris requires.</a:t>
-            </a:r>
-          </a:p>
-          <a:p>
-            <a:pPr algn="l">
-              <a:spcAft>
-                <a:spcPts val="700"/>
-              </a:spcAft>
-            </a:pPr>
-            <a:r>
-              <a:rPr sz="1350" b="1" i="0">
-                <a:solidFill>
-                  <a:srgbClr val="1B7837"/>
-                </a:solidFill>
-                <a:latin typeface="Calibri"/>
-              </a:rPr>
-              <a:t>•  </a:t>
-            </a:r>
-            <a:r>
-              <a:rPr sz="1350" b="0" i="0">
-                <a:solidFill>
-                  <a:srgbClr val="555555"/>
-                </a:solidFill>
-                <a:latin typeface="Calibri"/>
-              </a:rPr>
-              <a:t>No acceleration on the demand side: energy efficiency continues its 50-year trend, no faster.</a:t>
+              <a:t>Place the break at every candidate year and Rio fits well — alongside a broad plateau of neighbors that fit as well or better. That is why treaty-year significance, common in half to two-thirds of country series, collapses to a small minority once each treaty year must beat its neighbors. The same discipline, turned on Paris's decade, dates the new acceleration to roughly 2013.</a:t>
             </a:r>
           </a:p>
         </p:txBody>
@@ -5331,8 +5584,8 @@
         </p:nvSpPr>
         <p:spPr>
           <a:xfrm>
-            <a:off x="6400800" y="1463040"/>
-            <a:ext cx="5303520" cy="4937760"/>
+            <a:off x="502920" y="1956816"/>
+            <a:ext cx="11201400" cy="457200"/>
           </a:xfrm>
           <a:prstGeom prst="rect">
             <a:avLst/>
@@ -5347,121 +5600,54 @@
           <a:p>
             <a:pPr algn="l">
               <a:spcAft>
-                <a:spcPts val="600"/>
-              </a:spcAft>
-            </a:pPr>
-            <a:r>
-              <a:rPr sz="1600" b="1" i="0">
-                <a:solidFill>
-                  <a:srgbClr val="B33A3A"/>
-                </a:solidFill>
-                <a:latin typeface="Calibri"/>
-              </a:rPr>
-              <a:t>Why attribution stays open</a:t>
-            </a:r>
-          </a:p>
-          <a:p>
-            <a:pPr algn="l">
-              <a:spcAft>
-                <a:spcPts val="700"/>
-              </a:spcAft>
-            </a:pPr>
-            <a:r>
-              <a:rPr sz="1350" b="1" i="0">
-                <a:solidFill>
-                  <a:srgbClr val="B33A3A"/>
-                </a:solidFill>
-                <a:latin typeface="Calibri"/>
-              </a:rPr>
-              <a:t>•  </a:t>
-            </a:r>
-            <a:r>
-              <a:rPr sz="1350" b="0" i="0">
-                <a:solidFill>
-                  <a:srgbClr val="555555"/>
-                </a:solidFill>
-                <a:latin typeface="Calibri"/>
-              </a:rPr>
-              <a:t>Timing: start years from 2011 to 2016 fit about equally well (best: 2013) — indistinguishable from the renewables cost collapse that preceded Paris.</a:t>
-            </a:r>
-          </a:p>
-          <a:p>
-            <a:pPr algn="l">
-              <a:spcAft>
-                <a:spcPts val="700"/>
-              </a:spcAft>
-            </a:pPr>
-            <a:r>
-              <a:rPr sz="1350" b="1" i="0">
-                <a:solidFill>
-                  <a:srgbClr val="B33A3A"/>
-                </a:solidFill>
-                <a:latin typeface="Calibri"/>
-              </a:rPr>
-              <a:t>•  </a:t>
-            </a:r>
-            <a:r>
-              <a:rPr sz="1350" b="0" i="0">
-                <a:solidFill>
-                  <a:srgbClr val="555555"/>
-                </a:solidFill>
-                <a:latin typeface="Calibri"/>
-              </a:rPr>
-              <a:t>Power: with only 8 post-Paris years, we could only detect a very large acceleration — Paris would have had to double a 50-year trend to prove itself already.</a:t>
-            </a:r>
-          </a:p>
-          <a:p>
-            <a:pPr algn="l">
-              <a:spcAft>
-                <a:spcPts val="700"/>
-              </a:spcAft>
-            </a:pPr>
-            <a:r>
-              <a:rPr sz="1350" b="1" i="0">
-                <a:solidFill>
-                  <a:srgbClr val="B33A3A"/>
-                </a:solidFill>
-                <a:latin typeface="Calibri"/>
-              </a:rPr>
-              <a:t>•  </a:t>
-            </a:r>
-            <a:r>
-              <a:rPr sz="1350" b="0" i="0">
-                <a:solidFill>
-                  <a:srgbClr val="555555"/>
-                </a:solidFill>
-                <a:latin typeface="Calibri"/>
-              </a:rPr>
-              <a:t>Aggregation: China's WTO-era coal boom flattened the global fuel-mix baseline; the world series is a China-weighted average that hides national signals.</a:t>
-            </a:r>
-          </a:p>
-          <a:p>
-            <a:pPr algn="l">
-              <a:spcAft>
-                <a:spcPts val="700"/>
-              </a:spcAft>
-            </a:pPr>
-            <a:r>
-              <a:rPr sz="1350" b="1" i="0">
-                <a:solidFill>
-                  <a:srgbClr val="B33A3A"/>
-                </a:solidFill>
-                <a:latin typeface="Calibri"/>
-              </a:rPr>
-              <a:t>•  </a:t>
-            </a:r>
-            <a:r>
-              <a:rPr sz="1350" b="0" i="0">
-                <a:solidFill>
-                  <a:srgbClr val="555555"/>
-                </a:solidFill>
-                <a:latin typeface="Calibri"/>
-              </a:rPr>
-              <a:t>Design: Paris works through national pledges and national transformation — its signature should appear country by country. So we look there.</a:t>
-            </a:r>
-          </a:p>
-        </p:txBody>
-      </p:sp>
+                <a:spcPts val="0"/>
+              </a:spcAft>
+            </a:pPr>
+            <a:r>
+              <a:rPr sz="1150" b="1" i="1">
+                <a:solidFill>
+                  <a:srgbClr val="3A66A5"/>
+                </a:solidFill>
+                <a:latin typeface="Calibri"/>
+              </a:rPr>
+              <a:t>How to read it: </a:t>
+            </a:r>
+            <a:r>
+              <a:rPr sz="1150" b="0" i="1">
+                <a:solidFill>
+                  <a:srgbClr val="8A8A8A"/>
+                </a:solidFill>
+                <a:latin typeface="Calibri"/>
+              </a:rPr>
+              <a:t>Top: model improvement from placing the global fuel-mix break in each year. Bottom: the share of country series significant at each treaty date (left point) versus the share where that date also beats nearby placebo years (right point).</a:t>
+            </a:r>
+          </a:p>
+        </p:txBody>
+      </p:sp>
+      <p:pic>
+        <p:nvPicPr>
+          <p:cNvPr id="5" name="Picture 4" descr="takeaway_fig02_placebo_test.png"/>
+          <p:cNvPicPr>
+            <a:picLocks noChangeAspect="1"/>
+          </p:cNvPicPr>
+          <p:nvPr/>
+        </p:nvPicPr>
+        <p:blipFill>
+          <a:blip r:embed="rId2"/>
+          <a:stretch>
+            <a:fillRect/>
+          </a:stretch>
+        </p:blipFill>
+        <p:spPr>
+          <a:xfrm>
+            <a:off x="3603650" y="2468880"/>
+            <a:ext cx="4981651" cy="4151376"/>
+          </a:xfrm>
+          <a:prstGeom prst="rect">
+            <a:avLst/>
+          </a:prstGeom>
+        </p:spPr>
+      </p:pic>
     </p:spTree>
   </p:cSld>
   <p:clrMapOvr>
@@ -5514,7 +5700,7 @@
                 </a:solidFill>
                 <a:latin typeface="Calibri"/>
               </a:rPr>
-              <a:t>ACT II · WHAT BENDS NATIONAL CURVES?</a:t>
+              <a:t>WHERE ACT I LEAVES US</a:t>
             </a:r>
           </a:p>
           <a:p>
@@ -5530,7 +5716,7 @@
                 </a:solidFill>
                 <a:latin typeface="Calibri"/>
               </a:rPr>
-              <a:t>97 national breaks, five decades of economic history</a:t>
+              <a:t>The record shows an acceleration — not yet its author</a:t>
             </a:r>
           </a:p>
         </p:txBody>
@@ -5543,8 +5729,8 @@
         </p:nvSpPr>
         <p:spPr>
           <a:xfrm>
-            <a:off x="502920" y="1207008"/>
-            <a:ext cx="11201400" cy="603504"/>
+            <a:off x="502920" y="1463040"/>
+            <a:ext cx="5532120" cy="4937760"/>
           </a:xfrm>
           <a:prstGeom prst="rect">
             <a:avLst/>
@@ -5559,54 +5745,108 @@
           <a:p>
             <a:pPr algn="l">
               <a:spcAft>
+                <a:spcPts val="600"/>
+              </a:spcAft>
+            </a:pPr>
+            <a:r>
+              <a:rPr sz="1500" b="1" i="0">
+                <a:solidFill>
+                  <a:srgbClr val="1B7837"/>
+                </a:solidFill>
+                <a:latin typeface="Calibri"/>
+              </a:rPr>
+              <a:t>Established</a:t>
+            </a:r>
+          </a:p>
+          <a:p>
+            <a:pPr algn="l">
+              <a:spcAft>
                 <a:spcPts val="0"/>
               </a:spcAft>
             </a:pPr>
             <a:r>
-              <a:rPr sz="1250" b="1" i="0">
-                <a:solidFill>
-                  <a:srgbClr val="3A66A5"/>
-                </a:solidFill>
-                <a:latin typeface="Calibri"/>
-              </a:rPr>
-              <a:t>How to read it:  </a:t>
-            </a:r>
-            <a:r>
-              <a:rPr sz="1250" b="0" i="0">
+              <a:rPr sz="1350" b="0" i="0">
                 <a:solidFill>
                   <a:srgbClr val="555555"/>
                 </a:solidFill>
                 <a:latin typeface="Calibri"/>
               </a:rPr>
-              <a:t>Top: each dot is one country, placed at its estimated break year; green triangles are the nine policy-enabled cases. Shaded bands mark major economic and political episodes; Rio and Paris are the two dashed lines. Bottom: how often a documented historical event falls near a country's break (red) versus what randomly chosen years would produce (blue).</a:t>
-            </a:r>
-          </a:p>
-        </p:txBody>
-      </p:sp>
-      <p:pic>
-        <p:nvPicPr>
-          <p:cNvPr id="4" name="Picture 3" descr="takeaway_fig03_when_and_why_curves_bend.png"/>
-          <p:cNvPicPr>
-            <a:picLocks noChangeAspect="1"/>
-          </p:cNvPicPr>
+              <a:t>A real post-2013 supply-side acceleration — the fuel mix improving at −0.5% per year after a flat quarter-century — and emissions growth down from +2.1% to +0.4% per year. This is the direction an effective Paris requires, in the component where policy operates most directly. The demand side, meanwhile, continues its fifty-year trend, no faster.</a:t>
+            </a:r>
+          </a:p>
+        </p:txBody>
+      </p:sp>
+      <p:sp>
+        <p:nvSpPr>
+          <p:cNvPr id="4" name="TextBox 3"/>
+          <p:cNvSpPr txBox="1"/>
           <p:nvPr/>
-        </p:nvPicPr>
-        <p:blipFill>
-          <a:blip r:embed="rId2"/>
-          <a:stretch>
-            <a:fillRect/>
-          </a:stretch>
-        </p:blipFill>
-        <p:spPr>
-          <a:xfrm>
-            <a:off x="3015691" y="1865376"/>
-            <a:ext cx="6157569" cy="4736592"/>
+        </p:nvSpPr>
+        <p:spPr>
+          <a:xfrm>
+            <a:off x="6400800" y="1463040"/>
+            <a:ext cx="5303520" cy="4937760"/>
           </a:xfrm>
           <a:prstGeom prst="rect">
             <a:avLst/>
           </a:prstGeom>
-        </p:spPr>
-      </p:pic>
+          <a:noFill/>
+        </p:spPr>
+        <p:txBody>
+          <a:bodyPr wrap="square">
+            <a:spAutoFit/>
+          </a:bodyPr>
+          <a:lstStyle/>
+          <a:p>
+            <a:pPr algn="l">
+              <a:spcAft>
+                <a:spcPts val="600"/>
+              </a:spcAft>
+            </a:pPr>
+            <a:r>
+              <a:rPr sz="1500" b="1" i="0">
+                <a:solidFill>
+                  <a:srgbClr val="B33A3A"/>
+                </a:solidFill>
+                <a:latin typeface="Calibri"/>
+              </a:rPr>
+              <a:t>Open — and why</a:t>
+            </a:r>
+          </a:p>
+          <a:p>
+            <a:pPr algn="l">
+              <a:spcAft>
+                <a:spcPts val="800"/>
+              </a:spcAft>
+            </a:pPr>
+            <a:r>
+              <a:rPr sz="1350" b="0" i="0">
+                <a:solidFill>
+                  <a:srgbClr val="555555"/>
+                </a:solidFill>
+                <a:latin typeface="Calibri"/>
+              </a:rPr>
+              <a:t>The onset is timed to ~2013, not 2015, and eight post-Paris years give the test almost no power: Paris would have had to double a fifty-year trend to prove itself already. The world series is also a China-weighted average — the WTO-era coal boom flattened the baseline that makes the recent years look fast. And Paris was built to work through national pledges and national transformation, so its signature should appear country by country.</a:t>
+            </a:r>
+          </a:p>
+          <a:p>
+            <a:pPr algn="l">
+              <a:spcAft>
+                <a:spcPts val="0"/>
+              </a:spcAft>
+            </a:pPr>
+            <a:r>
+              <a:rPr sz="1500" b="1" i="0">
+                <a:solidFill>
+                  <a:srgbClr val="212121"/>
+                </a:solidFill>
+                <a:latin typeface="Calibri"/>
+              </a:rPr>
+              <a:t>So we look there.</a:t>
+            </a:r>
+          </a:p>
+        </p:txBody>
+      </p:sp>
     </p:spTree>
   </p:cSld>
   <p:clrMapOvr>
@@ -5633,8 +5873,8 @@
         </p:nvSpPr>
         <p:spPr>
           <a:xfrm>
-            <a:off x="502920" y="274320"/>
-            <a:ext cx="11201400" cy="914400"/>
+            <a:off x="822960" y="777240"/>
+            <a:ext cx="10515600" cy="2377440"/>
           </a:xfrm>
           <a:prstGeom prst="rect">
             <a:avLst/>
@@ -5649,17 +5889,49 @@
           <a:p>
             <a:pPr algn="l">
               <a:spcAft>
-                <a:spcPts val="200"/>
+                <a:spcPts val="0"/>
+              </a:spcAft>
+            </a:pPr>
+            <a:r>
+              <a:rPr sz="4400" b="1" i="0">
+                <a:solidFill>
+                  <a:srgbClr val="1B7837"/>
+                </a:solidFill>
+                <a:latin typeface="Calibri"/>
+              </a:rPr>
+              <a:t>II</a:t>
+            </a:r>
+          </a:p>
+          <a:p>
+            <a:pPr algn="l">
+              <a:spcAft>
+                <a:spcPts val="600"/>
               </a:spcAft>
             </a:pPr>
             <a:r>
               <a:rPr sz="1200" b="1" i="0">
                 <a:solidFill>
-                  <a:srgbClr val="1B7837"/>
-                </a:solidFill>
-                <a:latin typeface="Calibri"/>
-              </a:rPr>
-              <a:t>ACT II · WHAT BENDS NATIONAL CURVES?</a:t>
+                  <a:srgbClr val="8A8A8A"/>
+                </a:solidFill>
+                <a:latin typeface="Calibri"/>
+              </a:rPr>
+              <a:t>ACT II</a:t>
+            </a:r>
+          </a:p>
+          <a:p>
+            <a:pPr algn="l">
+              <a:spcAft>
+                <a:spcPts val="800"/>
+              </a:spcAft>
+            </a:pPr>
+            <a:r>
+              <a:rPr sz="2800" b="1" i="0">
+                <a:solidFill>
+                  <a:srgbClr val="212121"/>
+                </a:solidFill>
+                <a:latin typeface="Calibri"/>
+              </a:rPr>
+              <a:t>What bends national curves?</a:t>
             </a:r>
           </a:p>
           <a:p>
@@ -5669,13 +5941,13 @@
               </a:spcAft>
             </a:pPr>
             <a:r>
-              <a:rPr sz="2400" b="1" i="0">
-                <a:solidFill>
-                  <a:srgbClr val="212121"/>
-                </a:solidFill>
-                <a:latin typeface="Calibri"/>
-              </a:rPr>
-              <a:t>What accompanied the bends</a:t>
+              <a:rPr sz="1400" b="0" i="0">
+                <a:solidFill>
+                  <a:srgbClr val="555555"/>
+                </a:solidFill>
+                <a:latin typeface="Calibri"/>
+              </a:rPr>
+              <a:t>If the global aggregate cannot separate treaty from trend, the country record can at least say what bends carbon-intensity curves when they do bend — and it is rarely a treaty date.</a:t>
             </a:r>
           </a:p>
         </p:txBody>
@@ -5688,8 +5960,8 @@
         </p:nvSpPr>
         <p:spPr>
           <a:xfrm>
-            <a:off x="502920" y="1207008"/>
-            <a:ext cx="11201400" cy="603504"/>
+            <a:off x="822960" y="4206240"/>
+            <a:ext cx="3474720" cy="1828800"/>
           </a:xfrm>
           <a:prstGeom prst="rect">
             <a:avLst/>
@@ -5704,54 +5976,147 @@
           <a:p>
             <a:pPr algn="l">
               <a:spcAft>
+                <a:spcPts val="200"/>
+              </a:spcAft>
+            </a:pPr>
+            <a:r>
+              <a:rPr sz="3000" b="1" i="0">
+                <a:solidFill>
+                  <a:srgbClr val="1B7837"/>
+                </a:solidFill>
+                <a:latin typeface="Calibri"/>
+              </a:rPr>
+              <a:t>97</a:t>
+            </a:r>
+          </a:p>
+          <a:p>
+            <a:pPr algn="l">
+              <a:spcAft>
                 <a:spcPts val="0"/>
               </a:spcAft>
             </a:pPr>
             <a:r>
-              <a:rPr sz="1250" b="1" i="0">
-                <a:solidFill>
-                  <a:srgbClr val="3A66A5"/>
-                </a:solidFill>
-                <a:latin typeface="Calibri"/>
-              </a:rPr>
-              <a:t>How to read it:  </a:t>
-            </a:r>
-            <a:r>
               <a:rPr sz="1250" b="0" i="0">
                 <a:solidFill>
                   <a:srgbClr val="555555"/>
                 </a:solidFill>
                 <a:latin typeface="Calibri"/>
               </a:rPr>
-              <a:t>One square per country, grouped by the historical process best supported by documentary evidence around its break. Green marks the countries where climate policy and low-carbon technology are that best-supported process; light gray means the record cannot yet explain the break — reported honestly rather than forced into a category.</a:t>
-            </a:r>
-          </a:p>
-        </p:txBody>
-      </p:sp>
-      <p:pic>
-        <p:nvPicPr>
-          <p:cNvPr id="4" name="Picture 3" descr="takeaway_fig04_mechanism_census.png"/>
-          <p:cNvPicPr>
-            <a:picLocks noChangeAspect="1"/>
-          </p:cNvPicPr>
+              <a:t>national breaks passing every statistical screen, across five decades</a:t>
+            </a:r>
+          </a:p>
+        </p:txBody>
+      </p:sp>
+      <p:sp>
+        <p:nvSpPr>
+          <p:cNvPr id="4" name="TextBox 3"/>
+          <p:cNvSpPr txBox="1"/>
           <p:nvPr/>
-        </p:nvPicPr>
-        <p:blipFill>
-          <a:blip r:embed="rId2"/>
-          <a:stretch>
-            <a:fillRect/>
-          </a:stretch>
-        </p:blipFill>
-        <p:spPr>
-          <a:xfrm>
-            <a:off x="1194553" y="1865376"/>
-            <a:ext cx="9799845" cy="4736592"/>
+        </p:nvSpPr>
+        <p:spPr>
+          <a:xfrm>
+            <a:off x="4434840" y="4206240"/>
+            <a:ext cx="3474720" cy="1828800"/>
           </a:xfrm>
           <a:prstGeom prst="rect">
             <a:avLst/>
           </a:prstGeom>
-        </p:spPr>
-      </p:pic>
+          <a:noFill/>
+        </p:spPr>
+        <p:txBody>
+          <a:bodyPr wrap="square">
+            <a:spAutoFit/>
+          </a:bodyPr>
+          <a:lstStyle/>
+          <a:p>
+            <a:pPr algn="l">
+              <a:spcAft>
+                <a:spcPts val="200"/>
+              </a:spcAft>
+            </a:pPr>
+            <a:r>
+              <a:rPr sz="3000" b="1" i="0">
+                <a:solidFill>
+                  <a:srgbClr val="1B7837"/>
+                </a:solidFill>
+                <a:latin typeface="Calibri"/>
+              </a:rPr>
+              <a:t>45% vs 17%</a:t>
+            </a:r>
+          </a:p>
+          <a:p>
+            <a:pPr algn="l">
+              <a:spcAft>
+                <a:spcPts val="0"/>
+              </a:spcAft>
+            </a:pPr>
+            <a:r>
+              <a:rPr sz="1250" b="0" i="0">
+                <a:solidFill>
+                  <a:srgbClr val="555555"/>
+                </a:solidFill>
+                <a:latin typeface="Calibri"/>
+              </a:rPr>
+              <a:t>documented events within two years of a break, observed versus chance</a:t>
+            </a:r>
+          </a:p>
+        </p:txBody>
+      </p:sp>
+      <p:sp>
+        <p:nvSpPr>
+          <p:cNvPr id="5" name="TextBox 4"/>
+          <p:cNvSpPr txBox="1"/>
+          <p:nvPr/>
+        </p:nvSpPr>
+        <p:spPr>
+          <a:xfrm>
+            <a:off x="8046720" y="4206240"/>
+            <a:ext cx="3474720" cy="1828800"/>
+          </a:xfrm>
+          <a:prstGeom prst="rect">
+            <a:avLst/>
+          </a:prstGeom>
+          <a:noFill/>
+        </p:spPr>
+        <p:txBody>
+          <a:bodyPr wrap="square">
+            <a:spAutoFit/>
+          </a:bodyPr>
+          <a:lstStyle/>
+          <a:p>
+            <a:pPr algn="l">
+              <a:spcAft>
+                <a:spcPts val="200"/>
+              </a:spcAft>
+            </a:pPr>
+            <a:r>
+              <a:rPr sz="3000" b="1" i="0">
+                <a:solidFill>
+                  <a:srgbClr val="1B7837"/>
+                </a:solidFill>
+                <a:latin typeface="Calibri"/>
+              </a:rPr>
+              <a:t>9 of 97</a:t>
+            </a:r>
+          </a:p>
+          <a:p>
+            <a:pPr algn="l">
+              <a:spcAft>
+                <a:spcPts val="0"/>
+              </a:spcAft>
+            </a:pPr>
+            <a:r>
+              <a:rPr sz="1250" b="0" i="0">
+                <a:solidFill>
+                  <a:srgbClr val="555555"/>
+                </a:solidFill>
+                <a:latin typeface="Calibri"/>
+              </a:rPr>
+              <a:t>breaks best explained by climate policy and low-carbon technology</a:t>
+            </a:r>
+          </a:p>
+        </p:txBody>
+      </p:sp>
     </p:spTree>
   </p:cSld>
   <p:clrMapOvr>
@@ -5800,11 +6165,11 @@
             <a:r>
               <a:rPr sz="1200" b="1" i="0">
                 <a:solidFill>
-                  <a:srgbClr val="C77F00"/>
-                </a:solidFill>
-                <a:latin typeface="Calibri"/>
-              </a:rPr>
-              <a:t>ACT III · DID THE BENDS COUNT?</a:t>
+                  <a:srgbClr val="1B7837"/>
+                </a:solidFill>
+                <a:latin typeface="Calibri"/>
+              </a:rPr>
+              <a:t>ACT II · THE SCATTER</a:t>
             </a:r>
           </a:p>
           <a:p>
@@ -5820,7 +6185,7 @@
                 </a:solidFill>
                 <a:latin typeface="Calibri"/>
               </a:rPr>
-              <a:t>Seven mechanisms, six verdicts</a:t>
+              <a:t>Ninety-seven breaks, five decades, no treaty era</a:t>
             </a:r>
           </a:p>
         </p:txBody>
@@ -5833,8 +6198,8 @@
         </p:nvSpPr>
         <p:spPr>
           <a:xfrm>
-            <a:off x="502920" y="1371600"/>
-            <a:ext cx="5532120" cy="5212080"/>
+            <a:off x="502920" y="1188720"/>
+            <a:ext cx="11201400" cy="731520"/>
           </a:xfrm>
           <a:prstGeom prst="rect">
             <a:avLst/>
@@ -5849,192 +6214,17 @@
           <a:p>
             <a:pPr algn="l">
               <a:spcAft>
-                <a:spcPts val="600"/>
-              </a:spcAft>
-            </a:pPr>
-            <a:r>
-              <a:rPr sz="1400" b="1" i="0">
-                <a:solidFill>
-                  <a:srgbClr val="212121"/>
-                </a:solidFill>
-                <a:latin typeface="Calibri"/>
-              </a:rPr>
-              <a:t>MECHANISMS — what accompanied the bend</a:t>
-            </a:r>
-          </a:p>
-          <a:p>
-            <a:pPr algn="l">
-              <a:spcAft>
-                <a:spcPts val="400"/>
-              </a:spcAft>
-            </a:pPr>
-            <a:r>
-              <a:rPr sz="1200" b="1" i="0">
-                <a:solidFill>
-                  <a:srgbClr val="212121"/>
-                </a:solidFill>
-                <a:latin typeface="Calibri"/>
-              </a:rPr>
-              <a:t>Policy-enabled low carbon — </a:t>
-            </a:r>
-            <a:r>
-              <a:rPr sz="1200" b="0" i="0">
+                <a:spcPts val="0"/>
+              </a:spcAft>
+            </a:pPr>
+            <a:r>
+              <a:rPr sz="1300" b="0" i="0">
                 <a:solidFill>
                   <a:srgbClr val="555555"/>
                 </a:solidFill>
                 <a:latin typeface="Calibri"/>
               </a:rPr>
-              <a:t>deliberate climate/energy policy made physical: infrastructure, fuel mix, market design.</a:t>
-            </a:r>
-          </a:p>
-          <a:p>
-            <a:pPr algn="l">
-              <a:spcAft>
-                <a:spcPts val="400"/>
-              </a:spcAft>
-            </a:pPr>
-            <a:r>
-              <a:rPr sz="1200" b="1" i="0">
-                <a:solidFill>
-                  <a:srgbClr val="212121"/>
-                </a:solidFill>
-                <a:latin typeface="Calibri"/>
-              </a:rPr>
-              <a:t>Fuel &amp; energy markets — </a:t>
-            </a:r>
-            <a:r>
-              <a:rPr sz="1200" b="0" i="0">
-                <a:solidFill>
-                  <a:srgbClr val="555555"/>
-                </a:solidFill>
-                <a:latin typeface="Calibri"/>
-              </a:rPr>
-              <a:t>market-driven fuel switching or supply transformation.</a:t>
-            </a:r>
-          </a:p>
-          <a:p>
-            <a:pPr algn="l">
-              <a:spcAft>
-                <a:spcPts val="400"/>
-              </a:spcAft>
-            </a:pPr>
-            <a:r>
-              <a:rPr sz="1200" b="1" i="0">
-                <a:solidFill>
-                  <a:srgbClr val="212121"/>
-                </a:solidFill>
-                <a:latin typeface="Calibri"/>
-              </a:rPr>
-              <a:t>Economic restructuring — </a:t>
-            </a:r>
-            <a:r>
-              <a:rPr sz="1200" b="0" i="0">
-                <a:solidFill>
-                  <a:srgbClr val="555555"/>
-                </a:solidFill>
-                <a:latin typeface="Calibri"/>
-              </a:rPr>
-              <a:t>industry to services, liberalization, post-socialist transition.</a:t>
-            </a:r>
-          </a:p>
-          <a:p>
-            <a:pPr algn="l">
-              <a:spcAft>
-                <a:spcPts val="400"/>
-              </a:spcAft>
-            </a:pPr>
-            <a:r>
-              <a:rPr sz="1200" b="1" i="0">
-                <a:solidFill>
-                  <a:srgbClr val="212121"/>
-                </a:solidFill>
-                <a:latin typeface="Calibri"/>
-              </a:rPr>
-              <a:t>Macroeconomic shock — </a:t>
-            </a:r>
-            <a:r>
-              <a:rPr sz="1200" b="0" i="0">
-                <a:solidFill>
-                  <a:srgbClr val="555555"/>
-                </a:solidFill>
-                <a:latin typeface="Calibri"/>
-              </a:rPr>
-              <a:t>recessions and financial crises that cut energy use.</a:t>
-            </a:r>
-          </a:p>
-          <a:p>
-            <a:pPr algn="l">
-              <a:spcAft>
-                <a:spcPts val="400"/>
-              </a:spcAft>
-            </a:pPr>
-            <a:r>
-              <a:rPr sz="1200" b="1" i="0">
-                <a:solidFill>
-                  <a:srgbClr val="212121"/>
-                </a:solidFill>
-                <a:latin typeface="Calibri"/>
-              </a:rPr>
-              <a:t>Political disruption — </a:t>
-            </a:r>
-            <a:r>
-              <a:rPr sz="1200" b="0" i="0">
-                <a:solidFill>
-                  <a:srgbClr val="555555"/>
-                </a:solidFill>
-                <a:latin typeface="Calibri"/>
-              </a:rPr>
-              <a:t>wars, state collapse, sanctions, regime change.</a:t>
-            </a:r>
-          </a:p>
-          <a:p>
-            <a:pPr algn="l">
-              <a:spcAft>
-                <a:spcPts val="400"/>
-              </a:spcAft>
-            </a:pPr>
-            <a:r>
-              <a:rPr sz="1200" b="1" i="0">
-                <a:solidFill>
-                  <a:srgbClr val="212121"/>
-                </a:solidFill>
-                <a:latin typeface="Calibri"/>
-              </a:rPr>
-              <a:t>Development &amp; energy access — </a:t>
-            </a:r>
-            <a:r>
-              <a:rPr sz="1200" b="0" i="0">
-                <a:solidFill>
-                  <a:srgbClr val="555555"/>
-                </a:solidFill>
-                <a:latin typeface="Calibri"/>
-              </a:rPr>
-              <a:t>electrification and modernization.</a:t>
-            </a:r>
-          </a:p>
-          <a:p>
-            <a:pPr algn="l">
-              <a:spcAft>
-                <a:spcPts val="400"/>
-              </a:spcAft>
-            </a:pPr>
-            <a:r>
-              <a:rPr sz="1200" b="1" i="0">
-                <a:solidFill>
-                  <a:srgbClr val="212121"/>
-                </a:solidFill>
-                <a:latin typeface="Calibri"/>
-              </a:rPr>
-              <a:t>No attributed mechanism — </a:t>
-            </a:r>
-            <a:r>
-              <a:rPr sz="1200" b="0" i="0">
-                <a:solidFill>
-                  <a:srgbClr val="555555"/>
-                </a:solidFill>
-                <a:latin typeface="Calibri"/>
-              </a:rPr>
-              <a:t>a real, eligible break the record cannot yet explain (22 of 97).</a:t>
+              <a:t>National breaks pile up around the oil shocks, the post-Cold-War upheaval, the Asian and global financial crises, and the renewables era — around economic history, not around the two treaty lines. And the clustering is not storytelling after the fact: documented events sit within two years of the estimated breaks nearly three times as often as randomly drawn dates would allow.</a:t>
             </a:r>
           </a:p>
         </p:txBody>
@@ -6047,8 +6237,8 @@
         </p:nvSpPr>
         <p:spPr>
           <a:xfrm>
-            <a:off x="6400800" y="1371600"/>
-            <a:ext cx="5303520" cy="5212080"/>
+            <a:off x="502920" y="1956816"/>
+            <a:ext cx="11201400" cy="457200"/>
           </a:xfrm>
           <a:prstGeom prst="rect">
             <a:avLst/>
@@ -6063,241 +6253,54 @@
           <a:p>
             <a:pPr algn="l">
               <a:spcAft>
-                <a:spcPts val="400"/>
-              </a:spcAft>
-            </a:pPr>
-            <a:r>
-              <a:rPr sz="1400" b="1" i="0">
-                <a:solidFill>
-                  <a:srgbClr val="212121"/>
-                </a:solidFill>
-                <a:latin typeface="Calibri"/>
-              </a:rPr>
-              <a:t>VERDICTS — four tests of the outcome</a:t>
-            </a:r>
-          </a:p>
-          <a:p>
-            <a:pPr algn="l">
-              <a:spcAft>
-                <a:spcPts val="800"/>
-              </a:spcAft>
-            </a:pPr>
-            <a:r>
-              <a:rPr sz="1250" b="0" i="1">
-                <a:solidFill>
-                  <a:srgbClr val="555555"/>
-                </a:solidFill>
-                <a:latin typeface="Calibri"/>
-              </a:rPr>
-              <a:t>Did the trend improve? Did it last? Did absolute CO2 actually fall? Was the underlying process constructive?</a:t>
-            </a:r>
-          </a:p>
-          <a:p>
-            <a:pPr algn="l">
-              <a:spcAft>
-                <a:spcPts val="400"/>
-              </a:spcAft>
-            </a:pPr>
-            <a:r>
-              <a:rPr sz="1200" b="1" i="0">
-                <a:solidFill>
-                  <a:srgbClr val="212121"/>
-                </a:solidFill>
-                <a:latin typeface="Calibri"/>
-              </a:rPr>
-              <a:t>Constructive persistent decarbonization </a:t>
-            </a:r>
-            <a:r>
-              <a:rPr sz="1200" b="1" i="0">
-                <a:solidFill>
-                  <a:srgbClr val="1B7837"/>
-                </a:solidFill>
-                <a:latin typeface="Calibri"/>
-              </a:rPr>
-              <a:t>(9) — </a:t>
-            </a:r>
-            <a:r>
-              <a:rPr sz="1200" b="0" i="0">
-                <a:solidFill>
-                  <a:srgbClr val="555555"/>
-                </a:solidFill>
-                <a:latin typeface="Calibri"/>
-              </a:rPr>
-              <a:t>passes all four — the gold standard.</a:t>
-            </a:r>
-          </a:p>
-          <a:p>
-            <a:pPr algn="l">
-              <a:spcAft>
-                <a:spcPts val="400"/>
-              </a:spcAft>
-            </a:pPr>
-            <a:r>
-              <a:rPr sz="1200" b="1" i="0">
-                <a:solidFill>
-                  <a:srgbClr val="212121"/>
-                </a:solidFill>
-                <a:latin typeface="Calibri"/>
-              </a:rPr>
-              <a:t>Persistent fuel substitution </a:t>
-            </a:r>
-            <a:r>
-              <a:rPr sz="1200" b="1" i="0">
+                <a:spcPts val="0"/>
+              </a:spcAft>
+            </a:pPr>
+            <a:r>
+              <a:rPr sz="1150" b="1" i="1">
+                <a:solidFill>
+                  <a:srgbClr val="3A66A5"/>
+                </a:solidFill>
+                <a:latin typeface="Calibri"/>
+              </a:rPr>
+              <a:t>How to read it: </a:t>
+            </a:r>
+            <a:r>
+              <a:rPr sz="1150" b="0" i="1">
                 <a:solidFill>
                   <a:srgbClr val="8A8A8A"/>
                 </a:solidFill>
                 <a:latin typeface="Calibri"/>
               </a:rPr>
-              <a:t>(13) — </a:t>
-            </a:r>
-            <a:r>
-              <a:rPr sz="1200" b="0" i="0">
-                <a:solidFill>
-                  <a:srgbClr val="555555"/>
-                </a:solidFill>
-                <a:latin typeface="Calibri"/>
-              </a:rPr>
-              <a:t>durable supply-side switch; narrower transformation.</a:t>
-            </a:r>
-          </a:p>
-          <a:p>
-            <a:pPr algn="l">
-              <a:spcAft>
-                <a:spcPts val="400"/>
-              </a:spcAft>
-            </a:pPr>
-            <a:r>
-              <a:rPr sz="1200" b="1" i="0">
-                <a:solidFill>
-                  <a:srgbClr val="212121"/>
-                </a:solidFill>
-                <a:latin typeface="Calibri"/>
-              </a:rPr>
-              <a:t>Intensity gain; CO2 still rising </a:t>
-            </a:r>
-            <a:r>
-              <a:rPr sz="1200" b="1" i="0">
-                <a:solidFill>
-                  <a:srgbClr val="8A8A8A"/>
-                </a:solidFill>
-                <a:latin typeface="Calibri"/>
-              </a:rPr>
-              <a:t>(12) — </a:t>
-            </a:r>
-            <a:r>
-              <a:rPr sz="1200" b="0" i="0">
-                <a:solidFill>
-                  <a:srgbClr val="555555"/>
-                </a:solidFill>
-                <a:latin typeface="Calibri"/>
-              </a:rPr>
-              <a:t>relative gain overwhelmed by growth.</a:t>
-            </a:r>
-          </a:p>
-          <a:p>
-            <a:pPr algn="l">
-              <a:spcAft>
-                <a:spcPts val="400"/>
-              </a:spcAft>
-            </a:pPr>
-            <a:r>
-              <a:rPr sz="1200" b="1" i="0">
-                <a:solidFill>
-                  <a:srgbClr val="212121"/>
-                </a:solidFill>
-                <a:latin typeface="Calibri"/>
-              </a:rPr>
-              <a:t>Contractionary / disruptive </a:t>
-            </a:r>
-            <a:r>
-              <a:rPr sz="1200" b="1" i="0">
-                <a:solidFill>
-                  <a:srgbClr val="8A8A8A"/>
-                </a:solidFill>
-                <a:latin typeface="Calibri"/>
-              </a:rPr>
-              <a:t>(20) — </a:t>
-            </a:r>
-            <a:r>
-              <a:rPr sz="1200" b="0" i="0">
-                <a:solidFill>
-                  <a:srgbClr val="555555"/>
-                </a:solidFill>
-                <a:latin typeface="Calibri"/>
-              </a:rPr>
-              <a:t>the 'improvement' is a crisis in disguise.</a:t>
-            </a:r>
-          </a:p>
-          <a:p>
-            <a:pPr algn="l">
-              <a:spcAft>
-                <a:spcPts val="400"/>
-              </a:spcAft>
-            </a:pPr>
-            <a:r>
-              <a:rPr sz="1200" b="1" i="0">
-                <a:solidFill>
-                  <a:srgbClr val="212121"/>
-                </a:solidFill>
-                <a:latin typeface="Calibri"/>
-              </a:rPr>
-              <a:t>Incomplete / nonpersistent </a:t>
-            </a:r>
-            <a:r>
-              <a:rPr sz="1200" b="1" i="0">
-                <a:solidFill>
-                  <a:srgbClr val="8A8A8A"/>
-                </a:solidFill>
-                <a:latin typeface="Calibri"/>
-              </a:rPr>
-              <a:t>(21) — </a:t>
-            </a:r>
-            <a:r>
-              <a:rPr sz="1200" b="0" i="0">
-                <a:solidFill>
-                  <a:srgbClr val="555555"/>
-                </a:solidFill>
-                <a:latin typeface="Calibri"/>
-              </a:rPr>
-              <a:t>the bend reversed or did not hold.</a:t>
-            </a:r>
-          </a:p>
-          <a:p>
-            <a:pPr algn="l">
-              <a:spcAft>
-                <a:spcPts val="400"/>
-              </a:spcAft>
-            </a:pPr>
-            <a:r>
-              <a:rPr sz="1200" b="1" i="0">
-                <a:solidFill>
-                  <a:srgbClr val="212121"/>
-                </a:solidFill>
-                <a:latin typeface="Calibri"/>
-              </a:rPr>
-              <a:t>Outcome not classifiable </a:t>
-            </a:r>
-            <a:r>
-              <a:rPr sz="1200" b="1" i="0">
-                <a:solidFill>
-                  <a:srgbClr val="8A8A8A"/>
-                </a:solidFill>
-                <a:latin typeface="Calibri"/>
-              </a:rPr>
-              <a:t>(22) — </a:t>
-            </a:r>
-            <a:r>
-              <a:rPr sz="1200" b="0" i="0">
-                <a:solidFill>
-                  <a:srgbClr val="555555"/>
-                </a:solidFill>
-                <a:latin typeface="Calibri"/>
-              </a:rPr>
-              <a:t>too little post-break evidence.</a:t>
-            </a:r>
-          </a:p>
-        </p:txBody>
-      </p:sp>
+              <a:t>Top: one dot per country at its break year; green triangles are the nine policy-enabled cases; shaded bands mark major economic episodes. Bottom: observed event-to-break proximity (red) against what random timing produces (blue).</a:t>
+            </a:r>
+          </a:p>
+        </p:txBody>
+      </p:sp>
+      <p:pic>
+        <p:nvPicPr>
+          <p:cNvPr id="5" name="Picture 4" descr="takeaway_fig03_when_and_why_curves_bend.png"/>
+          <p:cNvPicPr>
+            <a:picLocks noChangeAspect="1"/>
+          </p:cNvPicPr>
+          <p:nvPr/>
+        </p:nvPicPr>
+        <p:blipFill>
+          <a:blip r:embed="rId2"/>
+          <a:stretch>
+            <a:fillRect/>
+          </a:stretch>
+        </p:blipFill>
+        <p:spPr>
+          <a:xfrm>
+            <a:off x="3396081" y="2468880"/>
+            <a:ext cx="5396788" cy="4151376"/>
+          </a:xfrm>
+          <a:prstGeom prst="rect">
+            <a:avLst/>
+          </a:prstGeom>
+        </p:spPr>
+      </p:pic>
     </p:spTree>
   </p:cSld>
   <p:clrMapOvr>
@@ -6346,11 +6349,11 @@
             <a:r>
               <a:rPr sz="1200" b="1" i="0">
                 <a:solidFill>
-                  <a:srgbClr val="C77F00"/>
-                </a:solidFill>
-                <a:latin typeface="Calibri"/>
-              </a:rPr>
-              <a:t>ACT III · DID THE BENDS COUNT?</a:t>
+                  <a:srgbClr val="1B7837"/>
+                </a:solidFill>
+                <a:latin typeface="Calibri"/>
+              </a:rPr>
+              <a:t>ACT II · THE CENSUS</a:t>
             </a:r>
           </a:p>
           <a:p>
@@ -6366,7 +6369,7 @@
                 </a:solidFill>
                 <a:latin typeface="Calibri"/>
               </a:rPr>
-              <a:t>From mechanism to verdict: 97 countries, six outcomes</a:t>
+              <a:t>Mostly markets, restructuring, and disruption — policy in nine</a:t>
             </a:r>
           </a:p>
         </p:txBody>
@@ -6379,8 +6382,8 @@
         </p:nvSpPr>
         <p:spPr>
           <a:xfrm>
-            <a:off x="502920" y="1207008"/>
-            <a:ext cx="11201400" cy="603504"/>
+            <a:off x="502920" y="1188720"/>
+            <a:ext cx="11201400" cy="731520"/>
           </a:xfrm>
           <a:prstGeom prst="rect">
             <a:avLst/>
@@ -6399,29 +6402,68 @@
               </a:spcAft>
             </a:pPr>
             <a:r>
-              <a:rPr sz="1250" b="1" i="0">
+              <a:rPr sz="1300" b="0" i="0">
+                <a:solidFill>
+                  <a:srgbClr val="555555"/>
+                </a:solidFill>
+                <a:latin typeface="Calibri"/>
+              </a:rPr>
+              <a:t>Each break is assigned the historical process best supported by documentary evidence: fuel and energy markets lead with 22 countries, economic restructuring takes 18, political disruption 11, macroeconomic shocks 9, development and energy access 6. Climate policy and low-carbon technology account for nine — real, but rare. Twenty-two breaks stay honestly unresolved rather than being forced into a category.</a:t>
+            </a:r>
+          </a:p>
+        </p:txBody>
+      </p:sp>
+      <p:sp>
+        <p:nvSpPr>
+          <p:cNvPr id="4" name="TextBox 3"/>
+          <p:cNvSpPr txBox="1"/>
+          <p:nvPr/>
+        </p:nvSpPr>
+        <p:spPr>
+          <a:xfrm>
+            <a:off x="502920" y="1956816"/>
+            <a:ext cx="11201400" cy="457200"/>
+          </a:xfrm>
+          <a:prstGeom prst="rect">
+            <a:avLst/>
+          </a:prstGeom>
+          <a:noFill/>
+        </p:spPr>
+        <p:txBody>
+          <a:bodyPr wrap="square">
+            <a:spAutoFit/>
+          </a:bodyPr>
+          <a:lstStyle/>
+          <a:p>
+            <a:pPr algn="l">
+              <a:spcAft>
+                <a:spcPts val="0"/>
+              </a:spcAft>
+            </a:pPr>
+            <a:r>
+              <a:rPr sz="1150" b="1" i="1">
                 <a:solidFill>
                   <a:srgbClr val="3A66A5"/>
                 </a:solidFill>
                 <a:latin typeface="Calibri"/>
               </a:rPr>
-              <a:t>How to read it:  </a:t>
-            </a:r>
-            <a:r>
-              <a:rPr sz="1250" b="0" i="0">
-                <a:solidFill>
-                  <a:srgbClr val="555555"/>
-                </a:solidFill>
-                <a:latin typeface="Calibri"/>
-              </a:rPr>
-              <a:t>Each ribbon carries countries from the process that accompanied their break (left) to how the outcome is judged (right); ribbon width is the number of countries. Follow any left-hand category to see where those transitions actually ended up.</a:t>
+              <a:t>How to read it: </a:t>
+            </a:r>
+            <a:r>
+              <a:rPr sz="1150" b="0" i="1">
+                <a:solidFill>
+                  <a:srgbClr val="8A8A8A"/>
+                </a:solidFill>
+                <a:latin typeface="Calibri"/>
+              </a:rPr>
+              <a:t>One square per country, grouped by best-supported mechanism; green is the policy group, light gray the unresolved.</a:t>
             </a:r>
           </a:p>
         </p:txBody>
       </p:sp>
       <p:pic>
         <p:nvPicPr>
-          <p:cNvPr id="4" name="Picture 3" descr="image4.png"/>
+          <p:cNvPr id="5" name="Picture 4" descr="takeaway_fig04_mechanism_census.png"/>
           <p:cNvPicPr>
             <a:picLocks noChangeAspect="1"/>
           </p:cNvPicPr>
@@ -6435,8 +6477,8 @@
         </p:blipFill>
         <p:spPr>
           <a:xfrm>
-            <a:off x="2750999" y="1865376"/>
-            <a:ext cx="6686953" cy="4736592"/>
+            <a:off x="1799949" y="2468880"/>
+            <a:ext cx="8589053" cy="4151376"/>
           </a:xfrm>
           <a:prstGeom prst="rect">
             <a:avLst/>
@@ -6469,8 +6511,8 @@
         </p:nvSpPr>
         <p:spPr>
           <a:xfrm>
-            <a:off x="502920" y="274320"/>
-            <a:ext cx="11201400" cy="914400"/>
+            <a:off x="822960" y="777240"/>
+            <a:ext cx="10515600" cy="2377440"/>
           </a:xfrm>
           <a:prstGeom prst="rect">
             <a:avLst/>
@@ -6485,17 +6527,49 @@
           <a:p>
             <a:pPr algn="l">
               <a:spcAft>
-                <a:spcPts val="200"/>
+                <a:spcPts val="0"/>
+              </a:spcAft>
+            </a:pPr>
+            <a:r>
+              <a:rPr sz="4400" b="1" i="0">
+                <a:solidFill>
+                  <a:srgbClr val="1B7837"/>
+                </a:solidFill>
+                <a:latin typeface="Calibri"/>
+              </a:rPr>
+              <a:t>III</a:t>
+            </a:r>
+          </a:p>
+          <a:p>
+            <a:pPr algn="l">
+              <a:spcAft>
+                <a:spcPts val="600"/>
               </a:spcAft>
             </a:pPr>
             <a:r>
               <a:rPr sz="1200" b="1" i="0">
                 <a:solidFill>
-                  <a:srgbClr val="C77F00"/>
-                </a:solidFill>
-                <a:latin typeface="Calibri"/>
-              </a:rPr>
-              <a:t>ACT III · DID THE BENDS COUNT?</a:t>
+                  <a:srgbClr val="8A8A8A"/>
+                </a:solidFill>
+                <a:latin typeface="Calibri"/>
+              </a:rPr>
+              <a:t>ACT III</a:t>
+            </a:r>
+          </a:p>
+          <a:p>
+            <a:pPr algn="l">
+              <a:spcAft>
+                <a:spcPts val="800"/>
+              </a:spcAft>
+            </a:pPr>
+            <a:r>
+              <a:rPr sz="2800" b="1" i="0">
+                <a:solidFill>
+                  <a:srgbClr val="212121"/>
+                </a:solidFill>
+                <a:latin typeface="Calibri"/>
+              </a:rPr>
+              <a:t>Did the bends count?</a:t>
             </a:r>
           </a:p>
           <a:p>
@@ -6505,13 +6579,13 @@
               </a:spcAft>
             </a:pPr>
             <a:r>
-              <a:rPr sz="2400" b="1" i="0">
-                <a:solidFill>
-                  <a:srgbClr val="212121"/>
-                </a:solidFill>
-                <a:latin typeface="Calibri"/>
-              </a:rPr>
-              <a:t>Lower intensity is not the same as falling emissions</a:t>
+              <a:rPr sz="1400" b="0" i="0">
+                <a:solidFill>
+                  <a:srgbClr val="555555"/>
+                </a:solidFill>
+                <a:latin typeface="Calibri"/>
+              </a:rPr>
+              <a:t>Every one of the 97 breaks looks favorable as a statistic. Four tests — did the trend improve, did it last, did absolute CO2 fall, was the mechanism constructive — sort statistics from transitions.</a:t>
             </a:r>
           </a:p>
         </p:txBody>
@@ -6524,8 +6598,8 @@
         </p:nvSpPr>
         <p:spPr>
           <a:xfrm>
-            <a:off x="502920" y="1207008"/>
-            <a:ext cx="11201400" cy="603504"/>
+            <a:off x="822960" y="4206240"/>
+            <a:ext cx="3474720" cy="1828800"/>
           </a:xfrm>
           <a:prstGeom prst="rect">
             <a:avLst/>
@@ -6540,54 +6614,147 @@
           <a:p>
             <a:pPr algn="l">
               <a:spcAft>
+                <a:spcPts val="200"/>
+              </a:spcAft>
+            </a:pPr>
+            <a:r>
+              <a:rPr sz="3000" b="1" i="0">
+                <a:solidFill>
+                  <a:srgbClr val="1B7837"/>
+                </a:solidFill>
+                <a:latin typeface="Calibri"/>
+              </a:rPr>
+              <a:t>55</a:t>
+            </a:r>
+          </a:p>
+          <a:p>
+            <a:pPr algn="l">
+              <a:spcAft>
                 <a:spcPts val="0"/>
               </a:spcAft>
             </a:pPr>
             <a:r>
-              <a:rPr sz="1250" b="1" i="0">
-                <a:solidFill>
-                  <a:srgbClr val="3A66A5"/>
-                </a:solidFill>
-                <a:latin typeface="Calibri"/>
-              </a:rPr>
-              <a:t>How to read it:  </a:t>
-            </a:r>
-            <a:r>
               <a:rPr sz="1250" b="0" i="0">
                 <a:solidFill>
                   <a:srgbClr val="555555"/>
                 </a:solidFill>
                 <a:latin typeface="Calibri"/>
               </a:rPr>
-              <a:t>Each dot is a country. Further right means its intensity trend improved more after the break; below the dashed horizontal line means absolute emissions are actually falling. Success lives only in the lower right — and most improving countries sit above the line, where growth still outruns their gains.</a:t>
-            </a:r>
-          </a:p>
-        </p:txBody>
-      </p:sp>
-      <p:pic>
-        <p:nvPicPr>
-          <p:cNvPr id="4" name="Picture 3" descr="takeaway_fig05_bend_vs_success.png"/>
-          <p:cNvPicPr>
-            <a:picLocks noChangeAspect="1"/>
-          </p:cNvPicPr>
+              <a:t>countries whose intensity improved while absolute CO2 kept rising</a:t>
+            </a:r>
+          </a:p>
+        </p:txBody>
+      </p:sp>
+      <p:sp>
+        <p:nvSpPr>
+          <p:cNvPr id="4" name="TextBox 3"/>
+          <p:cNvSpPr txBox="1"/>
           <p:nvPr/>
-        </p:nvPicPr>
-        <p:blipFill>
-          <a:blip r:embed="rId2"/>
-          <a:stretch>
-            <a:fillRect/>
-          </a:stretch>
-        </p:blipFill>
-        <p:spPr>
-          <a:xfrm>
-            <a:off x="2542032" y="1865376"/>
-            <a:ext cx="7104888" cy="4736592"/>
+        </p:nvSpPr>
+        <p:spPr>
+          <a:xfrm>
+            <a:off x="4434840" y="4206240"/>
+            <a:ext cx="3474720" cy="1828800"/>
           </a:xfrm>
           <a:prstGeom prst="rect">
             <a:avLst/>
           </a:prstGeom>
-        </p:spPr>
-      </p:pic>
+          <a:noFill/>
+        </p:spPr>
+        <p:txBody>
+          <a:bodyPr wrap="square">
+            <a:spAutoFit/>
+          </a:bodyPr>
+          <a:lstStyle/>
+          <a:p>
+            <a:pPr algn="l">
+              <a:spcAft>
+                <a:spcPts val="200"/>
+              </a:spcAft>
+            </a:pPr>
+            <a:r>
+              <a:rPr sz="3000" b="1" i="0">
+                <a:solidFill>
+                  <a:srgbClr val="1B7837"/>
+                </a:solidFill>
+                <a:latin typeface="Calibri"/>
+              </a:rPr>
+              <a:t>20</a:t>
+            </a:r>
+          </a:p>
+          <a:p>
+            <a:pPr algn="l">
+              <a:spcAft>
+                <a:spcPts val="0"/>
+              </a:spcAft>
+            </a:pPr>
+            <a:r>
+              <a:rPr sz="1250" b="0" i="0">
+                <a:solidFill>
+                  <a:srgbClr val="555555"/>
+                </a:solidFill>
+                <a:latin typeface="Calibri"/>
+              </a:rPr>
+              <a:t>whose 'improvement' is a recession or collapse in disguise</a:t>
+            </a:r>
+          </a:p>
+        </p:txBody>
+      </p:sp>
+      <p:sp>
+        <p:nvSpPr>
+          <p:cNvPr id="5" name="TextBox 4"/>
+          <p:cNvSpPr txBox="1"/>
+          <p:nvPr/>
+        </p:nvSpPr>
+        <p:spPr>
+          <a:xfrm>
+            <a:off x="8046720" y="4206240"/>
+            <a:ext cx="3474720" cy="1828800"/>
+          </a:xfrm>
+          <a:prstGeom prst="rect">
+            <a:avLst/>
+          </a:prstGeom>
+          <a:noFill/>
+        </p:spPr>
+        <p:txBody>
+          <a:bodyPr wrap="square">
+            <a:spAutoFit/>
+          </a:bodyPr>
+          <a:lstStyle/>
+          <a:p>
+            <a:pPr algn="l">
+              <a:spcAft>
+                <a:spcPts val="200"/>
+              </a:spcAft>
+            </a:pPr>
+            <a:r>
+              <a:rPr sz="3000" b="1" i="0">
+                <a:solidFill>
+                  <a:srgbClr val="1B7837"/>
+                </a:solidFill>
+                <a:latin typeface="Calibri"/>
+              </a:rPr>
+              <a:t>9</a:t>
+            </a:r>
+          </a:p>
+          <a:p>
+            <a:pPr algn="l">
+              <a:spcAft>
+                <a:spcPts val="0"/>
+              </a:spcAft>
+            </a:pPr>
+            <a:r>
+              <a:rPr sz="1250" b="0" i="0">
+                <a:solidFill>
+                  <a:srgbClr val="555555"/>
+                </a:solidFill>
+                <a:latin typeface="Calibri"/>
+              </a:rPr>
+              <a:t>constructive, persistent decarbonizations — the gold standard</a:t>
+            </a:r>
+          </a:p>
+        </p:txBody>
+      </p:sp>
     </p:spTree>
   </p:cSld>
   <p:clrMapOvr>
@@ -6640,7 +6807,7 @@
                 </a:solidFill>
                 <a:latin typeface="Calibri"/>
               </a:rPr>
-              <a:t>ACT III · DID THE BENDS COUNT?</a:t>
+              <a:t>ACT III · THE SORTING KEY</a:t>
             </a:r>
           </a:p>
           <a:p>
@@ -6656,7 +6823,7 @@
                 </a:solidFill>
                 <a:latin typeface="Calibri"/>
               </a:rPr>
-              <a:t>The nine constructive persistent decarbonizations</a:t>
+              <a:t>Seven mechanisms in, six verdicts out</a:t>
             </a:r>
           </a:p>
         </p:txBody>
@@ -6669,8 +6836,8 @@
         </p:nvSpPr>
         <p:spPr>
           <a:xfrm>
-            <a:off x="502920" y="1207008"/>
-            <a:ext cx="11201400" cy="384048"/>
+            <a:off x="502920" y="1371600"/>
+            <a:ext cx="5532120" cy="5212080"/>
           </a:xfrm>
           <a:prstGeom prst="rect">
             <a:avLst/>
@@ -6685,17 +6852,192 @@
           <a:p>
             <a:pPr algn="l">
               <a:spcAft>
-                <a:spcPts val="0"/>
-              </a:spcAft>
-            </a:pPr>
-            <a:r>
-              <a:rPr sz="1300" b="1" i="0">
+                <a:spcPts val="600"/>
+              </a:spcAft>
+            </a:pPr>
+            <a:r>
+              <a:rPr sz="1400" b="1" i="0">
                 <a:solidFill>
                   <a:srgbClr val="212121"/>
                 </a:solidFill>
                 <a:latin typeface="Calibri"/>
               </a:rPr>
-              <a:t>Sweden 1986 · Finland 1993 · Hungary 1996 · Switzerland 1999 · Nauru 1999 · Denmark 2002 · Portugal 2004 · United Kingdom 2010 · Ireland 2012</a:t>
+              <a:t>MECHANISMS — what accompanied the bend</a:t>
+            </a:r>
+          </a:p>
+          <a:p>
+            <a:pPr algn="l">
+              <a:spcAft>
+                <a:spcPts val="400"/>
+              </a:spcAft>
+            </a:pPr>
+            <a:r>
+              <a:rPr sz="1200" b="1" i="0">
+                <a:solidFill>
+                  <a:srgbClr val="212121"/>
+                </a:solidFill>
+                <a:latin typeface="Calibri"/>
+              </a:rPr>
+              <a:t>Policy-enabled low carbon — </a:t>
+            </a:r>
+            <a:r>
+              <a:rPr sz="1200" b="0" i="0">
+                <a:solidFill>
+                  <a:srgbClr val="555555"/>
+                </a:solidFill>
+                <a:latin typeface="Calibri"/>
+              </a:rPr>
+              <a:t>climate/energy policy made physical: infrastructure, fuel mix, market design.</a:t>
+            </a:r>
+          </a:p>
+          <a:p>
+            <a:pPr algn="l">
+              <a:spcAft>
+                <a:spcPts val="400"/>
+              </a:spcAft>
+            </a:pPr>
+            <a:r>
+              <a:rPr sz="1200" b="1" i="0">
+                <a:solidFill>
+                  <a:srgbClr val="212121"/>
+                </a:solidFill>
+                <a:latin typeface="Calibri"/>
+              </a:rPr>
+              <a:t>Fuel &amp; energy markets — </a:t>
+            </a:r>
+            <a:r>
+              <a:rPr sz="1200" b="0" i="0">
+                <a:solidFill>
+                  <a:srgbClr val="555555"/>
+                </a:solidFill>
+                <a:latin typeface="Calibri"/>
+              </a:rPr>
+              <a:t>market-driven fuel switching or supply transformation.</a:t>
+            </a:r>
+          </a:p>
+          <a:p>
+            <a:pPr algn="l">
+              <a:spcAft>
+                <a:spcPts val="400"/>
+              </a:spcAft>
+            </a:pPr>
+            <a:r>
+              <a:rPr sz="1200" b="1" i="0">
+                <a:solidFill>
+                  <a:srgbClr val="212121"/>
+                </a:solidFill>
+                <a:latin typeface="Calibri"/>
+              </a:rPr>
+              <a:t>Economic restructuring — </a:t>
+            </a:r>
+            <a:r>
+              <a:rPr sz="1200" b="0" i="0">
+                <a:solidFill>
+                  <a:srgbClr val="555555"/>
+                </a:solidFill>
+                <a:latin typeface="Calibri"/>
+              </a:rPr>
+              <a:t>industry to services, liberalization, post-socialist transition.</a:t>
+            </a:r>
+          </a:p>
+          <a:p>
+            <a:pPr algn="l">
+              <a:spcAft>
+                <a:spcPts val="400"/>
+              </a:spcAft>
+            </a:pPr>
+            <a:r>
+              <a:rPr sz="1200" b="1" i="0">
+                <a:solidFill>
+                  <a:srgbClr val="212121"/>
+                </a:solidFill>
+                <a:latin typeface="Calibri"/>
+              </a:rPr>
+              <a:t>Macroeconomic shock — </a:t>
+            </a:r>
+            <a:r>
+              <a:rPr sz="1200" b="0" i="0">
+                <a:solidFill>
+                  <a:srgbClr val="555555"/>
+                </a:solidFill>
+                <a:latin typeface="Calibri"/>
+              </a:rPr>
+              <a:t>recessions and financial crises that cut energy use.</a:t>
+            </a:r>
+          </a:p>
+          <a:p>
+            <a:pPr algn="l">
+              <a:spcAft>
+                <a:spcPts val="400"/>
+              </a:spcAft>
+            </a:pPr>
+            <a:r>
+              <a:rPr sz="1200" b="1" i="0">
+                <a:solidFill>
+                  <a:srgbClr val="212121"/>
+                </a:solidFill>
+                <a:latin typeface="Calibri"/>
+              </a:rPr>
+              <a:t>Political disruption — </a:t>
+            </a:r>
+            <a:r>
+              <a:rPr sz="1200" b="0" i="0">
+                <a:solidFill>
+                  <a:srgbClr val="555555"/>
+                </a:solidFill>
+                <a:latin typeface="Calibri"/>
+              </a:rPr>
+              <a:t>wars, state collapse, sanctions, regime change.</a:t>
+            </a:r>
+          </a:p>
+          <a:p>
+            <a:pPr algn="l">
+              <a:spcAft>
+                <a:spcPts val="400"/>
+              </a:spcAft>
+            </a:pPr>
+            <a:r>
+              <a:rPr sz="1200" b="1" i="0">
+                <a:solidFill>
+                  <a:srgbClr val="212121"/>
+                </a:solidFill>
+                <a:latin typeface="Calibri"/>
+              </a:rPr>
+              <a:t>Development &amp; energy access — </a:t>
+            </a:r>
+            <a:r>
+              <a:rPr sz="1200" b="0" i="0">
+                <a:solidFill>
+                  <a:srgbClr val="555555"/>
+                </a:solidFill>
+                <a:latin typeface="Calibri"/>
+              </a:rPr>
+              <a:t>electrification and modernization.</a:t>
+            </a:r>
+          </a:p>
+          <a:p>
+            <a:pPr algn="l">
+              <a:spcAft>
+                <a:spcPts val="400"/>
+              </a:spcAft>
+            </a:pPr>
+            <a:r>
+              <a:rPr sz="1200" b="1" i="0">
+                <a:solidFill>
+                  <a:srgbClr val="212121"/>
+                </a:solidFill>
+                <a:latin typeface="Calibri"/>
+              </a:rPr>
+              <a:t>No attributed mechanism — </a:t>
+            </a:r>
+            <a:r>
+              <a:rPr sz="1200" b="0" i="0">
+                <a:solidFill>
+                  <a:srgbClr val="555555"/>
+                </a:solidFill>
+                <a:latin typeface="Calibri"/>
+              </a:rPr>
+              <a:t>a real break the record cannot yet explain (22 of 97).</a:t>
             </a:r>
           </a:p>
         </p:txBody>
@@ -6708,8 +7050,8 @@
         </p:nvSpPr>
         <p:spPr>
           <a:xfrm>
-            <a:off x="502920" y="1609344"/>
-            <a:ext cx="11201400" cy="603504"/>
+            <a:off x="6400800" y="1371600"/>
+            <a:ext cx="5303520" cy="5212080"/>
           </a:xfrm>
           <a:prstGeom prst="rect">
             <a:avLst/>
@@ -6724,54 +7066,241 @@
           <a:p>
             <a:pPr algn="l">
               <a:spcAft>
-                <a:spcPts val="0"/>
-              </a:spcAft>
-            </a:pPr>
-            <a:r>
-              <a:rPr sz="1250" b="1" i="0">
-                <a:solidFill>
-                  <a:srgbClr val="3A66A5"/>
-                </a:solidFill>
-                <a:latin typeface="Calibri"/>
-              </a:rPr>
-              <a:t>How to read it:  </a:t>
-            </a:r>
-            <a:r>
-              <a:rPr sz="1250" b="0" i="0">
+                <a:spcPts val="400"/>
+              </a:spcAft>
+            </a:pPr>
+            <a:r>
+              <a:rPr sz="1400" b="1" i="0">
+                <a:solidFill>
+                  <a:srgbClr val="212121"/>
+                </a:solidFill>
+                <a:latin typeface="Calibri"/>
+              </a:rPr>
+              <a:t>VERDICTS — four tests of the outcome</a:t>
+            </a:r>
+          </a:p>
+          <a:p>
+            <a:pPr algn="l">
+              <a:spcAft>
+                <a:spcPts val="800"/>
+              </a:spcAft>
+            </a:pPr>
+            <a:r>
+              <a:rPr sz="1250" b="0" i="1">
                 <a:solidFill>
                   <a:srgbClr val="555555"/>
                 </a:solidFill>
                 <a:latin typeface="Calibri"/>
               </a:rPr>
-              <a:t>Each panel is one country. Both lines are set to 100 at its break year: blue is carbon intensity, red is absolute CO2. The defining test is that both fall together after the break (shaded region) — intensity improved, and total emissions genuinely declined.</a:t>
-            </a:r>
-          </a:p>
-        </p:txBody>
-      </p:sp>
-      <p:pic>
-        <p:nvPicPr>
-          <p:cNvPr id="5" name="Picture 4" descr="image7.png"/>
-          <p:cNvPicPr>
-            <a:picLocks noChangeAspect="1"/>
-          </p:cNvPicPr>
-          <p:nvPr/>
-        </p:nvPicPr>
-        <p:blipFill>
-          <a:blip r:embed="rId2"/>
-          <a:stretch>
-            <a:fillRect/>
-          </a:stretch>
-        </p:blipFill>
-        <p:spPr>
-          <a:xfrm>
-            <a:off x="3357051" y="2267712"/>
-            <a:ext cx="5474849" cy="4334256"/>
-          </a:xfrm>
-          <a:prstGeom prst="rect">
-            <a:avLst/>
-          </a:prstGeom>
-        </p:spPr>
-      </p:pic>
+              <a:t>Did the trend improve? Did it last? Did absolute CO2 actually fall? Was the underlying process constructive?</a:t>
+            </a:r>
+          </a:p>
+          <a:p>
+            <a:pPr algn="l">
+              <a:spcAft>
+                <a:spcPts val="400"/>
+              </a:spcAft>
+            </a:pPr>
+            <a:r>
+              <a:rPr sz="1200" b="1" i="0">
+                <a:solidFill>
+                  <a:srgbClr val="212121"/>
+                </a:solidFill>
+                <a:latin typeface="Calibri"/>
+              </a:rPr>
+              <a:t>Constructive persistent decarbonization </a:t>
+            </a:r>
+            <a:r>
+              <a:rPr sz="1200" b="1" i="0">
+                <a:solidFill>
+                  <a:srgbClr val="1B7837"/>
+                </a:solidFill>
+                <a:latin typeface="Calibri"/>
+              </a:rPr>
+              <a:t>(9) — </a:t>
+            </a:r>
+            <a:r>
+              <a:rPr sz="1200" b="0" i="0">
+                <a:solidFill>
+                  <a:srgbClr val="555555"/>
+                </a:solidFill>
+                <a:latin typeface="Calibri"/>
+              </a:rPr>
+              <a:t>passes all four — the gold standard.</a:t>
+            </a:r>
+          </a:p>
+          <a:p>
+            <a:pPr algn="l">
+              <a:spcAft>
+                <a:spcPts val="400"/>
+              </a:spcAft>
+            </a:pPr>
+            <a:r>
+              <a:rPr sz="1200" b="1" i="0">
+                <a:solidFill>
+                  <a:srgbClr val="212121"/>
+                </a:solidFill>
+                <a:latin typeface="Calibri"/>
+              </a:rPr>
+              <a:t>Persistent fuel substitution </a:t>
+            </a:r>
+            <a:r>
+              <a:rPr sz="1200" b="1" i="0">
+                <a:solidFill>
+                  <a:srgbClr val="8A8A8A"/>
+                </a:solidFill>
+                <a:latin typeface="Calibri"/>
+              </a:rPr>
+              <a:t>(13) — </a:t>
+            </a:r>
+            <a:r>
+              <a:rPr sz="1200" b="0" i="0">
+                <a:solidFill>
+                  <a:srgbClr val="555555"/>
+                </a:solidFill>
+                <a:latin typeface="Calibri"/>
+              </a:rPr>
+              <a:t>durable supply-side switch; narrower transformation.</a:t>
+            </a:r>
+          </a:p>
+          <a:p>
+            <a:pPr algn="l">
+              <a:spcAft>
+                <a:spcPts val="400"/>
+              </a:spcAft>
+            </a:pPr>
+            <a:r>
+              <a:rPr sz="1200" b="1" i="0">
+                <a:solidFill>
+                  <a:srgbClr val="212121"/>
+                </a:solidFill>
+                <a:latin typeface="Calibri"/>
+              </a:rPr>
+              <a:t>Intensity gain; CO2 still rising </a:t>
+            </a:r>
+            <a:r>
+              <a:rPr sz="1200" b="1" i="0">
+                <a:solidFill>
+                  <a:srgbClr val="8A8A8A"/>
+                </a:solidFill>
+                <a:latin typeface="Calibri"/>
+              </a:rPr>
+              <a:t>(12) — </a:t>
+            </a:r>
+            <a:r>
+              <a:rPr sz="1200" b="0" i="0">
+                <a:solidFill>
+                  <a:srgbClr val="555555"/>
+                </a:solidFill>
+                <a:latin typeface="Calibri"/>
+              </a:rPr>
+              <a:t>relative gain overwhelmed by growth.</a:t>
+            </a:r>
+          </a:p>
+          <a:p>
+            <a:pPr algn="l">
+              <a:spcAft>
+                <a:spcPts val="400"/>
+              </a:spcAft>
+            </a:pPr>
+            <a:r>
+              <a:rPr sz="1200" b="1" i="0">
+                <a:solidFill>
+                  <a:srgbClr val="212121"/>
+                </a:solidFill>
+                <a:latin typeface="Calibri"/>
+              </a:rPr>
+              <a:t>Contractionary / disruptive </a:t>
+            </a:r>
+            <a:r>
+              <a:rPr sz="1200" b="1" i="0">
+                <a:solidFill>
+                  <a:srgbClr val="8A8A8A"/>
+                </a:solidFill>
+                <a:latin typeface="Calibri"/>
+              </a:rPr>
+              <a:t>(20) — </a:t>
+            </a:r>
+            <a:r>
+              <a:rPr sz="1200" b="0" i="0">
+                <a:solidFill>
+                  <a:srgbClr val="555555"/>
+                </a:solidFill>
+                <a:latin typeface="Calibri"/>
+              </a:rPr>
+              <a:t>the 'improvement' is a crisis in disguise.</a:t>
+            </a:r>
+          </a:p>
+          <a:p>
+            <a:pPr algn="l">
+              <a:spcAft>
+                <a:spcPts val="400"/>
+              </a:spcAft>
+            </a:pPr>
+            <a:r>
+              <a:rPr sz="1200" b="1" i="0">
+                <a:solidFill>
+                  <a:srgbClr val="212121"/>
+                </a:solidFill>
+                <a:latin typeface="Calibri"/>
+              </a:rPr>
+              <a:t>Incomplete / nonpersistent </a:t>
+            </a:r>
+            <a:r>
+              <a:rPr sz="1200" b="1" i="0">
+                <a:solidFill>
+                  <a:srgbClr val="8A8A8A"/>
+                </a:solidFill>
+                <a:latin typeface="Calibri"/>
+              </a:rPr>
+              <a:t>(21) — </a:t>
+            </a:r>
+            <a:r>
+              <a:rPr sz="1200" b="0" i="0">
+                <a:solidFill>
+                  <a:srgbClr val="555555"/>
+                </a:solidFill>
+                <a:latin typeface="Calibri"/>
+              </a:rPr>
+              <a:t>the bend reversed or did not hold.</a:t>
+            </a:r>
+          </a:p>
+          <a:p>
+            <a:pPr algn="l">
+              <a:spcAft>
+                <a:spcPts val="400"/>
+              </a:spcAft>
+            </a:pPr>
+            <a:r>
+              <a:rPr sz="1200" b="1" i="0">
+                <a:solidFill>
+                  <a:srgbClr val="212121"/>
+                </a:solidFill>
+                <a:latin typeface="Calibri"/>
+              </a:rPr>
+              <a:t>Outcome not classifiable </a:t>
+            </a:r>
+            <a:r>
+              <a:rPr sz="1200" b="1" i="0">
+                <a:solidFill>
+                  <a:srgbClr val="8A8A8A"/>
+                </a:solidFill>
+                <a:latin typeface="Calibri"/>
+              </a:rPr>
+              <a:t>(22) — </a:t>
+            </a:r>
+            <a:r>
+              <a:rPr sz="1200" b="0" i="0">
+                <a:solidFill>
+                  <a:srgbClr val="555555"/>
+                </a:solidFill>
+                <a:latin typeface="Calibri"/>
+              </a:rPr>
+              <a:t>too little post-break evidence.</a:t>
+            </a:r>
+          </a:p>
+        </p:txBody>
+      </p:sp>
     </p:spTree>
   </p:cSld>
   <p:clrMapOvr>
@@ -6824,7 +7353,7 @@
                 </a:solidFill>
                 <a:latin typeface="Calibri"/>
               </a:rPr>
-              <a:t>ACT III · DID THE BENDS COUNT?</a:t>
+              <a:t>ACT III · THE FLOW</a:t>
             </a:r>
           </a:p>
           <a:p>
@@ -6840,7 +7369,7 @@
                 </a:solidFill>
                 <a:latin typeface="Calibri"/>
               </a:rPr>
-              <a:t>Nineteen countries cut emissions — ten don't earn the verdict</a:t>
+              <a:t>Follow any mechanism to where its transitions actually end up</a:t>
             </a:r>
           </a:p>
         </p:txBody>
@@ -6853,8 +7382,8 @@
         </p:nvSpPr>
         <p:spPr>
           <a:xfrm>
-            <a:off x="502920" y="1207008"/>
-            <a:ext cx="11201400" cy="603504"/>
+            <a:off x="502920" y="1188720"/>
+            <a:ext cx="11201400" cy="731520"/>
           </a:xfrm>
           <a:prstGeom prst="rect">
             <a:avLst/>
@@ -6873,29 +7402,68 @@
               </a:spcAft>
             </a:pPr>
             <a:r>
-              <a:rPr sz="1250" b="1" i="0">
+              <a:rPr sz="1300" b="0" i="0">
+                <a:solidFill>
+                  <a:srgbClr val="555555"/>
+                </a:solidFill>
+                <a:latin typeface="Calibri"/>
+              </a:rPr>
+              <a:t>Shocks and disruption flow into contraction. Restructuring most often ends in intensity gains that growth overwhelms. The policy-enabled ribbon is thin — and it is the one that most reliably reaches the constructive verdict on the right.</a:t>
+            </a:r>
+          </a:p>
+        </p:txBody>
+      </p:sp>
+      <p:sp>
+        <p:nvSpPr>
+          <p:cNvPr id="4" name="TextBox 3"/>
+          <p:cNvSpPr txBox="1"/>
+          <p:nvPr/>
+        </p:nvSpPr>
+        <p:spPr>
+          <a:xfrm>
+            <a:off x="502920" y="1956816"/>
+            <a:ext cx="11201400" cy="457200"/>
+          </a:xfrm>
+          <a:prstGeom prst="rect">
+            <a:avLst/>
+          </a:prstGeom>
+          <a:noFill/>
+        </p:spPr>
+        <p:txBody>
+          <a:bodyPr wrap="square">
+            <a:spAutoFit/>
+          </a:bodyPr>
+          <a:lstStyle/>
+          <a:p>
+            <a:pPr algn="l">
+              <a:spcAft>
+                <a:spcPts val="0"/>
+              </a:spcAft>
+            </a:pPr>
+            <a:r>
+              <a:rPr sz="1150" b="1" i="1">
                 <a:solidFill>
                   <a:srgbClr val="3A66A5"/>
                 </a:solidFill>
                 <a:latin typeface="Calibri"/>
               </a:rPr>
-              <a:t>How to read it:  </a:t>
-            </a:r>
-            <a:r>
-              <a:rPr sz="1250" b="0" i="0">
-                <a:solidFill>
-                  <a:srgbClr val="555555"/>
-                </a:solidFill>
-                <a:latin typeface="Calibri"/>
-              </a:rPr>
-              <a:t>Each row is a country where absolute CO2 fell after a favorable bend. The whisker is the uncertainty around its break year; rows are grouped by the verdict, and each label names the best-supported mechanism. Falling emissions alone are not enough — the route matters.</a:t>
+              <a:t>How to read it: </a:t>
+            </a:r>
+            <a:r>
+              <a:rPr sz="1150" b="0" i="1">
+                <a:solidFill>
+                  <a:srgbClr val="8A8A8A"/>
+                </a:solidFill>
+                <a:latin typeface="Calibri"/>
+              </a:rPr>
+              <a:t>Each ribbon carries countries from the mechanism behind their break (left) to the verdict on the outcome (right); width is the number of countries.</a:t>
             </a:r>
           </a:p>
         </p:txBody>
       </p:sp>
       <p:pic>
         <p:nvPicPr>
-          <p:cNvPr id="4" name="Picture 3" descr="image8.png"/>
+          <p:cNvPr id="5" name="Picture 4" descr="image4.png"/>
           <p:cNvPicPr>
             <a:picLocks noChangeAspect="1"/>
           </p:cNvPicPr>
@@ -6909,8 +7477,8 @@
         </p:blipFill>
         <p:spPr>
           <a:xfrm>
-            <a:off x="2750999" y="1865376"/>
-            <a:ext cx="6686953" cy="4736592"/>
+            <a:off x="3164092" y="2468880"/>
+            <a:ext cx="5860766" cy="4151376"/>
           </a:xfrm>
           <a:prstGeom prst="rect">
             <a:avLst/>
@@ -6969,7 +7537,7 @@
                 </a:solidFill>
                 <a:latin typeface="Calibri"/>
               </a:rPr>
-              <a:t>ACT III · THE GEOGRAPHY</a:t>
+              <a:t>ACT III · THE QUADRANT</a:t>
             </a:r>
           </a:p>
           <a:p>
@@ -6985,7 +7553,7 @@
                 </a:solidFill>
                 <a:latin typeface="Calibri"/>
               </a:rPr>
-              <a:t>Mechanisms are regional; success is concentrated</a:t>
+              <a:t>Lower intensity is not the same as falling emissions</a:t>
             </a:r>
           </a:p>
         </p:txBody>
@@ -6998,8 +7566,8 @@
         </p:nvSpPr>
         <p:spPr>
           <a:xfrm>
-            <a:off x="502920" y="1207008"/>
-            <a:ext cx="11201400" cy="603504"/>
+            <a:off x="502920" y="1188720"/>
+            <a:ext cx="11201400" cy="731520"/>
           </a:xfrm>
           <a:prstGeom prst="rect">
             <a:avLst/>
@@ -7018,29 +7586,68 @@
               </a:spcAft>
             </a:pPr>
             <a:r>
-              <a:rPr sz="1250" b="1" i="0">
+              <a:rPr sz="1300" b="0" i="0">
+                <a:solidFill>
+                  <a:srgbClr val="555555"/>
+                </a:solidFill>
+                <a:latin typeface="Calibri"/>
+              </a:rPr>
+              <a:t>Fifty-five countries improved their intensity trend while absolute emissions kept rising; nineteen managed both. The nine policy-enabled cases, marked in green, mostly sit where success lives — but Bhutan and Paraguay improve intensity with emissions still rising, which is exactly why 'policy-enabled' and 'constructive' are overlapping but different sets.</a:t>
+            </a:r>
+          </a:p>
+        </p:txBody>
+      </p:sp>
+      <p:sp>
+        <p:nvSpPr>
+          <p:cNvPr id="4" name="TextBox 3"/>
+          <p:cNvSpPr txBox="1"/>
+          <p:nvPr/>
+        </p:nvSpPr>
+        <p:spPr>
+          <a:xfrm>
+            <a:off x="502920" y="1956816"/>
+            <a:ext cx="11201400" cy="457200"/>
+          </a:xfrm>
+          <a:prstGeom prst="rect">
+            <a:avLst/>
+          </a:prstGeom>
+          <a:noFill/>
+        </p:spPr>
+        <p:txBody>
+          <a:bodyPr wrap="square">
+            <a:spAutoFit/>
+          </a:bodyPr>
+          <a:lstStyle/>
+          <a:p>
+            <a:pPr algn="l">
+              <a:spcAft>
+                <a:spcPts val="0"/>
+              </a:spcAft>
+            </a:pPr>
+            <a:r>
+              <a:rPr sz="1150" b="1" i="1">
                 <a:solidFill>
                   <a:srgbClr val="3A66A5"/>
                 </a:solidFill>
                 <a:latin typeface="Calibri"/>
               </a:rPr>
-              <a:t>How to read it:  </a:t>
-            </a:r>
-            <a:r>
-              <a:rPr sz="1250" b="0" i="0">
-                <a:solidFill>
-                  <a:srgbClr val="555555"/>
-                </a:solidFill>
-                <a:latin typeface="Calibri"/>
-              </a:rPr>
-              <a:t>Left map: each country is colored by the process that accompanied its break. Right map: the same countries colored by outcome verdict — dark green marks the nine constructive cases, concentrated in northern Europe.</a:t>
+              <a:t>How to read it: </a:t>
+            </a:r>
+            <a:r>
+              <a:rPr sz="1150" b="0" i="1">
+                <a:solidFill>
+                  <a:srgbClr val="8A8A8A"/>
+                </a:solidFill>
+                <a:latin typeface="Calibri"/>
+              </a:rPr>
+              <a:t>Each dot is a country: further right, a bigger post-break improvement in the intensity trend; below the dashed line, absolute CO2 actually falling. Success lives only in the lower right.</a:t>
             </a:r>
           </a:p>
         </p:txBody>
       </p:sp>
       <p:pic>
         <p:nvPicPr>
-          <p:cNvPr id="4" name="Picture 3" descr="image9.png"/>
+          <p:cNvPr id="5" name="Picture 4" descr="takeaway_fig05_bend_vs_success.png"/>
           <p:cNvPicPr>
             <a:picLocks noChangeAspect="1"/>
           </p:cNvPicPr>
@@ -7054,32 +7661,8 @@
         </p:blipFill>
         <p:spPr>
           <a:xfrm>
-            <a:off x="274320" y="2781490"/>
-            <a:ext cx="5806440" cy="2758059"/>
-          </a:xfrm>
-          <a:prstGeom prst="rect">
-            <a:avLst/>
-          </a:prstGeom>
-        </p:spPr>
-      </p:pic>
-      <p:pic>
-        <p:nvPicPr>
-          <p:cNvPr id="5" name="Picture 4" descr="image10.png"/>
-          <p:cNvPicPr>
-            <a:picLocks noChangeAspect="1"/>
-          </p:cNvPicPr>
-          <p:nvPr/>
-        </p:nvPicPr>
-        <p:blipFill>
-          <a:blip r:embed="rId3"/>
-          <a:stretch>
-            <a:fillRect/>
-          </a:stretch>
-        </p:blipFill>
-        <p:spPr>
-          <a:xfrm>
-            <a:off x="6172200" y="2781490"/>
-            <a:ext cx="5806440" cy="2758059"/>
+            <a:off x="2980944" y="2468880"/>
+            <a:ext cx="6227064" cy="4151376"/>
           </a:xfrm>
           <a:prstGeom prst="rect">
             <a:avLst/>
@@ -7134,11 +7717,11 @@
             <a:r>
               <a:rPr sz="1200" b="1" i="0">
                 <a:solidFill>
-                  <a:srgbClr val="B33A3A"/>
-                </a:solidFill>
-                <a:latin typeface="Calibri"/>
-              </a:rPr>
-              <a:t>ACT IV · CAN WE TRUST THE STORY?</a:t>
+                  <a:srgbClr val="C77F00"/>
+                </a:solidFill>
+                <a:latin typeface="Calibri"/>
+              </a:rPr>
+              <a:t>ACT III · THE NINE</a:t>
             </a:r>
           </a:p>
           <a:p>
@@ -7154,7 +7737,7 @@
                 </a:solidFill>
                 <a:latin typeface="Calibri"/>
               </a:rPr>
-              <a:t>Independent raters recognize the same countries</a:t>
+              <a:t>Nine countries pass all four tests</a:t>
             </a:r>
           </a:p>
         </p:txBody>
@@ -7167,8 +7750,8 @@
         </p:nvSpPr>
         <p:spPr>
           <a:xfrm>
-            <a:off x="502920" y="1207008"/>
-            <a:ext cx="11201400" cy="603504"/>
+            <a:off x="502920" y="1188720"/>
+            <a:ext cx="11201400" cy="731520"/>
           </a:xfrm>
           <a:prstGeom prst="rect">
             <a:avLst/>
@@ -7187,29 +7770,68 @@
               </a:spcAft>
             </a:pPr>
             <a:r>
-              <a:rPr sz="1250" b="1" i="0">
+              <a:rPr sz="1300" b="0" i="0">
+                <a:solidFill>
+                  <a:srgbClr val="555555"/>
+                </a:solidFill>
+                <a:latin typeface="Calibri"/>
+              </a:rPr>
+              <a:t>Sweden 1986 · Finland 1993 · Hungary 1996 · Switzerland 1999 · Nauru 1999 · Denmark 2002 · Portugal 2004 · United Kingdom 2010 · Ireland 2012. Six of nine are policy-enabled; Hungary, Nauru, and Ireland arrived via restructuring — and Nauru's is a phosphate collapse, so it carries an asterisk.</a:t>
+            </a:r>
+          </a:p>
+        </p:txBody>
+      </p:sp>
+      <p:sp>
+        <p:nvSpPr>
+          <p:cNvPr id="4" name="TextBox 3"/>
+          <p:cNvSpPr txBox="1"/>
+          <p:nvPr/>
+        </p:nvSpPr>
+        <p:spPr>
+          <a:xfrm>
+            <a:off x="502920" y="1956816"/>
+            <a:ext cx="11201400" cy="457200"/>
+          </a:xfrm>
+          <a:prstGeom prst="rect">
+            <a:avLst/>
+          </a:prstGeom>
+          <a:noFill/>
+        </p:spPr>
+        <p:txBody>
+          <a:bodyPr wrap="square">
+            <a:spAutoFit/>
+          </a:bodyPr>
+          <a:lstStyle/>
+          <a:p>
+            <a:pPr algn="l">
+              <a:spcAft>
+                <a:spcPts val="0"/>
+              </a:spcAft>
+            </a:pPr>
+            <a:r>
+              <a:rPr sz="1150" b="1" i="1">
                 <a:solidFill>
                   <a:srgbClr val="3A66A5"/>
                 </a:solidFill>
                 <a:latin typeface="Calibri"/>
               </a:rPr>
-              <a:t>How to read it:  </a:t>
-            </a:r>
-            <a:r>
-              <a:rPr sz="1250" b="0" i="0">
-                <a:solidFill>
-                  <a:srgbClr val="555555"/>
-                </a:solidFill>
-                <a:latin typeface="Calibri"/>
-              </a:rPr>
-              <a:t>Each dot is a country covered by the rating, placed by where it ranks among covered countries (right = rated better). Green triangles are our policy-enabled cases; the vertical bars mark each group's median. The policy cases rank high on both ratings — but only 3 and 2 of them are covered, so we show every point rather than hide the small sample.</a:t>
+              <a:t>How to read it: </a:t>
+            </a:r>
+            <a:r>
+              <a:rPr sz="1150" b="0" i="1">
+                <a:solidFill>
+                  <a:srgbClr val="8A8A8A"/>
+                </a:solidFill>
+                <a:latin typeface="Calibri"/>
+              </a:rPr>
+              <a:t>Each panel sets both series to 100 at the country's break year: blue is carbon intensity, red is absolute CO2. The defining test is that both fall together after the break (shaded region).</a:t>
             </a:r>
           </a:p>
         </p:txBody>
       </p:sp>
       <p:pic>
         <p:nvPicPr>
-          <p:cNvPr id="4" name="Picture 3" descr="takeaway_fig06_external_corroboration.png"/>
+          <p:cNvPr id="5" name="Picture 4" descr="image7.png"/>
           <p:cNvPicPr>
             <a:picLocks noChangeAspect="1"/>
           </p:cNvPicPr>
@@ -7223,8 +7845,8 @@
         </p:blipFill>
         <p:spPr>
           <a:xfrm>
-            <a:off x="1019556" y="1865376"/>
-            <a:ext cx="10149840" cy="4736592"/>
+            <a:off x="3472554" y="2468880"/>
+            <a:ext cx="5243843" cy="4151376"/>
           </a:xfrm>
           <a:prstGeom prst="rect">
             <a:avLst/>
@@ -7283,7 +7905,7 @@
                 </a:solidFill>
                 <a:latin typeface="Calibri"/>
               </a:rPr>
-              <a:t>THE QUESTION</a:t>
+              <a:t>THE SETUP</a:t>
             </a:r>
           </a:p>
           <a:p>
@@ -7299,7 +7921,7 @@
                 </a:solidFill>
                 <a:latin typeface="Calibri"/>
               </a:rPr>
-              <a:t>Paris is working — but through what?</a:t>
+              <a:t>Emissions growth has nearly stopped. Paris may not be why.</a:t>
             </a:r>
           </a:p>
         </p:txBody>
@@ -7312,8 +7934,8 @@
         </p:nvSpPr>
         <p:spPr>
           <a:xfrm>
-            <a:off x="502920" y="1463040"/>
-            <a:ext cx="6675120" cy="4937760"/>
+            <a:off x="502920" y="1417320"/>
+            <a:ext cx="6720840" cy="5029200"/>
           </a:xfrm>
           <a:prstGeom prst="rect">
             <a:avLst/>
@@ -7328,97 +7950,49 @@
           <a:p>
             <a:pPr algn="l">
               <a:spcAft>
-                <a:spcPts val="400"/>
-              </a:spcAft>
-            </a:pPr>
-            <a:r>
-              <a:rPr sz="1700" b="1" i="0">
+                <a:spcPts val="1200"/>
+              </a:spcAft>
+            </a:pPr>
+            <a:r>
+              <a:rPr sz="1400" b="0" i="0">
+                <a:solidFill>
+                  <a:srgbClr val="555555"/>
+                </a:solidFill>
+                <a:latin typeface="Calibri"/>
+              </a:rPr>
+              <a:t>The good news is real. Worst-case emissions scenarios have moved off the table, and global CO2 growth has slowed from +2.1% per year over the Rio-to-Paris quarter century to +0.4% per year since 2015. Something is going right.</a:t>
+            </a:r>
+          </a:p>
+          <a:p>
+            <a:pPr algn="l">
+              <a:spcAft>
+                <a:spcPts val="1200"/>
+              </a:spcAft>
+            </a:pPr>
+            <a:r>
+              <a:rPr sz="1400" b="0" i="0">
+                <a:solidFill>
+                  <a:srgbClr val="555555"/>
+                </a:solidFill>
+                <a:latin typeface="Calibri"/>
+              </a:rPr>
+              <a:t>But there is an obvious way to over-read that success: attribute the improvement to the agreement whose anniversary it coincides with. The world's carbon intensity has been falling for fifty years, for reasons that predate every climate treaty. So the question this paper asks is narrow and awkward: can the observed record distinguish a Paris effect from the continuation of trends already in motion?</a:t>
+            </a:r>
+          </a:p>
+          <a:p>
+            <a:pPr algn="l">
+              <a:spcAft>
+                <a:spcPts val="0"/>
+              </a:spcAft>
+            </a:pPr>
+            <a:r>
+              <a:rPr sz="1400" b="0" i="0">
                 <a:solidFill>
                   <a:srgbClr val="212121"/>
                 </a:solidFill>
                 <a:latin typeface="Calibri"/>
               </a:rPr>
-              <a:t>The good news is real.</a:t>
-            </a:r>
-          </a:p>
-          <a:p>
-            <a:pPr algn="l">
-              <a:spcAft>
-                <a:spcPts val="1400"/>
-              </a:spcAft>
-            </a:pPr>
-            <a:r>
-              <a:rPr sz="1500" b="0" i="0">
-                <a:solidFill>
-                  <a:srgbClr val="555555"/>
-                </a:solidFill>
-                <a:latin typeface="Calibri"/>
-              </a:rPr>
-              <a:t>Worst-case emissions scenarios have moved off the table, and global CO2 growth has slowed from +2.1% per year (1990–2015) to +0.4% per year since Paris.</a:t>
-            </a:r>
-          </a:p>
-          <a:p>
-            <a:pPr algn="l">
-              <a:spcAft>
-                <a:spcPts val="400"/>
-              </a:spcAft>
-            </a:pPr>
-            <a:r>
-              <a:rPr sz="1700" b="1" i="0">
-                <a:solidFill>
-                  <a:srgbClr val="212121"/>
-                </a:solidFill>
-                <a:latin typeface="Calibri"/>
-              </a:rPr>
-              <a:t>The open question:</a:t>
-            </a:r>
-          </a:p>
-          <a:p>
-            <a:pPr algn="l">
-              <a:spcAft>
-                <a:spcPts val="1400"/>
-              </a:spcAft>
-            </a:pPr>
-            <a:r>
-              <a:rPr sz="1500" b="0" i="0">
-                <a:solidFill>
-                  <a:srgbClr val="555555"/>
-                </a:solidFill>
-                <a:latin typeface="Calibri"/>
-              </a:rPr>
-              <a:t>Is the global improvement a direct effect of the agreement — or the continuation of trends rooted decades earlier, which Paris coordinates and reinforces?</a:t>
-            </a:r>
-          </a:p>
-          <a:p>
-            <a:pPr algn="l">
-              <a:spcAft>
-                <a:spcPts val="400"/>
-              </a:spcAft>
-            </a:pPr>
-            <a:r>
-              <a:rPr sz="1700" b="1" i="0">
-                <a:solidFill>
-                  <a:srgbClr val="212121"/>
-                </a:solidFill>
-                <a:latin typeface="Calibri"/>
-              </a:rPr>
-              <a:t>Our approach:</a:t>
-            </a:r>
-          </a:p>
-          <a:p>
-            <a:pPr algn="l">
-              <a:spcAft>
-                <a:spcPts val="0"/>
-              </a:spcAft>
-            </a:pPr>
-            <a:r>
-              <a:rPr sz="1500" b="0" i="0">
-                <a:solidFill>
-                  <a:srgbClr val="555555"/>
-                </a:solidFill>
-                <a:latin typeface="Calibri"/>
-              </a:rPr>
-              <a:t>Rather than assuming treaty years are turning points, we let the data tell us when trends actually changed — globally and for every country with enough annual data — and then use historical evidence to ask why.</a:t>
+              <a:t>Rather than assuming treaty years are turning points, we let the data say when trends actually changed — for the world, and for every country with enough annual data — and then ask the historical record why.</a:t>
             </a:r>
           </a:p>
         </p:txBody>
@@ -7431,8 +8005,8 @@
         </p:nvSpPr>
         <p:spPr>
           <a:xfrm>
-            <a:off x="7452360" y="1463040"/>
-            <a:ext cx="4251960" cy="4937760"/>
+            <a:off x="7543800" y="1417320"/>
+            <a:ext cx="4160520" cy="5029200"/>
           </a:xfrm>
           <a:prstGeom prst="rect">
             <a:avLst/>
@@ -7451,77 +8025,45 @@
               </a:spcAft>
             </a:pPr>
             <a:r>
-              <a:rPr sz="1700" b="1" i="0">
+              <a:rPr sz="1500" b="1" i="0">
                 <a:solidFill>
                   <a:srgbClr val="1B7837"/>
                 </a:solidFill>
                 <a:latin typeface="Calibri"/>
               </a:rPr>
-              <a:t>Why intensity comes first</a:t>
-            </a:r>
-          </a:p>
-          <a:p>
-            <a:pPr algn="l">
-              <a:spcAft>
-                <a:spcPts val="400"/>
-              </a:spcAft>
-            </a:pPr>
-            <a:r>
-              <a:rPr sz="1400" b="0" i="0">
+              <a:t>Why intensity, not emissions</a:t>
+            </a:r>
+          </a:p>
+          <a:p>
+            <a:pPr algn="l">
+              <a:spcAft>
+                <a:spcPts val="1000"/>
+              </a:spcAft>
+            </a:pPr>
+            <a:r>
+              <a:rPr sz="1300" b="0" i="0">
                 <a:solidFill>
                   <a:srgbClr val="555555"/>
                 </a:solidFill>
                 <a:latin typeface="Calibri"/>
               </a:rPr>
-              <a:t>Emissions can be split into three moving parts:</a:t>
-            </a:r>
-          </a:p>
-          <a:p>
-            <a:pPr algn="l">
-              <a:spcAft>
-                <a:spcPts val="1000"/>
-              </a:spcAft>
-            </a:pPr>
-            <a:r>
-              <a:rPr sz="1400" b="1" i="0">
+              <a:t>Emissions arithmetic has three moving parts: economic growth, the fuel mix, and energy per dollar of output. Growth pushes emissions up; the two intensity terms are the only levers that push them down.</a:t>
+            </a:r>
+          </a:p>
+          <a:p>
+            <a:pPr algn="l">
+              <a:spcAft>
+                <a:spcPts val="0"/>
+              </a:spcAft>
+            </a:pPr>
+            <a:r>
+              <a:rPr sz="1300" b="0" i="0">
                 <a:solidFill>
                   <a:srgbClr val="212121"/>
                 </a:solidFill>
                 <a:latin typeface="Calibri"/>
               </a:rPr>
-              <a:t>CO2 growth = economic growth + change in fuel mix + change in energy efficiency</a:t>
-            </a:r>
-          </a:p>
-          <a:p>
-            <a:pPr algn="l">
-              <a:spcAft>
-                <a:spcPts val="800"/>
-              </a:spcAft>
-            </a:pPr>
-            <a:r>
-              <a:rPr sz="1400" b="0" i="0">
-                <a:solidFill>
-                  <a:srgbClr val="555555"/>
-                </a:solidFill>
-                <a:latin typeface="Calibri"/>
-              </a:rPr>
-              <a:t>Emissions cannot bend until the fuel mix or efficiency improves faster. Intensity is the leading indicator: any policy effect must show up there first — before it can ever show up in emissions.</a:t>
-            </a:r>
-          </a:p>
-          <a:p>
-            <a:pPr algn="l">
-              <a:spcAft>
-                <a:spcPts val="0"/>
-              </a:spcAft>
-            </a:pPr>
-            <a:r>
-              <a:rPr sz="1400" b="1" i="0">
-                <a:solidFill>
-                  <a:srgbClr val="212121"/>
-                </a:solidFill>
-                <a:latin typeface="Calibri"/>
-              </a:rPr>
-              <a:t>Unless intensity improves faster than the economy grows, emissions cannot stabilize.</a:t>
+              <a:t>That makes intensity the leading indicator. A policy signal must appear in the intensity slopes before it can ever appear in emissions — and unless intensity improves faster than the economy grows, emissions cannot stabilize at all.</a:t>
             </a:r>
           </a:p>
         </p:txBody>
@@ -7574,11 +8116,11 @@
             <a:r>
               <a:rPr sz="1200" b="1" i="0">
                 <a:solidFill>
-                  <a:srgbClr val="B33A3A"/>
-                </a:solidFill>
-                <a:latin typeface="Calibri"/>
-              </a:rPr>
-              <a:t>ACT IV · CAN WE TRUST THE STORY?</a:t>
+                  <a:srgbClr val="C77F00"/>
+                </a:solidFill>
+                <a:latin typeface="Calibri"/>
+              </a:rPr>
+              <a:t>ACT III · THE NEAR MISSES</a:t>
             </a:r>
           </a:p>
           <a:p>
@@ -7594,7 +8136,7 @@
                 </a:solidFill>
                 <a:latin typeface="Calibri"/>
               </a:rPr>
-              <a:t>Robustness, corroboration, and honest limits</a:t>
+              <a:t>Nineteen countries cut emissions; ten don't earn the verdict</a:t>
             </a:r>
           </a:p>
         </p:txBody>
@@ -7607,8 +8149,8 @@
         </p:nvSpPr>
         <p:spPr>
           <a:xfrm>
-            <a:off x="502920" y="1417320"/>
-            <a:ext cx="5394960" cy="2468880"/>
+            <a:off x="502920" y="1188720"/>
+            <a:ext cx="11201400" cy="731520"/>
           </a:xfrm>
           <a:prstGeom prst="rect">
             <a:avLst/>
@@ -7623,33 +8165,17 @@
           <a:p>
             <a:pPr algn="l">
               <a:spcAft>
-                <a:spcPts val="400"/>
-              </a:spcAft>
-            </a:pPr>
-            <a:r>
-              <a:rPr sz="1500" b="1" i="0">
-                <a:solidFill>
-                  <a:srgbClr val="212121"/>
-                </a:solidFill>
-                <a:latin typeface="Calibri"/>
-              </a:rPr>
-              <a:t>Consumption-based accounting</a:t>
-            </a:r>
-          </a:p>
-          <a:p>
-            <a:pPr algn="l">
-              <a:spcAft>
                 <a:spcPts val="0"/>
               </a:spcAft>
             </a:pPr>
             <a:r>
-              <a:rPr sz="1200" b="0" i="0">
+              <a:rPr sz="1300" b="0" i="0">
                 <a:solidFill>
                   <a:srgbClr val="555555"/>
                 </a:solidFill>
                 <a:latin typeface="Calibri"/>
               </a:rPr>
-              <a:t>When emissions embodied in trade are assigned to consumers instead of producers, only 6 of 17 comparable countries keep a break within 5 years of their production-based date; the median shift is ~12 years. Some 'domestic' transitions partly reflect offshoring — a main result, not a footnote.</a:t>
+              <a:t>Falling emissions alone are not enough — the route matters. Five of the nineteen are durable fuel substitutions: the Netherlands did with gas in 1975 what the US did with shale forty years later. Somalia 1985 is the caution: collapse mimics decarbonization in every raw statistic; only the persistence screen catches it.</a:t>
             </a:r>
           </a:p>
         </p:txBody>
@@ -7662,8 +8188,8 @@
         </p:nvSpPr>
         <p:spPr>
           <a:xfrm>
-            <a:off x="6400800" y="1417320"/>
-            <a:ext cx="5394960" cy="2468880"/>
+            <a:off x="502920" y="1956816"/>
+            <a:ext cx="11201400" cy="457200"/>
           </a:xfrm>
           <a:prstGeom prst="rect">
             <a:avLst/>
@@ -7678,147 +8204,54 @@
           <a:p>
             <a:pPr algn="l">
               <a:spcAft>
-                <a:spcPts val="400"/>
-              </a:spcAft>
-            </a:pPr>
-            <a:r>
-              <a:rPr sz="1500" b="1" i="0">
-                <a:solidFill>
-                  <a:srgbClr val="212121"/>
-                </a:solidFill>
-                <a:latin typeface="Calibri"/>
-              </a:rPr>
-              <a:t>Carbon pricing &amp; policy stringency</a:t>
-            </a:r>
-          </a:p>
-          <a:p>
-            <a:pPr algn="l">
-              <a:spcAft>
                 <a:spcPts val="0"/>
               </a:spcAft>
             </a:pPr>
             <a:r>
-              <a:rPr sz="1200" b="0" i="0">
-                <a:solidFill>
-                  <a:srgbClr val="555555"/>
-                </a:solidFill>
-                <a:latin typeface="Calibri"/>
-              </a:rPr>
-              <a:t>Carbon pricing is associated with a cleaner fuel mix in panel models with country and year controls; effects on the other components are imprecise. Policy-stringency data cover only 15 of 28 focal countries. Associational, not causal.</a:t>
-            </a:r>
-          </a:p>
-        </p:txBody>
-      </p:sp>
-      <p:sp>
-        <p:nvSpPr>
-          <p:cNvPr id="5" name="TextBox 4"/>
-          <p:cNvSpPr txBox="1"/>
+              <a:rPr sz="1150" b="1" i="1">
+                <a:solidFill>
+                  <a:srgbClr val="3A66A5"/>
+                </a:solidFill>
+                <a:latin typeface="Calibri"/>
+              </a:rPr>
+              <a:t>How to read it: </a:t>
+            </a:r>
+            <a:r>
+              <a:rPr sz="1150" b="0" i="1">
+                <a:solidFill>
+                  <a:srgbClr val="8A8A8A"/>
+                </a:solidFill>
+                <a:latin typeface="Calibri"/>
+              </a:rPr>
+              <a:t>Each row is a country where absolute CO2 fell after a favorable bend, with its break-year uncertainty whisker, grouped by verdict; labels name the best-supported mechanism.</a:t>
+            </a:r>
+          </a:p>
+        </p:txBody>
+      </p:sp>
+      <p:pic>
+        <p:nvPicPr>
+          <p:cNvPr id="5" name="Picture 4" descr="image8.png"/>
+          <p:cNvPicPr>
+            <a:picLocks noChangeAspect="1"/>
+          </p:cNvPicPr>
           <p:nvPr/>
-        </p:nvSpPr>
-        <p:spPr>
-          <a:xfrm>
-            <a:off x="502920" y="3977639"/>
-            <a:ext cx="5394960" cy="2468880"/>
+        </p:nvPicPr>
+        <p:blipFill>
+          <a:blip r:embed="rId2"/>
+          <a:stretch>
+            <a:fillRect/>
+          </a:stretch>
+        </p:blipFill>
+        <p:spPr>
+          <a:xfrm>
+            <a:off x="3164092" y="2468880"/>
+            <a:ext cx="5860766" cy="4151376"/>
           </a:xfrm>
           <a:prstGeom prst="rect">
             <a:avLst/>
           </a:prstGeom>
-          <a:noFill/>
-        </p:spPr>
-        <p:txBody>
-          <a:bodyPr wrap="square">
-            <a:spAutoFit/>
-          </a:bodyPr>
-          <a:lstStyle/>
-          <a:p>
-            <a:pPr algn="l">
-              <a:spcAft>
-                <a:spcPts val="400"/>
-              </a:spcAft>
-            </a:pPr>
-            <a:r>
-              <a:rPr sz="1500" b="1" i="0">
-                <a:solidFill>
-                  <a:srgbClr val="212121"/>
-                </a:solidFill>
-                <a:latin typeface="Calibri"/>
-              </a:rPr>
-              <a:t>Event-timing validation</a:t>
-            </a:r>
-          </a:p>
-          <a:p>
-            <a:pPr algn="l">
-              <a:spcAft>
-                <a:spcPts val="0"/>
-              </a:spcAft>
-            </a:pPr>
-            <a:r>
-              <a:rPr sz="1200" b="0" i="0">
-                <a:solidFill>
-                  <a:srgbClr val="555555"/>
-                </a:solidFill>
-                <a:latin typeface="Calibri"/>
-              </a:rPr>
-              <a:t>45% of documented events fall within 2 years of the estimated break versus ~17% if dates were drawn at random; 80% vs 37% within 5 years; 70% vs 33% inside the episode. The historical classifications carry real temporal information — far beyond retrospective storytelling.</a:t>
-            </a:r>
-          </a:p>
-        </p:txBody>
-      </p:sp>
-      <p:sp>
-        <p:nvSpPr>
-          <p:cNvPr id="6" name="TextBox 5"/>
-          <p:cNvSpPr txBox="1"/>
-          <p:nvPr/>
-        </p:nvSpPr>
-        <p:spPr>
-          <a:xfrm>
-            <a:off x="6400800" y="3977639"/>
-            <a:ext cx="5394960" cy="2468880"/>
-          </a:xfrm>
-          <a:prstGeom prst="rect">
-            <a:avLst/>
-          </a:prstGeom>
-          <a:noFill/>
-        </p:spPr>
-        <p:txBody>
-          <a:bodyPr wrap="square">
-            <a:spAutoFit/>
-          </a:bodyPr>
-          <a:lstStyle/>
-          <a:p>
-            <a:pPr algn="l">
-              <a:spcAft>
-                <a:spcPts val="400"/>
-              </a:spcAft>
-            </a:pPr>
-            <a:r>
-              <a:rPr sz="1500" b="1" i="0">
-                <a:solidFill>
-                  <a:srgbClr val="212121"/>
-                </a:solidFill>
-                <a:latin typeface="Calibri"/>
-              </a:rPr>
-              <a:t>What breakpoints can't tell you</a:t>
-            </a:r>
-          </a:p>
-          <a:p>
-            <a:pPr algn="l">
-              <a:spcAft>
-                <a:spcPts val="0"/>
-              </a:spcAft>
-            </a:pPr>
-            <a:r>
-              <a:rPr sz="1200" b="0" i="0">
-                <a:solidFill>
-                  <a:srgbClr val="555555"/>
-                </a:solidFill>
-                <a:latin typeface="Calibri"/>
-              </a:rPr>
-              <a:t>Break timing identifies change, not cause. Attribution and outcome classification each leave 22 cases open — restraint that makes the resolved 75% credible. And there is no counterfactual: a treaty that prevents backsliding produces no break at all.</a:t>
-            </a:r>
-          </a:p>
-        </p:txBody>
-      </p:sp>
+        </p:spPr>
+      </p:pic>
     </p:spTree>
   </p:cSld>
   <p:clrMapOvr>
@@ -7867,11 +8300,11 @@
             <a:r>
               <a:rPr sz="1200" b="1" i="0">
                 <a:solidFill>
-                  <a:srgbClr val="1B7837"/>
-                </a:solidFill>
-                <a:latin typeface="Calibri"/>
-              </a:rPr>
-              <a:t>THE VERDICT</a:t>
+                  <a:srgbClr val="C77F00"/>
+                </a:solidFill>
+                <a:latin typeface="Calibri"/>
+              </a:rPr>
+              <a:t>ACT III · THE GEOGRAPHY</a:t>
             </a:r>
           </a:p>
           <a:p>
@@ -7887,7 +8320,7 @@
                 </a:solidFill>
                 <a:latin typeface="Calibri"/>
               </a:rPr>
-              <a:t>Curves bend everywhere; decarbonization is rare</a:t>
+              <a:t>Mechanisms are regional stories; success is concentrated</a:t>
             </a:r>
           </a:p>
         </p:txBody>
@@ -7900,8 +8333,8 @@
         </p:nvSpPr>
         <p:spPr>
           <a:xfrm>
-            <a:off x="502920" y="1207008"/>
-            <a:ext cx="11201400" cy="603504"/>
+            <a:off x="502920" y="1188720"/>
+            <a:ext cx="11201400" cy="658368"/>
           </a:xfrm>
           <a:prstGeom prst="rect">
             <a:avLst/>
@@ -7920,29 +8353,20 @@
               </a:spcAft>
             </a:pPr>
             <a:r>
-              <a:rPr sz="1250" b="1" i="0">
-                <a:solidFill>
-                  <a:srgbClr val="3A66A5"/>
-                </a:solidFill>
-                <a:latin typeface="Calibri"/>
-              </a:rPr>
-              <a:t>How to read it:  </a:t>
-            </a:r>
-            <a:r>
-              <a:rPr sz="1250" b="0" i="0">
+              <a:rPr sz="1300" b="0" i="0">
                 <a:solidFill>
                   <a:srgbClr val="555555"/>
                 </a:solidFill>
                 <a:latin typeface="Calibri"/>
               </a:rPr>
-              <a:t>All 97 breaks looked statistically favorable. The colors show what they turned out to be once persistence, mechanism, and absolute emissions are checked — only the dark green block on the right is unambiguous decarbonization.</a:t>
+              <a:t>Fuel-market transformations cluster in the Americas and the Middle East; restructuring runs across Asia-Pacific; the policy-enabled cases concentrate in northern Europe. On the verdict map, most of the world is contraction, incompleteness, or intensity gains that growth overwhelms — the dark-green constructive nine occupy one corner of one continent.</a:t>
             </a:r>
           </a:p>
         </p:txBody>
       </p:sp>
       <p:pic>
         <p:nvPicPr>
-          <p:cNvPr id="4" name="Picture 3" descr="image12.png"/>
+          <p:cNvPr id="4" name="Picture 3" descr="image9.png"/>
           <p:cNvPicPr>
             <a:picLocks noChangeAspect="1"/>
           </p:cNvPicPr>
@@ -7956,8 +8380,32 @@
         </p:blipFill>
         <p:spPr>
           <a:xfrm>
-            <a:off x="320040" y="2293082"/>
-            <a:ext cx="11548872" cy="3881178"/>
+            <a:off x="274320" y="2827210"/>
+            <a:ext cx="5806440" cy="2758059"/>
+          </a:xfrm>
+          <a:prstGeom prst="rect">
+            <a:avLst/>
+          </a:prstGeom>
+        </p:spPr>
+      </p:pic>
+      <p:pic>
+        <p:nvPicPr>
+          <p:cNvPr id="5" name="Picture 4" descr="image10.png"/>
+          <p:cNvPicPr>
+            <a:picLocks noChangeAspect="1"/>
+          </p:cNvPicPr>
+          <p:nvPr/>
+        </p:nvPicPr>
+        <p:blipFill>
+          <a:blip r:embed="rId3"/>
+          <a:stretch>
+            <a:fillRect/>
+          </a:stretch>
+        </p:blipFill>
+        <p:spPr>
+          <a:xfrm>
+            <a:off x="6172200" y="2827210"/>
+            <a:ext cx="5806440" cy="2758059"/>
           </a:xfrm>
           <a:prstGeom prst="rect">
             <a:avLst/>
@@ -7990,8 +8438,8 @@
         </p:nvSpPr>
         <p:spPr>
           <a:xfrm>
-            <a:off x="822960" y="1051560"/>
-            <a:ext cx="10515600" cy="1737360"/>
+            <a:off x="822960" y="777240"/>
+            <a:ext cx="10515600" cy="2377440"/>
           </a:xfrm>
           <a:prstGeom prst="rect">
             <a:avLst/>
@@ -8006,17 +8454,49 @@
           <a:p>
             <a:pPr algn="l">
               <a:spcAft>
-                <a:spcPts val="200"/>
-              </a:spcAft>
-            </a:pPr>
-            <a:r>
-              <a:rPr sz="2700" b="1" i="0">
+                <a:spcPts val="0"/>
+              </a:spcAft>
+            </a:pPr>
+            <a:r>
+              <a:rPr sz="4400" b="1" i="0">
+                <a:solidFill>
+                  <a:srgbClr val="1B7837"/>
+                </a:solidFill>
+                <a:latin typeface="Calibri"/>
+              </a:rPr>
+              <a:t>IV</a:t>
+            </a:r>
+          </a:p>
+          <a:p>
+            <a:pPr algn="l">
+              <a:spcAft>
+                <a:spcPts val="600"/>
+              </a:spcAft>
+            </a:pPr>
+            <a:r>
+              <a:rPr sz="1200" b="1" i="0">
+                <a:solidFill>
+                  <a:srgbClr val="8A8A8A"/>
+                </a:solidFill>
+                <a:latin typeface="Calibri"/>
+              </a:rPr>
+              <a:t>ACT IV</a:t>
+            </a:r>
+          </a:p>
+          <a:p>
+            <a:pPr algn="l">
+              <a:spcAft>
+                <a:spcPts val="800"/>
+              </a:spcAft>
+            </a:pPr>
+            <a:r>
+              <a:rPr sz="2800" b="1" i="0">
                 <a:solidFill>
                   <a:srgbClr val="212121"/>
                 </a:solidFill>
                 <a:latin typeface="Calibri"/>
               </a:rPr>
-              <a:t>Global agreements can organize climate action —</a:t>
+              <a:t>Can we trust the story?</a:t>
             </a:r>
           </a:p>
           <a:p>
@@ -8026,13 +8506,13 @@
               </a:spcAft>
             </a:pPr>
             <a:r>
-              <a:rPr sz="2700" b="1" i="0">
-                <a:solidFill>
-                  <a:srgbClr val="1B7837"/>
-                </a:solidFill>
-                <a:latin typeface="Calibri"/>
-              </a:rPr>
-              <a:t>durable national transformations bend the curve.</a:t>
+              <a:rPr sz="1400" b="0" i="0">
+                <a:solidFill>
+                  <a:srgbClr val="555555"/>
+                </a:solidFill>
+                <a:latin typeface="Calibri"/>
+              </a:rPr>
+              <a:t>Three checks that could have broken the argument, and one set of limits stated plainly.</a:t>
             </a:r>
           </a:p>
         </p:txBody>
@@ -8045,8 +8525,8 @@
         </p:nvSpPr>
         <p:spPr>
           <a:xfrm>
-            <a:off x="822960" y="2880360"/>
-            <a:ext cx="10515600" cy="3017520"/>
+            <a:off x="822960" y="4206240"/>
+            <a:ext cx="3474720" cy="1828800"/>
           </a:xfrm>
           <a:prstGeom prst="rect">
             <a:avLst/>
@@ -8058,15 +8538,1058 @@
             <a:spAutoFit/>
           </a:bodyPr>
           <a:lstStyle/>
+          <a:p>
+            <a:pPr algn="l">
+              <a:spcAft>
+                <a:spcPts val="200"/>
+              </a:spcAft>
+            </a:pPr>
+            <a:r>
+              <a:rPr sz="3000" b="1" i="0">
+                <a:solidFill>
+                  <a:srgbClr val="1B7837"/>
+                </a:solidFill>
+                <a:latin typeface="Calibri"/>
+              </a:rPr>
+              <a:t>80% vs 37%</a:t>
+            </a:r>
+          </a:p>
+          <a:p>
+            <a:pPr algn="l">
+              <a:spcAft>
+                <a:spcPts val="0"/>
+              </a:spcAft>
+            </a:pPr>
+            <a:r>
+              <a:rPr sz="1250" b="0" i="0">
+                <a:solidFill>
+                  <a:srgbClr val="555555"/>
+                </a:solidFill>
+                <a:latin typeface="Calibri"/>
+              </a:rPr>
+              <a:t>documented events within five years of breaks, observed versus chance</a:t>
+            </a:r>
+          </a:p>
+        </p:txBody>
+      </p:sp>
+      <p:sp>
+        <p:nvSpPr>
+          <p:cNvPr id="4" name="TextBox 3"/>
+          <p:cNvSpPr txBox="1"/>
+          <p:nvPr/>
+        </p:nvSpPr>
+        <p:spPr>
+          <a:xfrm>
+            <a:off x="4434840" y="4206240"/>
+            <a:ext cx="3474720" cy="1828800"/>
+          </a:xfrm>
+          <a:prstGeom prst="rect">
+            <a:avLst/>
+          </a:prstGeom>
+          <a:noFill/>
+        </p:spPr>
+        <p:txBody>
+          <a:bodyPr wrap="square">
+            <a:spAutoFit/>
+          </a:bodyPr>
+          <a:lstStyle/>
+          <a:p>
+            <a:pPr algn="l">
+              <a:spcAft>
+                <a:spcPts val="200"/>
+              </a:spcAft>
+            </a:pPr>
+            <a:r>
+              <a:rPr sz="3000" b="1" i="0">
+                <a:solidFill>
+                  <a:srgbClr val="1B7837"/>
+                </a:solidFill>
+                <a:latin typeface="Calibri"/>
+              </a:rPr>
+              <a:t>64th vs 34th</a:t>
+            </a:r>
+          </a:p>
+          <a:p>
+            <a:pPr algn="l">
+              <a:spcAft>
+                <a:spcPts val="0"/>
+              </a:spcAft>
+            </a:pPr>
+            <a:r>
+              <a:rPr sz="1250" b="0" i="0">
+                <a:solidFill>
+                  <a:srgbClr val="555555"/>
+                </a:solidFill>
+                <a:latin typeface="Calibri"/>
+              </a:rPr>
+              <a:t>median external climate-rating percentile, policy-enabled cases versus the rest</a:t>
+            </a:r>
+          </a:p>
+        </p:txBody>
+      </p:sp>
+      <p:sp>
+        <p:nvSpPr>
+          <p:cNvPr id="5" name="TextBox 4"/>
+          <p:cNvSpPr txBox="1"/>
+          <p:nvPr/>
+        </p:nvSpPr>
+        <p:spPr>
+          <a:xfrm>
+            <a:off x="8046720" y="4206240"/>
+            <a:ext cx="3474720" cy="1828800"/>
+          </a:xfrm>
+          <a:prstGeom prst="rect">
+            <a:avLst/>
+          </a:prstGeom>
+          <a:noFill/>
+        </p:spPr>
+        <p:txBody>
+          <a:bodyPr wrap="square">
+            <a:spAutoFit/>
+          </a:bodyPr>
+          <a:lstStyle/>
+          <a:p>
+            <a:pPr algn="l">
+              <a:spcAft>
+                <a:spcPts val="200"/>
+              </a:spcAft>
+            </a:pPr>
+            <a:r>
+              <a:rPr sz="3000" b="1" i="0">
+                <a:solidFill>
+                  <a:srgbClr val="1B7837"/>
+                </a:solidFill>
+                <a:latin typeface="Calibri"/>
+              </a:rPr>
+              <a:t>6 of 17</a:t>
+            </a:r>
+          </a:p>
+          <a:p>
+            <a:pPr algn="l">
+              <a:spcAft>
+                <a:spcPts val="0"/>
+              </a:spcAft>
+            </a:pPr>
+            <a:r>
+              <a:rPr sz="1250" b="0" i="0">
+                <a:solidFill>
+                  <a:srgbClr val="555555"/>
+                </a:solidFill>
+                <a:latin typeface="Calibri"/>
+              </a:rPr>
+              <a:t>countries whose break date survives switching to consumption-based accounting</a:t>
+            </a:r>
+          </a:p>
+        </p:txBody>
+      </p:sp>
+    </p:spTree>
+  </p:cSld>
+  <p:clrMapOvr>
+    <a:masterClrMapping/>
+  </p:clrMapOvr>
+</p:sld>
+</file>
+
+<file path=ppt/slides/slide23.xml><?xml version="1.0" encoding="utf-8"?>
+<p:sld xmlns:a="http://schemas.openxmlformats.org/drawingml/2006/main" xmlns:p="http://schemas.openxmlformats.org/presentationml/2006/main" xmlns:r="http://schemas.openxmlformats.org/officeDocument/2006/relationships">
+  <p:cSld>
+    <p:spTree>
+      <p:nvGrpSpPr>
+        <p:cNvPr id="1" name=""/>
+        <p:cNvGrpSpPr/>
+        <p:nvPr/>
+      </p:nvGrpSpPr>
+      <p:grpSpPr/>
+      <p:sp>
+        <p:nvSpPr>
+          <p:cNvPr id="2" name="TextBox 1"/>
+          <p:cNvSpPr txBox="1"/>
+          <p:nvPr/>
+        </p:nvSpPr>
+        <p:spPr>
+          <a:xfrm>
+            <a:off x="502920" y="274320"/>
+            <a:ext cx="11201400" cy="914400"/>
+          </a:xfrm>
+          <a:prstGeom prst="rect">
+            <a:avLst/>
+          </a:prstGeom>
+          <a:noFill/>
+        </p:spPr>
+        <p:txBody>
+          <a:bodyPr wrap="square">
+            <a:spAutoFit/>
+          </a:bodyPr>
+          <a:lstStyle/>
+          <a:p>
+            <a:pPr algn="l">
+              <a:spcAft>
+                <a:spcPts val="200"/>
+              </a:spcAft>
+            </a:pPr>
+            <a:r>
+              <a:rPr sz="1200" b="1" i="0">
+                <a:solidFill>
+                  <a:srgbClr val="B33A3A"/>
+                </a:solidFill>
+                <a:latin typeface="Calibri"/>
+              </a:rPr>
+              <a:t>ACT IV · THE CORROBORATION</a:t>
+            </a:r>
+          </a:p>
+          <a:p>
+            <a:pPr algn="l">
+              <a:spcAft>
+                <a:spcPts val="0"/>
+              </a:spcAft>
+            </a:pPr>
+            <a:r>
+              <a:rPr sz="2400" b="1" i="0">
+                <a:solidFill>
+                  <a:srgbClr val="212121"/>
+                </a:solidFill>
+                <a:latin typeface="Calibri"/>
+              </a:rPr>
+              <a:t>Independent raters recognize the same countries</a:t>
+            </a:r>
+          </a:p>
+        </p:txBody>
+      </p:sp>
+      <p:sp>
+        <p:nvSpPr>
+          <p:cNvPr id="3" name="TextBox 2"/>
+          <p:cNvSpPr txBox="1"/>
+          <p:nvPr/>
+        </p:nvSpPr>
+        <p:spPr>
+          <a:xfrm>
+            <a:off x="502920" y="1188720"/>
+            <a:ext cx="11201400" cy="731520"/>
+          </a:xfrm>
+          <a:prstGeom prst="rect">
+            <a:avLst/>
+          </a:prstGeom>
+          <a:noFill/>
+        </p:spPr>
+        <p:txBody>
+          <a:bodyPr wrap="square">
+            <a:spAutoFit/>
+          </a:bodyPr>
+          <a:lstStyle/>
+          <a:p>
+            <a:pPr algn="l">
+              <a:spcAft>
+                <a:spcPts val="0"/>
+              </a:spcAft>
+            </a:pPr>
+            <a:r>
+              <a:rPr sz="1300" b="0" i="0">
+                <a:solidFill>
+                  <a:srgbClr val="555555"/>
+                </a:solidFill>
+                <a:latin typeface="Calibri"/>
+              </a:rPr>
+              <a:t>Climate Action Tracker and the Climate Change Performance Index know nothing of our breakpoints, yet the policy-enabled cases land high on both — median percentiles of 64 versus 34, and 91 versus 44. Coverage is the honest caveat: only three of the nine appear in CAT and two in CCPI, so every covered country is shown rather than summarized away.</a:t>
+            </a:r>
+          </a:p>
+        </p:txBody>
+      </p:sp>
+      <p:sp>
+        <p:nvSpPr>
+          <p:cNvPr id="4" name="TextBox 3"/>
+          <p:cNvSpPr txBox="1"/>
+          <p:nvPr/>
+        </p:nvSpPr>
+        <p:spPr>
+          <a:xfrm>
+            <a:off x="502920" y="1956816"/>
+            <a:ext cx="11201400" cy="457200"/>
+          </a:xfrm>
+          <a:prstGeom prst="rect">
+            <a:avLst/>
+          </a:prstGeom>
+          <a:noFill/>
+        </p:spPr>
+        <p:txBody>
+          <a:bodyPr wrap="square">
+            <a:spAutoFit/>
+          </a:bodyPr>
+          <a:lstStyle/>
+          <a:p>
+            <a:pPr algn="l">
+              <a:spcAft>
+                <a:spcPts val="0"/>
+              </a:spcAft>
+            </a:pPr>
+            <a:r>
+              <a:rPr sz="1150" b="1" i="1">
+                <a:solidFill>
+                  <a:srgbClr val="3A66A5"/>
+                </a:solidFill>
+                <a:latin typeface="Calibri"/>
+              </a:rPr>
+              <a:t>How to read it: </a:t>
+            </a:r>
+            <a:r>
+              <a:rPr sz="1150" b="0" i="1">
+                <a:solidFill>
+                  <a:srgbClr val="8A8A8A"/>
+                </a:solidFill>
+                <a:latin typeface="Calibri"/>
+              </a:rPr>
+              <a:t>Each dot is a covered country placed at its rating percentile; green triangles are the policy-enabled cases; vertical bars mark group medians.</a:t>
+            </a:r>
+          </a:p>
+        </p:txBody>
+      </p:sp>
+      <p:pic>
+        <p:nvPicPr>
+          <p:cNvPr id="5" name="Picture 4" descr="takeaway_fig06_external_corroboration.png"/>
+          <p:cNvPicPr>
+            <a:picLocks noChangeAspect="1"/>
+          </p:cNvPicPr>
+          <p:nvPr/>
+        </p:nvPicPr>
+        <p:blipFill>
+          <a:blip r:embed="rId2"/>
+          <a:stretch>
+            <a:fillRect/>
+          </a:stretch>
+        </p:blipFill>
+        <p:spPr>
+          <a:xfrm>
+            <a:off x="1646573" y="2468880"/>
+            <a:ext cx="8895805" cy="4151376"/>
+          </a:xfrm>
+          <a:prstGeom prst="rect">
+            <a:avLst/>
+          </a:prstGeom>
+        </p:spPr>
+      </p:pic>
+    </p:spTree>
+  </p:cSld>
+  <p:clrMapOvr>
+    <a:masterClrMapping/>
+  </p:clrMapOvr>
+</p:sld>
+</file>
+
+<file path=ppt/slides/slide24.xml><?xml version="1.0" encoding="utf-8"?>
+<p:sld xmlns:a="http://schemas.openxmlformats.org/drawingml/2006/main" xmlns:p="http://schemas.openxmlformats.org/presentationml/2006/main" xmlns:r="http://schemas.openxmlformats.org/officeDocument/2006/relationships">
+  <p:cSld>
+    <p:spTree>
+      <p:nvGrpSpPr>
+        <p:cNvPr id="1" name=""/>
+        <p:cNvGrpSpPr/>
+        <p:nvPr/>
+      </p:nvGrpSpPr>
+      <p:grpSpPr/>
+      <p:sp>
+        <p:nvSpPr>
+          <p:cNvPr id="2" name="TextBox 1"/>
+          <p:cNvSpPr txBox="1"/>
+          <p:nvPr/>
+        </p:nvSpPr>
+        <p:spPr>
+          <a:xfrm>
+            <a:off x="502920" y="274320"/>
+            <a:ext cx="11201400" cy="914400"/>
+          </a:xfrm>
+          <a:prstGeom prst="rect">
+            <a:avLst/>
+          </a:prstGeom>
+          <a:noFill/>
+        </p:spPr>
+        <p:txBody>
+          <a:bodyPr wrap="square">
+            <a:spAutoFit/>
+          </a:bodyPr>
+          <a:lstStyle/>
+          <a:p>
+            <a:pPr algn="l">
+              <a:spcAft>
+                <a:spcPts val="200"/>
+              </a:spcAft>
+            </a:pPr>
+            <a:r>
+              <a:rPr sz="1200" b="1" i="0">
+                <a:solidFill>
+                  <a:srgbClr val="B33A3A"/>
+                </a:solidFill>
+                <a:latin typeface="Calibri"/>
+              </a:rPr>
+              <a:t>ACT IV · THE LIMITS</a:t>
+            </a:r>
+          </a:p>
+          <a:p>
+            <a:pPr algn="l">
+              <a:spcAft>
+                <a:spcPts val="0"/>
+              </a:spcAft>
+            </a:pPr>
+            <a:r>
+              <a:rPr sz="2400" b="1" i="0">
+                <a:solidFill>
+                  <a:srgbClr val="212121"/>
+                </a:solidFill>
+                <a:latin typeface="Calibri"/>
+              </a:rPr>
+              <a:t>What the design supports, and what it refuses to claim</a:t>
+            </a:r>
+          </a:p>
+        </p:txBody>
+      </p:sp>
+      <p:sp>
+        <p:nvSpPr>
+          <p:cNvPr id="3" name="TextBox 2"/>
+          <p:cNvSpPr txBox="1"/>
+          <p:nvPr/>
+        </p:nvSpPr>
+        <p:spPr>
+          <a:xfrm>
+            <a:off x="502920" y="1417320"/>
+            <a:ext cx="5394960" cy="2423160"/>
+          </a:xfrm>
+          <a:prstGeom prst="rect">
+            <a:avLst/>
+          </a:prstGeom>
+          <a:noFill/>
+        </p:spPr>
+        <p:txBody>
+          <a:bodyPr wrap="square">
+            <a:spAutoFit/>
+          </a:bodyPr>
+          <a:lstStyle/>
+          <a:p>
+            <a:pPr algn="l">
+              <a:spcAft>
+                <a:spcPts val="400"/>
+              </a:spcAft>
+            </a:pPr>
+            <a:r>
+              <a:rPr sz="1450" b="1" i="0">
+                <a:solidFill>
+                  <a:srgbClr val="212121"/>
+                </a:solidFill>
+                <a:latin typeface="Calibri"/>
+              </a:rPr>
+              <a:t>Consumption-based accounting</a:t>
+            </a:r>
+          </a:p>
+          <a:p>
+            <a:pPr algn="l">
+              <a:spcAft>
+                <a:spcPts val="0"/>
+              </a:spcAft>
+            </a:pPr>
+            <a:r>
+              <a:rPr sz="1200" b="0" i="0">
+                <a:solidFill>
+                  <a:srgbClr val="555555"/>
+                </a:solidFill>
+                <a:latin typeface="Calibri"/>
+              </a:rPr>
+              <a:t>Assign traded emissions to consumers instead of producers and only 6 of 17 comparable countries keep a break date within five years; the median shift is twelve years. Some 'domestic' transitions partly reflect offshoring. This is a main result, not a footnote.</a:t>
+            </a:r>
+          </a:p>
+        </p:txBody>
+      </p:sp>
+      <p:sp>
+        <p:nvSpPr>
+          <p:cNvPr id="4" name="TextBox 3"/>
+          <p:cNvSpPr txBox="1"/>
+          <p:nvPr/>
+        </p:nvSpPr>
+        <p:spPr>
+          <a:xfrm>
+            <a:off x="6400800" y="1417320"/>
+            <a:ext cx="5394960" cy="2423160"/>
+          </a:xfrm>
+          <a:prstGeom prst="rect">
+            <a:avLst/>
+          </a:prstGeom>
+          <a:noFill/>
+        </p:spPr>
+        <p:txBody>
+          <a:bodyPr wrap="square">
+            <a:spAutoFit/>
+          </a:bodyPr>
+          <a:lstStyle/>
+          <a:p>
+            <a:pPr algn="l">
+              <a:spcAft>
+                <a:spcPts val="400"/>
+              </a:spcAft>
+            </a:pPr>
+            <a:r>
+              <a:rPr sz="1450" b="1" i="0">
+                <a:solidFill>
+                  <a:srgbClr val="212121"/>
+                </a:solidFill>
+                <a:latin typeface="Calibri"/>
+              </a:rPr>
+              <a:t>Carbon pricing &amp; stringency</a:t>
+            </a:r>
+          </a:p>
+          <a:p>
+            <a:pPr algn="l">
+              <a:spcAft>
+                <a:spcPts val="0"/>
+              </a:spcAft>
+            </a:pPr>
+            <a:r>
+              <a:rPr sz="1200" b="0" i="0">
+                <a:solidFill>
+                  <a:srgbClr val="555555"/>
+                </a:solidFill>
+                <a:latin typeface="Calibri"/>
+              </a:rPr>
+              <a:t>Carbon pricing is associated with a cleaner fuel mix in panel models with country and year controls; the other components are imprecise, and stringency data cover only 15 of 28 focal countries. Associational, not causal — and said so.</a:t>
+            </a:r>
+          </a:p>
+        </p:txBody>
+      </p:sp>
+      <p:sp>
+        <p:nvSpPr>
+          <p:cNvPr id="5" name="TextBox 4"/>
+          <p:cNvSpPr txBox="1"/>
+          <p:nvPr/>
+        </p:nvSpPr>
+        <p:spPr>
+          <a:xfrm>
+            <a:off x="502920" y="3931920"/>
+            <a:ext cx="5394960" cy="2423160"/>
+          </a:xfrm>
+          <a:prstGeom prst="rect">
+            <a:avLst/>
+          </a:prstGeom>
+          <a:noFill/>
+        </p:spPr>
+        <p:txBody>
+          <a:bodyPr wrap="square">
+            <a:spAutoFit/>
+          </a:bodyPr>
+          <a:lstStyle/>
+          <a:p>
+            <a:pPr algn="l">
+              <a:spcAft>
+                <a:spcPts val="400"/>
+              </a:spcAft>
+            </a:pPr>
+            <a:r>
+              <a:rPr sz="1450" b="1" i="0">
+                <a:solidFill>
+                  <a:srgbClr val="212121"/>
+                </a:solidFill>
+                <a:latin typeface="Calibri"/>
+              </a:rPr>
+              <a:t>Event-timing validation</a:t>
+            </a:r>
+          </a:p>
+          <a:p>
+            <a:pPr algn="l">
+              <a:spcAft>
+                <a:spcPts val="0"/>
+              </a:spcAft>
+            </a:pPr>
+            <a:r>
+              <a:rPr sz="1200" b="0" i="0">
+                <a:solidFill>
+                  <a:srgbClr val="555555"/>
+                </a:solidFill>
+                <a:latin typeface="Calibri"/>
+              </a:rPr>
+              <a:t>The historical classifications carry real temporal information: documented events fall within two years of the estimated break in 45% of episodes against ~17% by chance, and inside the documented episode in 70% against 33%.</a:t>
+            </a:r>
+          </a:p>
+        </p:txBody>
+      </p:sp>
+      <p:sp>
+        <p:nvSpPr>
+          <p:cNvPr id="6" name="TextBox 5"/>
+          <p:cNvSpPr txBox="1"/>
+          <p:nvPr/>
+        </p:nvSpPr>
+        <p:spPr>
+          <a:xfrm>
+            <a:off x="6400800" y="3931920"/>
+            <a:ext cx="5394960" cy="2423160"/>
+          </a:xfrm>
+          <a:prstGeom prst="rect">
+            <a:avLst/>
+          </a:prstGeom>
+          <a:noFill/>
+        </p:spPr>
+        <p:txBody>
+          <a:bodyPr wrap="square">
+            <a:spAutoFit/>
+          </a:bodyPr>
+          <a:lstStyle/>
+          <a:p>
+            <a:pPr algn="l">
+              <a:spcAft>
+                <a:spcPts val="400"/>
+              </a:spcAft>
+            </a:pPr>
+            <a:r>
+              <a:rPr sz="1450" b="1" i="0">
+                <a:solidFill>
+                  <a:srgbClr val="212121"/>
+                </a:solidFill>
+                <a:latin typeface="Calibri"/>
+              </a:rPr>
+              <a:t>What breakpoints can't say</a:t>
+            </a:r>
+          </a:p>
+          <a:p>
+            <a:pPr algn="l">
+              <a:spcAft>
+                <a:spcPts val="0"/>
+              </a:spcAft>
+            </a:pPr>
+            <a:r>
+              <a:rPr sz="1200" b="0" i="0">
+                <a:solidFill>
+                  <a:srgbClr val="555555"/>
+                </a:solidFill>
+                <a:latin typeface="Calibri"/>
+              </a:rPr>
+              <a:t>Break timing identifies change, not cause. Attribution and outcome classification each leave 22 cases open — restraint that makes the resolved three-quarters credible. And a treaty that prevents backsliding produces no break at all: absence of a break is not absence of an effect.</a:t>
+            </a:r>
+          </a:p>
+        </p:txBody>
+      </p:sp>
+    </p:spTree>
+  </p:cSld>
+  <p:clrMapOvr>
+    <a:masterClrMapping/>
+  </p:clrMapOvr>
+</p:sld>
+</file>
+
+<file path=ppt/slides/slide25.xml><?xml version="1.0" encoding="utf-8"?>
+<p:sld xmlns:a="http://schemas.openxmlformats.org/drawingml/2006/main" xmlns:p="http://schemas.openxmlformats.org/presentationml/2006/main" xmlns:r="http://schemas.openxmlformats.org/officeDocument/2006/relationships">
+  <p:cSld>
+    <p:spTree>
+      <p:nvGrpSpPr>
+        <p:cNvPr id="1" name=""/>
+        <p:cNvGrpSpPr/>
+        <p:nvPr/>
+      </p:nvGrpSpPr>
+      <p:grpSpPr/>
+      <p:sp>
+        <p:nvSpPr>
+          <p:cNvPr id="2" name="TextBox 1"/>
+          <p:cNvSpPr txBox="1"/>
+          <p:nvPr/>
+        </p:nvSpPr>
+        <p:spPr>
+          <a:xfrm>
+            <a:off x="502920" y="274320"/>
+            <a:ext cx="11201400" cy="914400"/>
+          </a:xfrm>
+          <a:prstGeom prst="rect">
+            <a:avLst/>
+          </a:prstGeom>
+          <a:noFill/>
+        </p:spPr>
+        <p:txBody>
+          <a:bodyPr wrap="square">
+            <a:spAutoFit/>
+          </a:bodyPr>
+          <a:lstStyle/>
+          <a:p>
+            <a:pPr algn="l">
+              <a:spcAft>
+                <a:spcPts val="200"/>
+              </a:spcAft>
+            </a:pPr>
+            <a:r>
+              <a:rPr sz="1200" b="1" i="0">
+                <a:solidFill>
+                  <a:srgbClr val="1B7837"/>
+                </a:solidFill>
+                <a:latin typeface="Calibri"/>
+              </a:rPr>
+              <a:t>THE VERDICT</a:t>
+            </a:r>
+          </a:p>
+          <a:p>
+            <a:pPr algn="l">
+              <a:spcAft>
+                <a:spcPts val="0"/>
+              </a:spcAft>
+            </a:pPr>
+            <a:r>
+              <a:rPr sz="2400" b="1" i="0">
+                <a:solidFill>
+                  <a:srgbClr val="212121"/>
+                </a:solidFill>
+                <a:latin typeface="Calibri"/>
+              </a:rPr>
+              <a:t>Curves bend everywhere; decarbonization is rare</a:t>
+            </a:r>
+          </a:p>
+        </p:txBody>
+      </p:sp>
+      <p:sp>
+        <p:nvSpPr>
+          <p:cNvPr id="3" name="TextBox 2"/>
+          <p:cNvSpPr txBox="1"/>
+          <p:nvPr/>
+        </p:nvSpPr>
+        <p:spPr>
+          <a:xfrm>
+            <a:off x="502920" y="1188720"/>
+            <a:ext cx="11201400" cy="731520"/>
+          </a:xfrm>
+          <a:prstGeom prst="rect">
+            <a:avLst/>
+          </a:prstGeom>
+          <a:noFill/>
+        </p:spPr>
+        <p:txBody>
+          <a:bodyPr wrap="square">
+            <a:spAutoFit/>
+          </a:bodyPr>
+          <a:lstStyle/>
+          <a:p>
+            <a:pPr algn="l">
+              <a:spcAft>
+                <a:spcPts val="0"/>
+              </a:spcAft>
+            </a:pPr>
+            <a:r>
+              <a:rPr sz="1300" b="0" i="0">
+                <a:solidFill>
+                  <a:srgbClr val="555555"/>
+                </a:solidFill>
+                <a:latin typeface="Calibri"/>
+              </a:rPr>
+              <a:t>All 97 national breaks looked favorable as statistics. Checked for persistence, mechanism, and absolute emissions, they resolve into a spectrum from crisis-in-disguise to genuine transformation — and none of this heterogeneity aligns on a treaty date. The treaty question dissolves into 97 national stories, nine of which end in unambiguous decarbonization.</a:t>
+            </a:r>
+          </a:p>
+        </p:txBody>
+      </p:sp>
+      <p:sp>
+        <p:nvSpPr>
+          <p:cNvPr id="4" name="TextBox 3"/>
+          <p:cNvSpPr txBox="1"/>
+          <p:nvPr/>
+        </p:nvSpPr>
+        <p:spPr>
+          <a:xfrm>
+            <a:off x="502920" y="1956816"/>
+            <a:ext cx="11201400" cy="457200"/>
+          </a:xfrm>
+          <a:prstGeom prst="rect">
+            <a:avLst/>
+          </a:prstGeom>
+          <a:noFill/>
+        </p:spPr>
+        <p:txBody>
+          <a:bodyPr wrap="square">
+            <a:spAutoFit/>
+          </a:bodyPr>
+          <a:lstStyle/>
+          <a:p>
+            <a:pPr algn="l">
+              <a:spcAft>
+                <a:spcPts val="0"/>
+              </a:spcAft>
+            </a:pPr>
+            <a:r>
+              <a:rPr sz="1150" b="1" i="1">
+                <a:solidFill>
+                  <a:srgbClr val="3A66A5"/>
+                </a:solidFill>
+                <a:latin typeface="Calibri"/>
+              </a:rPr>
+              <a:t>How to read it: </a:t>
+            </a:r>
+            <a:r>
+              <a:rPr sz="1150" b="0" i="1">
+                <a:solidFill>
+                  <a:srgbClr val="8A8A8A"/>
+                </a:solidFill>
+                <a:latin typeface="Calibri"/>
+              </a:rPr>
+              <a:t>One block per verdict, sized by countries; only the dark-green block on the right is unambiguous decarbonization.</a:t>
+            </a:r>
+          </a:p>
+        </p:txBody>
+      </p:sp>
+      <p:pic>
+        <p:nvPicPr>
+          <p:cNvPr id="5" name="Picture 4" descr="image12.png"/>
+          <p:cNvPicPr>
+            <a:picLocks noChangeAspect="1"/>
+          </p:cNvPicPr>
+          <p:nvPr/>
+        </p:nvPicPr>
+        <p:blipFill>
+          <a:blip r:embed="rId2"/>
+          <a:stretch>
+            <a:fillRect/>
+          </a:stretch>
+        </p:blipFill>
+        <p:spPr>
+          <a:xfrm>
+            <a:off x="320040" y="2603978"/>
+            <a:ext cx="11548872" cy="3881178"/>
+          </a:xfrm>
+          <a:prstGeom prst="rect">
+            <a:avLst/>
+          </a:prstGeom>
+        </p:spPr>
+      </p:pic>
+    </p:spTree>
+  </p:cSld>
+  <p:clrMapOvr>
+    <a:masterClrMapping/>
+  </p:clrMapOvr>
+</p:sld>
+</file>
+
+<file path=ppt/slides/slide26.xml><?xml version="1.0" encoding="utf-8"?>
+<p:sld xmlns:a="http://schemas.openxmlformats.org/drawingml/2006/main" xmlns:p="http://schemas.openxmlformats.org/presentationml/2006/main" xmlns:r="http://schemas.openxmlformats.org/officeDocument/2006/relationships">
+  <p:cSld>
+    <p:spTree>
+      <p:nvGrpSpPr>
+        <p:cNvPr id="1" name=""/>
+        <p:cNvGrpSpPr/>
+        <p:nvPr/>
+      </p:nvGrpSpPr>
+      <p:grpSpPr/>
+      <p:sp>
+        <p:nvSpPr>
+          <p:cNvPr id="2" name="TextBox 1"/>
+          <p:cNvSpPr txBox="1"/>
+          <p:nvPr/>
+        </p:nvSpPr>
+        <p:spPr>
+          <a:xfrm>
+            <a:off x="502920" y="274320"/>
+            <a:ext cx="11201400" cy="914400"/>
+          </a:xfrm>
+          <a:prstGeom prst="rect">
+            <a:avLst/>
+          </a:prstGeom>
+          <a:noFill/>
+        </p:spPr>
+        <p:txBody>
+          <a:bodyPr wrap="square">
+            <a:spAutoFit/>
+          </a:bodyPr>
+          <a:lstStyle/>
+          <a:p>
+            <a:pPr algn="l">
+              <a:spcAft>
+                <a:spcPts val="200"/>
+              </a:spcAft>
+            </a:pPr>
+            <a:r>
+              <a:rPr sz="1200" b="1" i="0">
+                <a:solidFill>
+                  <a:srgbClr val="1B7837"/>
+                </a:solidFill>
+                <a:latin typeface="Calibri"/>
+              </a:rPr>
+              <a:t>THE ASK</a:t>
+            </a:r>
+          </a:p>
+          <a:p>
+            <a:pPr algn="l">
+              <a:spcAft>
+                <a:spcPts val="0"/>
+              </a:spcAft>
+            </a:pPr>
+            <a:r>
+              <a:rPr sz="2400" b="1" i="0">
+                <a:solidFill>
+                  <a:srgbClr val="212121"/>
+                </a:solidFill>
+                <a:latin typeface="Calibri"/>
+              </a:rPr>
+              <a:t>Judge Paris where its signal must appear — and check again at twenty</a:t>
+            </a:r>
+          </a:p>
+        </p:txBody>
+      </p:sp>
+      <p:sp>
+        <p:nvSpPr>
+          <p:cNvPr id="3" name="TextBox 2"/>
+          <p:cNvSpPr txBox="1"/>
+          <p:nvPr/>
+        </p:nvSpPr>
+        <p:spPr>
+          <a:xfrm>
+            <a:off x="502920" y="1554480"/>
+            <a:ext cx="10881360" cy="4389120"/>
+          </a:xfrm>
+          <a:prstGeom prst="rect">
+            <a:avLst/>
+          </a:prstGeom>
+          <a:noFill/>
+        </p:spPr>
+        <p:txBody>
+          <a:bodyPr wrap="square">
+            <a:spAutoFit/>
+          </a:bodyPr>
+          <a:lstStyle/>
+          <a:p>
+            <a:pPr algn="l">
+              <a:spcAft>
+                <a:spcPts val="1200"/>
+              </a:spcAft>
+            </a:pPr>
+            <a:r>
+              <a:rPr sz="1550" b="0" i="0">
+                <a:solidFill>
+                  <a:srgbClr val="555555"/>
+                </a:solidFill>
+                <a:latin typeface="Calibri"/>
+              </a:rPr>
+              <a:t>If the argument holds, the right test of the climate regime is not whether emissions charts bend at signing ceremonies. It is whether national intensity slopes accelerate, country by country, in ways that placebo years cannot mimic and documented policy can explain — the test the nine already pass.</a:t>
+            </a:r>
+          </a:p>
+          <a:p>
+            <a:pPr algn="l">
+              <a:spcAft>
+                <a:spcPts val="1200"/>
+              </a:spcAft>
+            </a:pPr>
+            <a:r>
+              <a:rPr sz="1550" b="0" i="0">
+                <a:solidFill>
+                  <a:srgbClr val="555555"/>
+                </a:solidFill>
+                <a:latin typeface="Calibri"/>
+              </a:rPr>
+              <a:t>On that test, Paris at ten is neither vindicated nor indicted: the world is finally moving the way an effective agreement would require, for reasons the record cannot yet separate from the technology revolution the agreement helped consolidate. Paris at twenty will be decidable — if the acceleration spreads from the fuel mix to the demand side, and from nine countries to many.</a:t>
+            </a:r>
+          </a:p>
+          <a:p>
+            <a:pPr algn="l">
+              <a:spcAft>
+                <a:spcPts val="0"/>
+              </a:spcAft>
+            </a:pPr>
+            <a:r>
+              <a:rPr sz="1550" b="1" i="0">
+                <a:solidFill>
+                  <a:srgbClr val="212121"/>
+                </a:solidFill>
+                <a:latin typeface="Calibri"/>
+              </a:rPr>
+              <a:t>The question we are putting to the field: should treaty assessment be built on intensity breakpoints and placebo discipline, rather than on emissions levels and anniversaries?</a:t>
+            </a:r>
+          </a:p>
+        </p:txBody>
+      </p:sp>
+    </p:spTree>
+  </p:cSld>
+  <p:clrMapOvr>
+    <a:masterClrMapping/>
+  </p:clrMapOvr>
+</p:sld>
+</file>
+
+<file path=ppt/slides/slide27.xml><?xml version="1.0" encoding="utf-8"?>
+<p:sld xmlns:a="http://schemas.openxmlformats.org/drawingml/2006/main" xmlns:p="http://schemas.openxmlformats.org/presentationml/2006/main" xmlns:r="http://schemas.openxmlformats.org/officeDocument/2006/relationships">
+  <p:cSld>
+    <p:spTree>
+      <p:nvGrpSpPr>
+        <p:cNvPr id="1" name=""/>
+        <p:cNvGrpSpPr/>
+        <p:nvPr/>
+      </p:nvGrpSpPr>
+      <p:grpSpPr/>
+      <p:sp>
+        <p:nvSpPr>
+          <p:cNvPr id="2" name="TextBox 1"/>
+          <p:cNvSpPr txBox="1"/>
+          <p:nvPr/>
+        </p:nvSpPr>
+        <p:spPr>
+          <a:xfrm>
+            <a:off x="822960" y="1371600"/>
+            <a:ext cx="10515600" cy="1737360"/>
+          </a:xfrm>
+          <a:prstGeom prst="rect">
+            <a:avLst/>
+          </a:prstGeom>
+          <a:noFill/>
+        </p:spPr>
+        <p:txBody>
+          <a:bodyPr wrap="square">
+            <a:spAutoFit/>
+          </a:bodyPr>
+          <a:lstStyle/>
+          <a:p>
+            <a:pPr algn="l">
+              <a:spcAft>
+                <a:spcPts val="200"/>
+              </a:spcAft>
+            </a:pPr>
+            <a:r>
+              <a:rPr sz="2700" b="1" i="0">
+                <a:solidFill>
+                  <a:srgbClr val="212121"/>
+                </a:solidFill>
+                <a:latin typeface="Calibri"/>
+              </a:rPr>
+              <a:t>Global agreements can organize climate action —</a:t>
+            </a:r>
+          </a:p>
+          <a:p>
+            <a:pPr algn="l">
+              <a:spcAft>
+                <a:spcPts val="0"/>
+              </a:spcAft>
+            </a:pPr>
+            <a:r>
+              <a:rPr sz="2700" b="1" i="0">
+                <a:solidFill>
+                  <a:srgbClr val="1B7837"/>
+                </a:solidFill>
+                <a:latin typeface="Calibri"/>
+              </a:rPr>
+              <a:t>durable national transformations bend the curve.</a:t>
+            </a:r>
+          </a:p>
+        </p:txBody>
+      </p:sp>
+      <p:sp>
+        <p:nvSpPr>
+          <p:cNvPr id="3" name="TextBox 2"/>
+          <p:cNvSpPr txBox="1"/>
+          <p:nvPr/>
+        </p:nvSpPr>
+        <p:spPr>
+          <a:xfrm>
+            <a:off x="822960" y="3200400"/>
+            <a:ext cx="10515600" cy="2651760"/>
+          </a:xfrm>
+          <a:prstGeom prst="rect">
+            <a:avLst/>
+          </a:prstGeom>
+          <a:noFill/>
+        </p:spPr>
+        <p:txBody>
+          <a:bodyPr wrap="square">
+            <a:spAutoFit/>
+          </a:bodyPr>
+          <a:lstStyle/>
           <a:p/>
           <a:p>
             <a:pPr algn="l">
               <a:spcAft>
-                <a:spcPts val="800"/>
-              </a:spcAft>
-            </a:pPr>
-            <a:r>
-              <a:rPr sz="1400" b="1" i="0">
+                <a:spcPts val="900"/>
+              </a:spcAft>
+            </a:pPr>
+            <a:r>
+              <a:rPr sz="1450" b="1" i="0">
                 <a:solidFill>
                   <a:srgbClr val="1B7837"/>
                 </a:solidFill>
@@ -8075,7 +9598,7 @@
               <a:t>—  </a:t>
             </a:r>
             <a:r>
-              <a:rPr sz="1400" b="0" i="0">
+              <a:rPr sz="1450" b="0" i="0">
                 <a:solidFill>
                   <a:srgbClr val="555555"/>
                 </a:solidFill>
@@ -8087,11 +9610,11 @@
           <a:p>
             <a:pPr algn="l">
               <a:spcAft>
-                <a:spcPts val="800"/>
-              </a:spcAft>
-            </a:pPr>
-            <a:r>
-              <a:rPr sz="1400" b="1" i="0">
+                <a:spcPts val="900"/>
+              </a:spcAft>
+            </a:pPr>
+            <a:r>
+              <a:rPr sz="1450" b="1" i="0">
                 <a:solidFill>
                   <a:srgbClr val="1B7837"/>
                 </a:solidFill>
@@ -8100,23 +9623,23 @@
               <a:t>—  </a:t>
             </a:r>
             <a:r>
-              <a:rPr sz="1400" b="0" i="0">
+              <a:rPr sz="1450" b="0" i="0">
                 <a:solidFill>
                   <a:srgbClr val="555555"/>
                 </a:solidFill>
                 <a:latin typeface="Calibri"/>
               </a:rPr>
-              <a:t>Treaty-adjacent signals exist — especially around Rio — but few survive placebo scrutiny, and national transitions scatter across five decades.</a:t>
-            </a:r>
-          </a:p>
-          <a:p>
-            <a:pPr algn="l">
-              <a:spcAft>
-                <a:spcPts val="800"/>
-              </a:spcAft>
-            </a:pPr>
-            <a:r>
-              <a:rPr sz="1400" b="1" i="0">
+              <a:t>Favorable bends often reflect recession, disruption, deindustrialization, or offshoring; intensity gains are routinely overwhelmed by growth.</a:t>
+            </a:r>
+          </a:p>
+          <a:p>
+            <a:pPr algn="l">
+              <a:spcAft>
+                <a:spcPts val="900"/>
+              </a:spcAft>
+            </a:pPr>
+            <a:r>
+              <a:rPr sz="1450" b="1" i="0">
                 <a:solidFill>
                   <a:srgbClr val="1B7837"/>
                 </a:solidFill>
@@ -8125,32 +9648,7 @@
               <a:t>—  </a:t>
             </a:r>
             <a:r>
-              <a:rPr sz="1400" b="0" i="0">
-                <a:solidFill>
-                  <a:srgbClr val="555555"/>
-                </a:solidFill>
-                <a:latin typeface="Calibri"/>
-              </a:rPr>
-              <a:t>Favorable bends often reflect recession, disruption, deindustrialization, or offshoring; intensity gains are routinely overwhelmed by growth.</a:t>
-            </a:r>
-          </a:p>
-          <a:p>
-            <a:pPr algn="l">
-              <a:spcAft>
-                <a:spcPts val="800"/>
-              </a:spcAft>
-            </a:pPr>
-            <a:r>
-              <a:rPr sz="1400" b="1" i="0">
-                <a:solidFill>
-                  <a:srgbClr val="1B7837"/>
-                </a:solidFill>
-                <a:latin typeface="Calibri"/>
-              </a:rPr>
-              <a:t>—  </a:t>
-            </a:r>
-            <a:r>
-              <a:rPr sz="1400" b="0" i="0">
+              <a:rPr sz="1450" b="0" i="0">
                 <a:solidFill>
                   <a:srgbClr val="555555"/>
                 </a:solidFill>
@@ -8248,11 +9746,11 @@
             <a:r>
               <a:rPr sz="1200" b="1" i="0">
                 <a:solidFill>
-                  <a:srgbClr val="3A66A5"/>
-                </a:solidFill>
-                <a:latin typeface="Calibri"/>
-              </a:rPr>
-              <a:t>HOW WE MEASURE IT</a:t>
+                  <a:srgbClr val="1B7837"/>
+                </a:solidFill>
+                <a:latin typeface="Calibri"/>
+              </a:rPr>
+              <a:t>THE ARGUMENT</a:t>
             </a:r>
           </a:p>
           <a:p>
@@ -8268,7 +9766,7 @@
                 </a:solidFill>
                 <a:latin typeface="Calibri"/>
               </a:rPr>
-              <a:t>Finding the bend: two straight lines and a kink</a:t>
+              <a:t>Four acts</a:t>
             </a:r>
           </a:p>
         </p:txBody>
@@ -8281,8 +9779,8 @@
         </p:nvSpPr>
         <p:spPr>
           <a:xfrm>
-            <a:off x="502920" y="1417320"/>
-            <a:ext cx="5577840" cy="5029200"/>
+            <a:off x="502920" y="1554480"/>
+            <a:ext cx="2697480" cy="4389120"/>
           </a:xfrm>
           <a:prstGeom prst="rect">
             <a:avLst/>
@@ -8297,6 +9795,22 @@
           <a:p>
             <a:pPr algn="l">
               <a:spcAft>
+                <a:spcPts val="600"/>
+              </a:spcAft>
+            </a:pPr>
+            <a:r>
+              <a:rPr sz="3800" b="1" i="0">
+                <a:solidFill>
+                  <a:srgbClr val="1B7837"/>
+                </a:solidFill>
+                <a:latin typeface="Calibri"/>
+              </a:rPr>
+              <a:t>I</a:t>
+            </a:r>
+          </a:p>
+          <a:p>
+            <a:pPr algn="l">
+              <a:spcAft>
                 <a:spcPts val="800"/>
               </a:spcAft>
             </a:pPr>
@@ -8307,114 +9821,23 @@
                 </a:solidFill>
                 <a:latin typeface="Calibri"/>
               </a:rPr>
-              <a:t>Three steps, no assumptions about treaty years</a:t>
-            </a:r>
-          </a:p>
-          <a:p>
-            <a:pPr algn="l">
-              <a:spcAft>
-                <a:spcPts val="800"/>
-              </a:spcAft>
-            </a:pPr>
-            <a:r>
-              <a:rPr sz="1350" b="1" i="0">
-                <a:solidFill>
-                  <a:srgbClr val="3A66A5"/>
-                </a:solidFill>
-                <a:latin typeface="Calibri"/>
-              </a:rPr>
-              <a:t>1.  </a:t>
-            </a:r>
-            <a:r>
-              <a:rPr sz="1350" b="0" i="0">
+              <a:t>Did Paris bend the global curve?</a:t>
+            </a:r>
+          </a:p>
+          <a:p>
+            <a:pPr algn="l">
+              <a:spcAft>
+                <a:spcPts val="0"/>
+              </a:spcAft>
+            </a:pPr>
+            <a:r>
+              <a:rPr sz="1250" b="0" i="0">
                 <a:solidFill>
                   <a:srgbClr val="555555"/>
                 </a:solidFill>
                 <a:latin typeface="Calibri"/>
               </a:rPr>
-              <a:t>Plot each series on a log scale, so a straight line means a steady percentage change per year.</a:t>
-            </a:r>
-          </a:p>
-          <a:p>
-            <a:pPr algn="l">
-              <a:spcAft>
-                <a:spcPts val="800"/>
-              </a:spcAft>
-            </a:pPr>
-            <a:r>
-              <a:rPr sz="1350" b="1" i="0">
-                <a:solidFill>
-                  <a:srgbClr val="3A66A5"/>
-                </a:solidFill>
-                <a:latin typeface="Calibri"/>
-              </a:rPr>
-              <a:t>2.  </a:t>
-            </a:r>
-            <a:r>
-              <a:rPr sz="1350" b="0" i="0">
-                <a:solidFill>
-                  <a:srgbClr val="555555"/>
-                </a:solidFill>
-                <a:latin typeface="Calibri"/>
-              </a:rPr>
-              <a:t>Fit two straight lines that meet at a kink — the 'breakpoint'. Try every possible kink year and keep the one that fits the data best. That year is the estimate of when the trend changed.</a:t>
-            </a:r>
-          </a:p>
-          <a:p>
-            <a:pPr algn="l">
-              <a:spcAft>
-                <a:spcPts val="1200"/>
-              </a:spcAft>
-            </a:pPr>
-            <a:r>
-              <a:rPr sz="1350" b="1" i="0">
-                <a:solidFill>
-                  <a:srgbClr val="3A66A5"/>
-                </a:solidFill>
-                <a:latin typeface="Calibri"/>
-              </a:rPr>
-              <a:t>3.  </a:t>
-            </a:r>
-            <a:r>
-              <a:rPr sz="1350" b="0" i="0">
-                <a:solidFill>
-                  <a:srgbClr val="555555"/>
-                </a:solidFill>
-                <a:latin typeface="Calibri"/>
-              </a:rPr>
-              <a:t>Stress-test the date: re-estimate it on many statistically reshuffled versions of the series. If the estimated year barely moves, the break is credible; if it jumps around, we say so.</a:t>
-            </a:r>
-          </a:p>
-          <a:p>
-            <a:pPr algn="l">
-              <a:spcAft>
-                <a:spcPts val="800"/>
-              </a:spcAft>
-            </a:pPr>
-            <a:r>
-              <a:rPr sz="1350" b="1" i="0">
-                <a:solidFill>
-                  <a:srgbClr val="212121"/>
-                </a:solidFill>
-                <a:latin typeface="Calibri"/>
-              </a:rPr>
-              <a:t>A breakpoint tells us when a trend changed — never, by itself, why. Historical evidence answers that separately.</a:t>
-            </a:r>
-          </a:p>
-          <a:p>
-            <a:pPr algn="l">
-              <a:spcAft>
-                <a:spcPts val="0"/>
-              </a:spcAft>
-            </a:pPr>
-            <a:r>
-              <a:rPr sz="1050" b="0" i="1">
-                <a:solidFill>
-                  <a:srgbClr val="8A8A8A"/>
-                </a:solidFill>
-                <a:latin typeface="Calibri"/>
-              </a:rPr>
-              <a:t>(Formally: y(t) = a + b·t + d·max(t−k, 0); slope b before year k, b+d after. Uncertainty via moving-block bootstrap; autocorrelation-robust standard errors for fixed-date tests.)</a:t>
+              <a:t>The global bends predate the climate regime; a new acceleration is real but began before 2015. The record shows the acceleration — not yet its author.</a:t>
             </a:r>
           </a:p>
         </p:txBody>
@@ -8427,8 +9850,8 @@
         </p:nvSpPr>
         <p:spPr>
           <a:xfrm>
-            <a:off x="6400800" y="1417320"/>
-            <a:ext cx="5303520" cy="5029200"/>
+            <a:off x="3355848" y="1554480"/>
+            <a:ext cx="2697480" cy="4389120"/>
           </a:xfrm>
           <a:prstGeom prst="rect">
             <a:avLst/>
@@ -8443,6 +9866,22 @@
           <a:p>
             <a:pPr algn="l">
               <a:spcAft>
+                <a:spcPts val="600"/>
+              </a:spcAft>
+            </a:pPr>
+            <a:r>
+              <a:rPr sz="3800" b="1" i="0">
+                <a:solidFill>
+                  <a:srgbClr val="1B7837"/>
+                </a:solidFill>
+                <a:latin typeface="Calibri"/>
+              </a:rPr>
+              <a:t>II</a:t>
+            </a:r>
+          </a:p>
+          <a:p>
+            <a:pPr algn="l">
+              <a:spcAft>
                 <a:spcPts val="800"/>
               </a:spcAft>
             </a:pPr>
@@ -8453,7 +9892,62 @@
                 </a:solidFill>
                 <a:latin typeface="Calibri"/>
               </a:rPr>
-              <a:t>Two doors for any improvement</a:t>
+              <a:t>What bends national curves?</a:t>
+            </a:r>
+          </a:p>
+          <a:p>
+            <a:pPr algn="l">
+              <a:spcAft>
+                <a:spcPts val="0"/>
+              </a:spcAft>
+            </a:pPr>
+            <a:r>
+              <a:rPr sz="1250" b="0" i="0">
+                <a:solidFill>
+                  <a:srgbClr val="555555"/>
+                </a:solidFill>
+                <a:latin typeface="Calibri"/>
+              </a:rPr>
+              <a:t>97 eligible breaks scatter across five decades and track economic history. Historical mechanisms, coded against documents, do the explaining.</a:t>
+            </a:r>
+          </a:p>
+        </p:txBody>
+      </p:sp>
+      <p:sp>
+        <p:nvSpPr>
+          <p:cNvPr id="5" name="TextBox 4"/>
+          <p:cNvSpPr txBox="1"/>
+          <p:nvPr/>
+        </p:nvSpPr>
+        <p:spPr>
+          <a:xfrm>
+            <a:off x="6208776" y="1554480"/>
+            <a:ext cx="2697480" cy="4389120"/>
+          </a:xfrm>
+          <a:prstGeom prst="rect">
+            <a:avLst/>
+          </a:prstGeom>
+          <a:noFill/>
+        </p:spPr>
+        <p:txBody>
+          <a:bodyPr wrap="square">
+            <a:spAutoFit/>
+          </a:bodyPr>
+          <a:lstStyle/>
+          <a:p>
+            <a:pPr algn="l">
+              <a:spcAft>
+                <a:spcPts val="600"/>
+              </a:spcAft>
+            </a:pPr>
+            <a:r>
+              <a:rPr sz="3800" b="1" i="0">
+                <a:solidFill>
+                  <a:srgbClr val="1B7837"/>
+                </a:solidFill>
+                <a:latin typeface="Calibri"/>
+              </a:rPr>
+              <a:t>III</a:t>
             </a:r>
           </a:p>
           <a:p>
@@ -8463,13 +9957,68 @@
               </a:spcAft>
             </a:pPr>
             <a:r>
-              <a:rPr sz="1350" b="0" i="0">
+              <a:rPr sz="1550" b="1" i="0">
+                <a:solidFill>
+                  <a:srgbClr val="212121"/>
+                </a:solidFill>
+                <a:latin typeface="Calibri"/>
+              </a:rPr>
+              <a:t>Did the bends count?</a:t>
+            </a:r>
+          </a:p>
+          <a:p>
+            <a:pPr algn="l">
+              <a:spcAft>
+                <a:spcPts val="0"/>
+              </a:spcAft>
+            </a:pPr>
+            <a:r>
+              <a:rPr sz="1250" b="0" i="0">
                 <a:solidFill>
                   <a:srgbClr val="555555"/>
                 </a:solidFill>
                 <a:latin typeface="Calibri"/>
               </a:rPr>
-              <a:t>Carbon intensity — CO2 per dollar of output — can only improve through one of two doors:</a:t>
+              <a:t>A favorable statistic is not a transition. Four tests — direction, persistence, absolute CO2, mechanism — leave nine unambiguous successes.</a:t>
+            </a:r>
+          </a:p>
+        </p:txBody>
+      </p:sp>
+      <p:sp>
+        <p:nvSpPr>
+          <p:cNvPr id="6" name="TextBox 5"/>
+          <p:cNvSpPr txBox="1"/>
+          <p:nvPr/>
+        </p:nvSpPr>
+        <p:spPr>
+          <a:xfrm>
+            <a:off x="9061704" y="1554480"/>
+            <a:ext cx="2697480" cy="4389120"/>
+          </a:xfrm>
+          <a:prstGeom prst="rect">
+            <a:avLst/>
+          </a:prstGeom>
+          <a:noFill/>
+        </p:spPr>
+        <p:txBody>
+          <a:bodyPr wrap="square">
+            <a:spAutoFit/>
+          </a:bodyPr>
+          <a:lstStyle/>
+          <a:p>
+            <a:pPr algn="l">
+              <a:spcAft>
+                <a:spcPts val="600"/>
+              </a:spcAft>
+            </a:pPr>
+            <a:r>
+              <a:rPr sz="3800" b="1" i="0">
+                <a:solidFill>
+                  <a:srgbClr val="1B7837"/>
+                </a:solidFill>
+                <a:latin typeface="Calibri"/>
+              </a:rPr>
+              <a:t>IV</a:t>
             </a:r>
           </a:p>
           <a:p>
@@ -8479,63 +10028,29 @@
               </a:spcAft>
             </a:pPr>
             <a:r>
-              <a:rPr sz="1350" b="1" i="0">
-                <a:solidFill>
-                  <a:srgbClr val="1B7837"/>
-                </a:solidFill>
-                <a:latin typeface="Calibri"/>
-              </a:rPr>
-              <a:t>Cleaner energy (C/E):  </a:t>
-            </a:r>
-            <a:r>
-              <a:rPr sz="1350" b="0" i="0">
+              <a:rPr sz="1550" b="1" i="0">
+                <a:solidFill>
+                  <a:srgbClr val="212121"/>
+                </a:solidFill>
+                <a:latin typeface="Calibri"/>
+              </a:rPr>
+              <a:t>Can we trust the story?</a:t>
+            </a:r>
+          </a:p>
+          <a:p>
+            <a:pPr algn="l">
+              <a:spcAft>
+                <a:spcPts val="0"/>
+              </a:spcAft>
+            </a:pPr>
+            <a:r>
+              <a:rPr sz="1250" b="0" i="0">
                 <a:solidFill>
                   <a:srgbClr val="555555"/>
                 </a:solidFill>
                 <a:latin typeface="Calibri"/>
               </a:rPr>
-              <a:t>less CO2 per unit of energy — fuel switching, nuclear, renewables, the power system.</a:t>
-            </a:r>
-          </a:p>
-          <a:p>
-            <a:pPr algn="l">
-              <a:spcAft>
-                <a:spcPts val="1000"/>
-              </a:spcAft>
-            </a:pPr>
-            <a:r>
-              <a:rPr sz="1350" b="1" i="0">
-                <a:solidFill>
-                  <a:srgbClr val="C77F00"/>
-                </a:solidFill>
-                <a:latin typeface="Calibri"/>
-              </a:rPr>
-              <a:t>Less energy per dollar (E/GDP):  </a:t>
-            </a:r>
-            <a:r>
-              <a:rPr sz="1350" b="0" i="0">
-                <a:solidFill>
-                  <a:srgbClr val="555555"/>
-                </a:solidFill>
-                <a:latin typeface="Calibri"/>
-              </a:rPr>
-              <a:t>efficiency, and changes in what the economy makes — industry versus services.</a:t>
-            </a:r>
-          </a:p>
-          <a:p>
-            <a:pPr algn="l">
-              <a:spcAft>
-                <a:spcPts val="0"/>
-              </a:spcAft>
-            </a:pPr>
-            <a:r>
-              <a:rPr sz="1350" b="0" i="0">
-                <a:solidFill>
-                  <a:srgbClr val="212121"/>
-                </a:solidFill>
-                <a:latin typeface="Calibri"/>
-              </a:rPr>
-              <a:t>We estimate the bend in the overall series and in both doors, for the world and for every country, with one identical procedure. Which door moved tells us what kind of transition happened — a fuel-mix bend points to energy policy or markets; an efficiency bend often points to economic change.</a:t>
+              <a:t>Event timing beats chance; external raters agree; accounting choices bound the claims; and 22 unresolved cases stay unresolved.</a:t>
             </a:r>
           </a:p>
         </p:txBody>
@@ -8592,7 +10107,7 @@
                 </a:solidFill>
                 <a:latin typeface="Calibri"/>
               </a:rPr>
-              <a:t>HOW WE MEASURE IT</a:t>
+              <a:t>THE INSTRUMENT</a:t>
             </a:r>
           </a:p>
           <a:p>
@@ -8608,7 +10123,7 @@
                 </a:solidFill>
                 <a:latin typeface="Calibri"/>
               </a:rPr>
-              <a:t>Which breaks do we trust — and when does a treaty get credit?</a:t>
+              <a:t>Two straight lines and a kink</a:t>
             </a:r>
           </a:p>
         </p:txBody>
@@ -8622,7 +10137,7 @@
         <p:spPr>
           <a:xfrm>
             <a:off x="502920" y="1417320"/>
-            <a:ext cx="5029200" cy="5029200"/>
+            <a:ext cx="5577840" cy="5029200"/>
           </a:xfrm>
           <a:prstGeom prst="rect">
             <a:avLst/>
@@ -8637,34 +10152,9 @@
           <a:p>
             <a:pPr algn="l">
               <a:spcAft>
-                <a:spcPts val="800"/>
-              </a:spcAft>
-            </a:pPr>
-            <a:r>
-              <a:rPr sz="1550" b="1" i="0">
-                <a:solidFill>
-                  <a:srgbClr val="212121"/>
-                </a:solidFill>
-                <a:latin typeface="Calibri"/>
-              </a:rPr>
-              <a:t>A country's break counts only if:</a:t>
-            </a:r>
-          </a:p>
-          <a:p>
-            <a:pPr algn="l">
-              <a:spcAft>
-                <a:spcPts val="700"/>
-              </a:spcAft>
-            </a:pPr>
-            <a:r>
-              <a:rPr sz="1350" b="1" i="0">
-                <a:solidFill>
-                  <a:srgbClr val="1B7837"/>
-                </a:solidFill>
-                <a:latin typeface="Calibri"/>
-              </a:rPr>
-              <a:t>•  </a:t>
-            </a:r>
+                <a:spcPts val="1200"/>
+              </a:spcAft>
+            </a:pPr>
             <a:r>
               <a:rPr sz="1350" b="0" i="0">
                 <a:solidFill>
@@ -8672,24 +10162,15 @@
                 </a:solidFill>
                 <a:latin typeface="Calibri"/>
               </a:rPr>
-              <a:t>the series is long enough (40+ years, with at least 10 on each side of the break);</a:t>
-            </a:r>
-          </a:p>
-          <a:p>
-            <a:pPr algn="l">
-              <a:spcAft>
-                <a:spcPts val="700"/>
-              </a:spcAft>
-            </a:pPr>
-            <a:r>
-              <a:rPr sz="1350" b="1" i="0">
-                <a:solidFill>
-                  <a:srgbClr val="1B7837"/>
-                </a:solidFill>
-                <a:latin typeface="Calibri"/>
-              </a:rPr>
-              <a:t>•  </a:t>
-            </a:r>
+              <a:t>Every series is plotted in logs, so a straight line means a steady percentage change per year. We then fit two straight lines that meet at a kink, trying every admissible year and keeping the one that fits best. That year — the breakpoint — is the data's own estimate of when the trend changed, chosen with no reference to any treaty.</a:t>
+            </a:r>
+          </a:p>
+          <a:p>
+            <a:pPr algn="l">
+              <a:spcAft>
+                <a:spcPts val="1200"/>
+              </a:spcAft>
+            </a:pPr>
             <a:r>
               <a:rPr sz="1350" b="0" i="0">
                 <a:solidFill>
@@ -8697,57 +10178,7 @@
                 </a:solidFill>
                 <a:latin typeface="Calibri"/>
               </a:rPr>
-              <a:t>the two-line model fits clearly better than a single straight line;</a:t>
-            </a:r>
-          </a:p>
-          <a:p>
-            <a:pPr algn="l">
-              <a:spcAft>
-                <a:spcPts val="700"/>
-              </a:spcAft>
-            </a:pPr>
-            <a:r>
-              <a:rPr sz="1350" b="1" i="0">
-                <a:solidFill>
-                  <a:srgbClr val="1B7837"/>
-                </a:solidFill>
-                <a:latin typeface="Calibri"/>
-              </a:rPr>
-              <a:t>•  </a:t>
-            </a:r>
-            <a:r>
-              <a:rPr sz="1350" b="0" i="0">
-                <a:solidFill>
-                  <a:srgbClr val="555555"/>
-                </a:solidFill>
-                <a:latin typeface="Calibri"/>
-              </a:rPr>
-              <a:t>the estimated year stays put when the data are reshuffled; and</a:t>
-            </a:r>
-          </a:p>
-          <a:p>
-            <a:pPr algn="l">
-              <a:spcAft>
-                <a:spcPts val="700"/>
-              </a:spcAft>
-            </a:pPr>
-            <a:r>
-              <a:rPr sz="1350" b="1" i="0">
-                <a:solidFill>
-                  <a:srgbClr val="1B7837"/>
-                </a:solidFill>
-                <a:latin typeface="Calibri"/>
-              </a:rPr>
-              <a:t>•  </a:t>
-            </a:r>
-            <a:r>
-              <a:rPr sz="1350" b="0" i="0">
-                <a:solidFill>
-                  <a:srgbClr val="555555"/>
-                </a:solidFill>
-                <a:latin typeface="Calibri"/>
-              </a:rPr>
-              <a:t>the change in slope is big enough to matter, not a statistical whisker.</a:t>
+              <a:t>The date is then stress-tested: re-estimated on many statistically reshuffled versions of the series. A break whose year barely moves is credible; one that jumps around is reported as unstable. And throughout, a breakpoint answers only when a trend changed — never, by itself, why. Historical evidence answers that separately.</a:t>
             </a:r>
           </a:p>
           <a:p>
@@ -8757,13 +10188,13 @@
               </a:spcAft>
             </a:pPr>
             <a:r>
-              <a:rPr sz="1350" b="0" i="0">
-                <a:solidFill>
-                  <a:srgbClr val="212121"/>
-                </a:solidFill>
-                <a:latin typeface="Calibri"/>
-              </a:rPr>
-              <a:t>204 jurisdictions → 158 with estimable series → 97 countries with a break that passes every test. Breaks close together in time are read as one national transition: 107 episodes in all.</a:t>
+              <a:rPr sz="1050" b="0" i="1">
+                <a:solidFill>
+                  <a:srgbClr val="8A8A8A"/>
+                </a:solidFill>
+                <a:latin typeface="Calibri"/>
+              </a:rPr>
+              <a:t>(Formally: y(t) = a + b·t + d·max(t−k, 0). Uncertainty via moving-block bootstrap; autocorrelation-robust standard errors for fixed-date tests; BIC for model evidence.)</a:t>
             </a:r>
           </a:p>
         </p:txBody>
@@ -8776,8 +10207,8 @@
         </p:nvSpPr>
         <p:spPr>
           <a:xfrm>
-            <a:off x="5806440" y="1417320"/>
-            <a:ext cx="5897880" cy="5029200"/>
+            <a:off x="6400800" y="1417320"/>
+            <a:ext cx="5303520" cy="5029200"/>
           </a:xfrm>
           <a:prstGeom prst="rect">
             <a:avLst/>
@@ -8792,34 +10223,25 @@
           <a:p>
             <a:pPr algn="l">
               <a:spcAft>
-                <a:spcPts val="800"/>
-              </a:spcAft>
-            </a:pPr>
-            <a:r>
-              <a:rPr sz="1550" b="1" i="0">
+                <a:spcPts val="600"/>
+              </a:spcAft>
+            </a:pPr>
+            <a:r>
+              <a:rPr sz="1500" b="1" i="0">
                 <a:solidFill>
                   <a:srgbClr val="212121"/>
                 </a:solidFill>
                 <a:latin typeface="Calibri"/>
               </a:rPr>
-              <a:t>A treaty year gets credit only if all five hold:</a:t>
-            </a:r>
-          </a:p>
-          <a:p>
-            <a:pPr algn="l">
-              <a:spcAft>
-                <a:spcPts val="700"/>
-              </a:spcAft>
-            </a:pPr>
-            <a:r>
-              <a:rPr sz="1350" b="1" i="0">
-                <a:solidFill>
-                  <a:srgbClr val="3A66A5"/>
-                </a:solidFill>
-                <a:latin typeface="Calibri"/>
-              </a:rPr>
-              <a:t>1.  </a:t>
-            </a:r>
+              <a:t>Two doors for any improvement</a:t>
+            </a:r>
+          </a:p>
+          <a:p>
+            <a:pPr algn="l">
+              <a:spcAft>
+                <a:spcPts val="1000"/>
+              </a:spcAft>
+            </a:pPr>
             <a:r>
               <a:rPr sz="1350" b="0" i="0">
                 <a:solidFill>
@@ -8827,123 +10249,23 @@
                 </a:solidFill>
                 <a:latin typeface="Calibri"/>
               </a:rPr>
-              <a:t>the slope genuinely changes at the treaty year (by a robust statistical test);</a:t>
-            </a:r>
-          </a:p>
-          <a:p>
-            <a:pPr algn="l">
-              <a:spcAft>
-                <a:spcPts val="700"/>
-              </a:spcAft>
-            </a:pPr>
-            <a:r>
-              <a:rPr sz="1350" b="1" i="0">
-                <a:solidFill>
-                  <a:srgbClr val="3A66A5"/>
-                </a:solidFill>
-                <a:latin typeface="Calibri"/>
-              </a:rPr>
-              <a:t>2.  </a:t>
-            </a:r>
+              <a:t>Carbon intensity — CO2 per dollar of output — can only improve through one of two doors: cleaner energy (less CO2 per unit of energy: fuel switching, nuclear, renewables, the power system), or less energy per dollar (efficiency, and changes in what the economy makes).</a:t>
+            </a:r>
+          </a:p>
+          <a:p>
+            <a:pPr algn="l">
+              <a:spcAft>
+                <a:spcPts val="0"/>
+              </a:spcAft>
+            </a:pPr>
             <a:r>
               <a:rPr sz="1350" b="0" i="0">
                 <a:solidFill>
-                  <a:srgbClr val="555555"/>
-                </a:solidFill>
-                <a:latin typeface="Calibri"/>
-              </a:rPr>
-              <a:t>the treaty year beats nearly all nearby 'placebo' years — because when a trend curves gently, almost any year looks significant;</a:t>
-            </a:r>
-          </a:p>
-          <a:p>
-            <a:pPr algn="l">
-              <a:spcAft>
-                <a:spcPts val="700"/>
-              </a:spcAft>
-            </a:pPr>
-            <a:r>
-              <a:rPr sz="1350" b="1" i="0">
-                <a:solidFill>
-                  <a:srgbClr val="3A66A5"/>
-                </a:solidFill>
-                <a:latin typeface="Calibri"/>
-              </a:rPr>
-              <a:t>3.  </a:t>
-            </a:r>
-            <a:r>
-              <a:rPr sz="1350" b="0" i="0">
-                <a:solidFill>
-                  <a:srgbClr val="555555"/>
-                </a:solidFill>
-                <a:latin typeface="Calibri"/>
-              </a:rPr>
-              <a:t>the best-fitting year is within three years of the treaty;</a:t>
-            </a:r>
-          </a:p>
-          <a:p>
-            <a:pPr algn="l">
-              <a:spcAft>
-                <a:spcPts val="700"/>
-              </a:spcAft>
-            </a:pPr>
-            <a:r>
-              <a:rPr sz="1350" b="1" i="0">
-                <a:solidFill>
-                  <a:srgbClr val="3A66A5"/>
-                </a:solidFill>
-                <a:latin typeface="Calibri"/>
-              </a:rPr>
-              <a:t>4.  </a:t>
-            </a:r>
-            <a:r>
-              <a:rPr sz="1350" b="0" i="0">
-                <a:solidFill>
-                  <a:srgbClr val="555555"/>
-                </a:solidFill>
-                <a:latin typeface="Calibri"/>
-              </a:rPr>
-              <a:t>the data-chosen break agrees with it; and</a:t>
-            </a:r>
-          </a:p>
-          <a:p>
-            <a:pPr algn="l">
-              <a:spcAft>
-                <a:spcPts val="700"/>
-              </a:spcAft>
-            </a:pPr>
-            <a:r>
-              <a:rPr sz="1350" b="1" i="0">
-                <a:solidFill>
-                  <a:srgbClr val="3A66A5"/>
-                </a:solidFill>
-                <a:latin typeface="Calibri"/>
-              </a:rPr>
-              <a:t>5.  </a:t>
-            </a:r>
-            <a:r>
-              <a:rPr sz="1350" b="0" i="0">
-                <a:solidFill>
-                  <a:srgbClr val="555555"/>
-                </a:solidFill>
-                <a:latin typeface="Calibri"/>
-              </a:rPr>
-              <a:t>there is a documented domestic policy story that fits.</a:t>
-            </a:r>
-          </a:p>
-          <a:p>
-            <a:pPr algn="l">
-              <a:spcAft>
-                <a:spcPts val="0"/>
-              </a:spcAft>
-            </a:pPr>
-            <a:r>
-              <a:rPr sz="1350" b="1" i="0">
-                <a:solidFill>
                   <a:srgbClr val="212121"/>
                 </a:solidFill>
                 <a:latin typeface="Calibri"/>
               </a:rPr>
-              <a:t>This ladder is deliberately hard to climb. Many series pass step 1; few pass them all. We hold Paris itself to the same standard.</a:t>
+              <a:t>We estimate the bend in the overall series and behind both doors, for the world and for every country, with one identical procedure. Which door moved constrains what happened: a fuel-mix bend points to energy policy or markets; an efficiency bend, as often as not, points to economic change.</a:t>
             </a:r>
           </a:p>
         </p:txBody>
@@ -8996,11 +10318,11 @@
             <a:r>
               <a:rPr sz="1200" b="1" i="0">
                 <a:solidFill>
-                  <a:srgbClr val="1B7837"/>
-                </a:solidFill>
-                <a:latin typeface="Calibri"/>
-              </a:rPr>
-              <a:t>THE ARGUMENT</a:t>
+                  <a:srgbClr val="3A66A5"/>
+                </a:solidFill>
+                <a:latin typeface="Calibri"/>
+              </a:rPr>
+              <a:t>THE RULES OF EVIDENCE</a:t>
             </a:r>
           </a:p>
           <a:p>
@@ -9016,7 +10338,7 @@
                 </a:solidFill>
                 <a:latin typeface="Calibri"/>
               </a:rPr>
-              <a:t>Four acts</a:t>
+              <a:t>Most candidate breaks fail; treaty years face a harder test still</a:t>
             </a:r>
           </a:p>
         </p:txBody>
@@ -9029,8 +10351,8 @@
         </p:nvSpPr>
         <p:spPr>
           <a:xfrm>
-            <a:off x="502920" y="1600200"/>
-            <a:ext cx="2697480" cy="4206240"/>
+            <a:off x="502920" y="1417320"/>
+            <a:ext cx="5394960" cy="5029200"/>
           </a:xfrm>
           <a:prstGeom prst="rect">
             <a:avLst/>
@@ -9049,29 +10371,29 @@
               </a:spcAft>
             </a:pPr>
             <a:r>
-              <a:rPr sz="4000" b="1" i="0">
-                <a:solidFill>
-                  <a:srgbClr val="1B7837"/>
-                </a:solidFill>
-                <a:latin typeface="Calibri"/>
-              </a:rPr>
-              <a:t>I</a:t>
-            </a:r>
-          </a:p>
-          <a:p>
-            <a:pPr algn="l">
-              <a:spcAft>
-                <a:spcPts val="800"/>
-              </a:spcAft>
-            </a:pPr>
-            <a:r>
-              <a:rPr sz="1600" b="1" i="0">
+              <a:rPr sz="1500" b="1" i="0">
                 <a:solidFill>
                   <a:srgbClr val="212121"/>
                 </a:solidFill>
                 <a:latin typeface="Calibri"/>
               </a:rPr>
-              <a:t>Is the global bend Paris?</a:t>
+              <a:t>Which breaks count</a:t>
+            </a:r>
+          </a:p>
+          <a:p>
+            <a:pPr algn="l">
+              <a:spcAft>
+                <a:spcPts val="1000"/>
+              </a:spcAft>
+            </a:pPr>
+            <a:r>
+              <a:rPr sz="1300" b="0" i="0">
+                <a:solidFill>
+                  <a:srgbClr val="555555"/>
+                </a:solidFill>
+                <a:latin typeface="Calibri"/>
+              </a:rPr>
+              <a:t>A country enters the analysis only when its series is long enough to be serious — forty-plus years, with at least ten on each side of the break — and only when the two-line model beats a single straight line decisively, the estimated year stays put under reshuffling, and the change in slope is large enough to matter rather than a statistical whisker.</a:t>
             </a:r>
           </a:p>
           <a:p>
@@ -9081,13 +10403,13 @@
               </a:spcAft>
             </a:pPr>
             <a:r>
-              <a:rPr sz="1250" b="0" i="0">
-                <a:solidFill>
-                  <a:srgbClr val="555555"/>
-                </a:solidFill>
-                <a:latin typeface="Calibri"/>
-              </a:rPr>
-              <a:t>Global curves bent in the 1970s; since ~2013 they are bending faster. The acceleration is real — its attribution is not yet identified.</a:t>
+              <a:rPr sz="1300" b="0" i="0">
+                <a:solidFill>
+                  <a:srgbClr val="212121"/>
+                </a:solidFill>
+                <a:latin typeface="Calibri"/>
+              </a:rPr>
+              <a:t>Those rules take 204 jurisdictions down to 158 with estimable series, and to 97 countries with a break that passes every test. Breaks close together in time are read as one national transition — 107 episodes in all, so Bangladesh's cluster of 1990s breaks is one story, not three.</a:t>
             </a:r>
           </a:p>
         </p:txBody>
@@ -9100,8 +10422,8 @@
         </p:nvSpPr>
         <p:spPr>
           <a:xfrm>
-            <a:off x="3355848" y="1600200"/>
-            <a:ext cx="2697480" cy="4206240"/>
+            <a:off x="6263640" y="1417320"/>
+            <a:ext cx="5440680" cy="5029200"/>
           </a:xfrm>
           <a:prstGeom prst="rect">
             <a:avLst/>
@@ -9120,29 +10442,29 @@
               </a:spcAft>
             </a:pPr>
             <a:r>
-              <a:rPr sz="4000" b="1" i="0">
-                <a:solidFill>
-                  <a:srgbClr val="1B7837"/>
-                </a:solidFill>
-                <a:latin typeface="Calibri"/>
-              </a:rPr>
-              <a:t>II</a:t>
-            </a:r>
-          </a:p>
-          <a:p>
-            <a:pPr algn="l">
-              <a:spcAft>
-                <a:spcPts val="800"/>
-              </a:spcAft>
-            </a:pPr>
-            <a:r>
-              <a:rPr sz="1600" b="1" i="0">
+              <a:rPr sz="1500" b="1" i="0">
                 <a:solidFill>
                   <a:srgbClr val="212121"/>
                 </a:solidFill>
                 <a:latin typeface="Calibri"/>
               </a:rPr>
-              <a:t>What bends national curves?</a:t>
+              <a:t>When a treaty year gets credit</a:t>
+            </a:r>
+          </a:p>
+          <a:p>
+            <a:pPr algn="l">
+              <a:spcAft>
+                <a:spcPts val="1000"/>
+              </a:spcAft>
+            </a:pPr>
+            <a:r>
+              <a:rPr sz="1300" b="0" i="0">
+                <a:solidFill>
+                  <a:srgbClr val="555555"/>
+                </a:solidFill>
+                <a:latin typeface="Calibri"/>
+              </a:rPr>
+              <a:t>The catch with treaty-year tests is that a gently curving trend makes almost any year look statistically significant. So a treaty year earns credit only if the slope genuinely changes there by a robust test, and the treaty year beats nearly all nearby placebo years, and the best-fitting date lands within three years of it, and the data's own chosen break agrees, and a documented domestic policy story fits.</a:t>
             </a:r>
           </a:p>
           <a:p>
@@ -9152,155 +10474,13 @@
               </a:spcAft>
             </a:pPr>
             <a:r>
-              <a:rPr sz="1250" b="0" i="0">
-                <a:solidFill>
-                  <a:srgbClr val="555555"/>
-                </a:solidFill>
-                <a:latin typeface="Calibri"/>
-              </a:rPr>
-              <a:t>97 eligible breaks scattered across five decades and seven historically validated mechanism families.</a:t>
-            </a:r>
-          </a:p>
-        </p:txBody>
-      </p:sp>
-      <p:sp>
-        <p:nvSpPr>
-          <p:cNvPr id="5" name="TextBox 4"/>
-          <p:cNvSpPr txBox="1"/>
-          <p:nvPr/>
-        </p:nvSpPr>
-        <p:spPr>
-          <a:xfrm>
-            <a:off x="6208776" y="1600200"/>
-            <a:ext cx="2697480" cy="4206240"/>
-          </a:xfrm>
-          <a:prstGeom prst="rect">
-            <a:avLst/>
-          </a:prstGeom>
-          <a:noFill/>
-        </p:spPr>
-        <p:txBody>
-          <a:bodyPr wrap="square">
-            <a:spAutoFit/>
-          </a:bodyPr>
-          <a:lstStyle/>
-          <a:p>
-            <a:pPr algn="l">
-              <a:spcAft>
-                <a:spcPts val="600"/>
-              </a:spcAft>
-            </a:pPr>
-            <a:r>
-              <a:rPr sz="4000" b="1" i="0">
-                <a:solidFill>
-                  <a:srgbClr val="1B7837"/>
-                </a:solidFill>
-                <a:latin typeface="Calibri"/>
-              </a:rPr>
-              <a:t>III</a:t>
-            </a:r>
-          </a:p>
-          <a:p>
-            <a:pPr algn="l">
-              <a:spcAft>
-                <a:spcPts val="800"/>
-              </a:spcAft>
-            </a:pPr>
-            <a:r>
-              <a:rPr sz="1600" b="1" i="0">
+              <a:rPr sz="1300" b="1" i="0">
                 <a:solidFill>
                   <a:srgbClr val="212121"/>
                 </a:solidFill>
                 <a:latin typeface="Calibri"/>
               </a:rPr>
-              <a:t>Did the bends count?</a:t>
-            </a:r>
-          </a:p>
-          <a:p>
-            <a:pPr algn="l">
-              <a:spcAft>
-                <a:spcPts val="0"/>
-              </a:spcAft>
-            </a:pPr>
-            <a:r>
-              <a:rPr sz="1250" b="0" i="0">
-                <a:solidFill>
-                  <a:srgbClr val="555555"/>
-                </a:solidFill>
-                <a:latin typeface="Calibri"/>
-              </a:rPr>
-              <a:t>Transition quality separates genuine decarbonization from recessions, disruption, offshoring, and growth that outruns efficiency.</a:t>
-            </a:r>
-          </a:p>
-        </p:txBody>
-      </p:sp>
-      <p:sp>
-        <p:nvSpPr>
-          <p:cNvPr id="6" name="TextBox 5"/>
-          <p:cNvSpPr txBox="1"/>
-          <p:nvPr/>
-        </p:nvSpPr>
-        <p:spPr>
-          <a:xfrm>
-            <a:off x="9061704" y="1600200"/>
-            <a:ext cx="2697480" cy="4206240"/>
-          </a:xfrm>
-          <a:prstGeom prst="rect">
-            <a:avLst/>
-          </a:prstGeom>
-          <a:noFill/>
-        </p:spPr>
-        <p:txBody>
-          <a:bodyPr wrap="square">
-            <a:spAutoFit/>
-          </a:bodyPr>
-          <a:lstStyle/>
-          <a:p>
-            <a:pPr algn="l">
-              <a:spcAft>
-                <a:spcPts val="600"/>
-              </a:spcAft>
-            </a:pPr>
-            <a:r>
-              <a:rPr sz="4000" b="1" i="0">
-                <a:solidFill>
-                  <a:srgbClr val="1B7837"/>
-                </a:solidFill>
-                <a:latin typeface="Calibri"/>
-              </a:rPr>
-              <a:t>IV</a:t>
-            </a:r>
-          </a:p>
-          <a:p>
-            <a:pPr algn="l">
-              <a:spcAft>
-                <a:spcPts val="800"/>
-              </a:spcAft>
-            </a:pPr>
-            <a:r>
-              <a:rPr sz="1600" b="1" i="0">
-                <a:solidFill>
-                  <a:srgbClr val="212121"/>
-                </a:solidFill>
-                <a:latin typeface="Calibri"/>
-              </a:rPr>
-              <a:t>Can we trust the story?</a:t>
-            </a:r>
-          </a:p>
-          <a:p>
-            <a:pPr algn="l">
-              <a:spcAft>
-                <a:spcPts val="0"/>
-              </a:spcAft>
-            </a:pPr>
-            <a:r>
-              <a:rPr sz="1250" b="0" i="0">
-                <a:solidFill>
-                  <a:srgbClr val="555555"/>
-                </a:solidFill>
-                <a:latin typeface="Calibri"/>
-              </a:rPr>
-              <a:t>Event-timing tests against chance, external ratings, consumption-based accounting — and unresolved cases reported as such.</a:t>
+              <a:t>This ladder is deliberately hard to climb: many series pass the first step, few pass all five. In Act I we hold Paris itself to the same standard.</a:t>
             </a:r>
           </a:p>
         </p:txBody>
@@ -9331,8 +10511,8 @@
         </p:nvSpPr>
         <p:spPr>
           <a:xfrm>
-            <a:off x="502920" y="274320"/>
-            <a:ext cx="11201400" cy="914400"/>
+            <a:off x="822960" y="777240"/>
+            <a:ext cx="10515600" cy="2377440"/>
           </a:xfrm>
           <a:prstGeom prst="rect">
             <a:avLst/>
@@ -9347,17 +10527,49 @@
           <a:p>
             <a:pPr algn="l">
               <a:spcAft>
-                <a:spcPts val="200"/>
+                <a:spcPts val="0"/>
+              </a:spcAft>
+            </a:pPr>
+            <a:r>
+              <a:rPr sz="4400" b="1" i="0">
+                <a:solidFill>
+                  <a:srgbClr val="1B7837"/>
+                </a:solidFill>
+                <a:latin typeface="Calibri"/>
+              </a:rPr>
+              <a:t>I</a:t>
+            </a:r>
+          </a:p>
+          <a:p>
+            <a:pPr algn="l">
+              <a:spcAft>
+                <a:spcPts val="600"/>
               </a:spcAft>
             </a:pPr>
             <a:r>
               <a:rPr sz="1200" b="1" i="0">
                 <a:solidFill>
-                  <a:srgbClr val="1B7837"/>
-                </a:solidFill>
-                <a:latin typeface="Calibri"/>
-              </a:rPr>
-              <a:t>ACT I · IS THE GLOBAL BEND PARIS?</a:t>
+                  <a:srgbClr val="8A8A8A"/>
+                </a:solidFill>
+                <a:latin typeface="Calibri"/>
+              </a:rPr>
+              <a:t>ACT I</a:t>
+            </a:r>
+          </a:p>
+          <a:p>
+            <a:pPr algn="l">
+              <a:spcAft>
+                <a:spcPts val="800"/>
+              </a:spcAft>
+            </a:pPr>
+            <a:r>
+              <a:rPr sz="2800" b="1" i="0">
+                <a:solidFill>
+                  <a:srgbClr val="212121"/>
+                </a:solidFill>
+                <a:latin typeface="Calibri"/>
+              </a:rPr>
+              <a:t>Did Paris bend the global curve?</a:t>
             </a:r>
           </a:p>
           <a:p>
@@ -9367,13 +10579,13 @@
               </a:spcAft>
             </a:pPr>
             <a:r>
-              <a:rPr sz="2400" b="1" i="0">
-                <a:solidFill>
-                  <a:srgbClr val="212121"/>
-                </a:solidFill>
-                <a:latin typeface="Calibri"/>
-              </a:rPr>
-              <a:t>Global curves first bent in the 1970s</a:t>
+              <a:rPr sz="1400" b="0" i="0">
+                <a:solidFill>
+                  <a:srgbClr val="555555"/>
+                </a:solidFill>
+                <a:latin typeface="Calibri"/>
+              </a:rPr>
+              <a:t>The global record shows two things at once: bends that long predate the climate regime, and a genuine new acceleration whose start the data cannot pin to 2015.</a:t>
             </a:r>
           </a:p>
         </p:txBody>
@@ -9386,8 +10598,8 @@
         </p:nvSpPr>
         <p:spPr>
           <a:xfrm>
-            <a:off x="502920" y="1207008"/>
-            <a:ext cx="11201400" cy="603504"/>
+            <a:off x="822960" y="4206240"/>
+            <a:ext cx="3474720" cy="1828800"/>
           </a:xfrm>
           <a:prstGeom prst="rect">
             <a:avLst/>
@@ -9402,54 +10614,147 @@
           <a:p>
             <a:pPr algn="l">
               <a:spcAft>
+                <a:spcPts val="200"/>
+              </a:spcAft>
+            </a:pPr>
+            <a:r>
+              <a:rPr sz="3000" b="1" i="0">
+                <a:solidFill>
+                  <a:srgbClr val="1B7837"/>
+                </a:solidFill>
+                <a:latin typeface="Calibri"/>
+              </a:rPr>
+              <a:t>1973</a:t>
+            </a:r>
+          </a:p>
+          <a:p>
+            <a:pPr algn="l">
+              <a:spcAft>
                 <a:spcPts val="0"/>
               </a:spcAft>
             </a:pPr>
             <a:r>
-              <a:rPr sz="1250" b="1" i="0">
-                <a:solidFill>
-                  <a:srgbClr val="3A66A5"/>
-                </a:solidFill>
-                <a:latin typeface="Calibri"/>
-              </a:rPr>
-              <a:t>How to read it:  </a:t>
-            </a:r>
-            <a:r>
               <a:rPr sz="1250" b="0" i="0">
                 <a:solidFill>
                   <a:srgbClr val="555555"/>
                 </a:solidFill>
                 <a:latin typeface="Calibri"/>
               </a:rPr>
-              <a:t>Gray dots are the world's CO2 per dollar of output each year (1965 = 100). The red line is the best-fitting pair of straight lines; where they meet — 1973 — is the estimated break. Rio and Paris are marked for comparison: both come long after the bend. The lower panel repeats the estimate for each component; the whiskers show how uncertain each break year is.</a:t>
-            </a:r>
-          </a:p>
-        </p:txBody>
-      </p:sp>
-      <p:pic>
-        <p:nvPicPr>
-          <p:cNvPr id="4" name="Picture 3" descr="takeaway_fig01_global_bend_predates_treaties.png"/>
-          <p:cNvPicPr>
-            <a:picLocks noChangeAspect="1"/>
-          </p:cNvPicPr>
+              <a:t>the year the world's carbon-intensity curve first bent</a:t>
+            </a:r>
+          </a:p>
+        </p:txBody>
+      </p:sp>
+      <p:sp>
+        <p:nvSpPr>
+          <p:cNvPr id="4" name="TextBox 3"/>
+          <p:cNvSpPr txBox="1"/>
           <p:nvPr/>
-        </p:nvPicPr>
-        <p:blipFill>
-          <a:blip r:embed="rId2"/>
-          <a:stretch>
-            <a:fillRect/>
-          </a:stretch>
-        </p:blipFill>
-        <p:spPr>
-          <a:xfrm>
-            <a:off x="3102944" y="1865376"/>
-            <a:ext cx="5983063" cy="4736592"/>
+        </p:nvSpPr>
+        <p:spPr>
+          <a:xfrm>
+            <a:off x="4434840" y="4206240"/>
+            <a:ext cx="3474720" cy="1828800"/>
           </a:xfrm>
           <a:prstGeom prst="rect">
             <a:avLst/>
           </a:prstGeom>
-        </p:spPr>
-      </p:pic>
+          <a:noFill/>
+        </p:spPr>
+        <p:txBody>
+          <a:bodyPr wrap="square">
+            <a:spAutoFit/>
+          </a:bodyPr>
+          <a:lstStyle/>
+          <a:p>
+            <a:pPr algn="l">
+              <a:spcAft>
+                <a:spcPts val="200"/>
+              </a:spcAft>
+            </a:pPr>
+            <a:r>
+              <a:rPr sz="3000" b="1" i="0">
+                <a:solidFill>
+                  <a:srgbClr val="1B7837"/>
+                </a:solidFill>
+                <a:latin typeface="Calibri"/>
+              </a:rPr>
+              <a:t>+2.1% → +0.4%</a:t>
+            </a:r>
+          </a:p>
+          <a:p>
+            <a:pPr algn="l">
+              <a:spcAft>
+                <a:spcPts val="0"/>
+              </a:spcAft>
+            </a:pPr>
+            <a:r>
+              <a:rPr sz="1250" b="0" i="0">
+                <a:solidFill>
+                  <a:srgbClr val="555555"/>
+                </a:solidFill>
+                <a:latin typeface="Calibri"/>
+              </a:rPr>
+              <a:t>global CO2 growth per year, Rio-to-Paris era versus after Paris</a:t>
+            </a:r>
+          </a:p>
+        </p:txBody>
+      </p:sp>
+      <p:sp>
+        <p:nvSpPr>
+          <p:cNvPr id="5" name="TextBox 4"/>
+          <p:cNvSpPr txBox="1"/>
+          <p:nvPr/>
+        </p:nvSpPr>
+        <p:spPr>
+          <a:xfrm>
+            <a:off x="8046720" y="4206240"/>
+            <a:ext cx="3474720" cy="1828800"/>
+          </a:xfrm>
+          <a:prstGeom prst="rect">
+            <a:avLst/>
+          </a:prstGeom>
+          <a:noFill/>
+        </p:spPr>
+        <p:txBody>
+          <a:bodyPr wrap="square">
+            <a:spAutoFit/>
+          </a:bodyPr>
+          <a:lstStyle/>
+          <a:p>
+            <a:pPr algn="l">
+              <a:spcAft>
+                <a:spcPts val="200"/>
+              </a:spcAft>
+            </a:pPr>
+            <a:r>
+              <a:rPr sz="3000" b="1" i="0">
+                <a:solidFill>
+                  <a:srgbClr val="1B7837"/>
+                </a:solidFill>
+                <a:latin typeface="Calibri"/>
+              </a:rPr>
+              <a:t>2013</a:t>
+            </a:r>
+          </a:p>
+          <a:p>
+            <a:pPr algn="l">
+              <a:spcAft>
+                <a:spcPts val="0"/>
+              </a:spcAft>
+            </a:pPr>
+            <a:r>
+              <a:rPr sz="1250" b="0" i="0">
+                <a:solidFill>
+                  <a:srgbClr val="555555"/>
+                </a:solidFill>
+                <a:latin typeface="Calibri"/>
+              </a:rPr>
+              <a:t>the best-fitting onset of the new acceleration — before the treaty</a:t>
+            </a:r>
+          </a:p>
+        </p:txBody>
+      </p:sp>
     </p:spTree>
   </p:cSld>
   <p:clrMapOvr>
@@ -9502,7 +10807,7 @@
                 </a:solidFill>
                 <a:latin typeface="Calibri"/>
               </a:rPr>
-              <a:t>ACT I · IS THE GLOBAL BEND PARIS?</a:t>
+              <a:t>ACT I · THE LONG TREND</a:t>
             </a:r>
           </a:p>
           <a:p>
@@ -9518,7 +10823,7 @@
                 </a:solidFill>
                 <a:latin typeface="Calibri"/>
               </a:rPr>
-              <a:t>Paris at ten: ahead of trend — but the bend began earlier</a:t>
+              <a:t>The world's curve bent before the world began negotiating</a:t>
             </a:r>
           </a:p>
         </p:txBody>
@@ -9531,8 +10836,8 @@
         </p:nvSpPr>
         <p:spPr>
           <a:xfrm>
-            <a:off x="502920" y="1207008"/>
-            <a:ext cx="11201400" cy="603504"/>
+            <a:off x="502920" y="1188720"/>
+            <a:ext cx="11201400" cy="731520"/>
           </a:xfrm>
           <a:prstGeom prst="rect">
             <a:avLst/>
@@ -9551,29 +10856,68 @@
               </a:spcAft>
             </a:pPr>
             <a:r>
-              <a:rPr sz="1250" b="1" i="0">
+              <a:rPr sz="1300" b="0" i="0">
+                <a:solidFill>
+                  <a:srgbClr val="555555"/>
+                </a:solidFill>
+                <a:latin typeface="Calibri"/>
+              </a:rPr>
+              <a:t>The best-fitting break in global CO2 per dollar of output is 1973 — the oil-shock era, two decades before Rio and four before Paris. The demand side bent the same year. Only the fuel mix has an estimate near a treaty year, and its uncertainty interval is honest to the point of self-effacement: 1978 to 2011.</a:t>
+            </a:r>
+          </a:p>
+        </p:txBody>
+      </p:sp>
+      <p:sp>
+        <p:nvSpPr>
+          <p:cNvPr id="4" name="TextBox 3"/>
+          <p:cNvSpPr txBox="1"/>
+          <p:nvPr/>
+        </p:nvSpPr>
+        <p:spPr>
+          <a:xfrm>
+            <a:off x="502920" y="1956816"/>
+            <a:ext cx="11201400" cy="457200"/>
+          </a:xfrm>
+          <a:prstGeom prst="rect">
+            <a:avLst/>
+          </a:prstGeom>
+          <a:noFill/>
+        </p:spPr>
+        <p:txBody>
+          <a:bodyPr wrap="square">
+            <a:spAutoFit/>
+          </a:bodyPr>
+          <a:lstStyle/>
+          <a:p>
+            <a:pPr algn="l">
+              <a:spcAft>
+                <a:spcPts val="0"/>
+              </a:spcAft>
+            </a:pPr>
+            <a:r>
+              <a:rPr sz="1150" b="1" i="1">
                 <a:solidFill>
                   <a:srgbClr val="3A66A5"/>
                 </a:solidFill>
                 <a:latin typeface="Calibri"/>
               </a:rPr>
-              <a:t>How to read it:  </a:t>
-            </a:r>
-            <a:r>
-              <a:rPr sz="1250" b="0" i="0">
-                <a:solidFill>
-                  <a:srgbClr val="555555"/>
-                </a:solidFill>
-                <a:latin typeface="Calibri"/>
-              </a:rPr>
-              <a:t>We draw the 1990–2015 trend, then extend it past Paris (dashed line) with a band showing where future years should fall if nothing changed. Red dots are the actual years since Paris. Dots below the band mean the world is now improving faster than its old trend — clearly so for the fuel mix, not at all for energy efficiency.</a:t>
+              <a:t>How to read it: </a:t>
+            </a:r>
+            <a:r>
+              <a:rPr sz="1150" b="0" i="1">
+                <a:solidFill>
+                  <a:srgbClr val="8A8A8A"/>
+                </a:solidFill>
+                <a:latin typeface="Calibri"/>
+              </a:rPr>
+              <a:t>Gray dots are the world's CO2 per dollar each year (1965 = 100, log scale); the red line is the best-fitting pair of straight lines, meeting at the estimated break. The lower panel gives each component's break year with its uncertainty whisker.</a:t>
             </a:r>
           </a:p>
         </p:txBody>
       </p:sp>
       <p:pic>
         <p:nvPicPr>
-          <p:cNvPr id="4" name="Picture 3" descr="takeaway_fig02a_paris_and_the_long_trend.png"/>
+          <p:cNvPr id="5" name="Picture 4" descr="takeaway_fig01_global_bend_predates_treaties.png"/>
           <p:cNvPicPr>
             <a:picLocks noChangeAspect="1"/>
           </p:cNvPicPr>
@@ -9587,8 +10931,8 @@
         </p:blipFill>
         <p:spPr>
           <a:xfrm>
-            <a:off x="963168" y="1865376"/>
-            <a:ext cx="10262616" cy="4736592"/>
+            <a:off x="3472554" y="2468880"/>
+            <a:ext cx="5243843" cy="4151376"/>
           </a:xfrm>
           <a:prstGeom prst="rect">
             <a:avLst/>
@@ -9647,7 +10991,7 @@
                 </a:solidFill>
                 <a:latin typeface="Calibri"/>
               </a:rPr>
-              <a:t>ACT I · IS THE GLOBAL BEND PARIS?</a:t>
+              <a:t>ACT I · THE ANNIVERSARY TEST</a:t>
             </a:r>
           </a:p>
           <a:p>
@@ -9663,7 +11007,7 @@
                 </a:solidFill>
                 <a:latin typeface="Calibri"/>
               </a:rPr>
-              <a:t>The arithmetic: intensity must fall as fast as GDP grows</a:t>
+              <a:t>Ten years on, the world is ahead of its old trend</a:t>
             </a:r>
           </a:p>
         </p:txBody>
@@ -9676,8 +11020,8 @@
         </p:nvSpPr>
         <p:spPr>
           <a:xfrm>
-            <a:off x="502920" y="1207008"/>
-            <a:ext cx="11201400" cy="603504"/>
+            <a:off x="502920" y="1188720"/>
+            <a:ext cx="11201400" cy="731520"/>
           </a:xfrm>
           <a:prstGeom prst="rect">
             <a:avLst/>
@@ -9696,29 +11040,68 @@
               </a:spcAft>
             </a:pPr>
             <a:r>
-              <a:rPr sz="1250" b="1" i="0">
+              <a:rPr sz="1300" b="0" i="0">
+                <a:solidFill>
+                  <a:srgbClr val="555555"/>
+                </a:solidFill>
+                <a:latin typeface="Calibri"/>
+              </a:rPr>
+              <a:t>Extend the Rio-to-Paris trend past 2015 and the years since fall below it — a real acceleration, concentrated where climate policy operates: the fuel mix. But onsets from 2011 to 2016 fit about equally well (2013 best), and the demand side shows no acceleration. The world is doing what an effective Paris requires; the record cannot yet say Paris is why.</a:t>
+            </a:r>
+          </a:p>
+        </p:txBody>
+      </p:sp>
+      <p:sp>
+        <p:nvSpPr>
+          <p:cNvPr id="4" name="TextBox 3"/>
+          <p:cNvSpPr txBox="1"/>
+          <p:nvPr/>
+        </p:nvSpPr>
+        <p:spPr>
+          <a:xfrm>
+            <a:off x="502920" y="1956816"/>
+            <a:ext cx="11201400" cy="457200"/>
+          </a:xfrm>
+          <a:prstGeom prst="rect">
+            <a:avLst/>
+          </a:prstGeom>
+          <a:noFill/>
+        </p:spPr>
+        <p:txBody>
+          <a:bodyPr wrap="square">
+            <a:spAutoFit/>
+          </a:bodyPr>
+          <a:lstStyle/>
+          <a:p>
+            <a:pPr algn="l">
+              <a:spcAft>
+                <a:spcPts val="0"/>
+              </a:spcAft>
+            </a:pPr>
+            <a:r>
+              <a:rPr sz="1150" b="1" i="1">
                 <a:solidFill>
                   <a:srgbClr val="3A66A5"/>
                 </a:solidFill>
                 <a:latin typeface="Calibri"/>
               </a:rPr>
-              <a:t>How to read it:  </a:t>
-            </a:r>
-            <a:r>
-              <a:rPr sz="1250" b="0" i="0">
-                <a:solidFill>
-                  <a:srgbClr val="555555"/>
-                </a:solidFill>
-                <a:latin typeface="Calibri"/>
-              </a:rPr>
-              <a:t>Each bar is an average annual growth rate. By construction, the red emissions bar equals the gray GDP bar plus the two colored intensity bars. Emissions stop growing only when the colored bars together are as long as the gray one — the dotted line marks that target. We are closer than before Paris, but not there.</a:t>
+              <a:t>How to read it: </a:t>
+            </a:r>
+            <a:r>
+              <a:rPr sz="1150" b="0" i="1">
+                <a:solidFill>
+                  <a:srgbClr val="8A8A8A"/>
+                </a:solidFill>
+                <a:latin typeface="Calibri"/>
+              </a:rPr>
+              <a:t>The solid line is the 1990–2015 trend; the dashed line extends it with a band for where years should fall if nothing changed. Red dots are the years since Paris — below the band means faster-than-trend improvement.</a:t>
             </a:r>
           </a:p>
         </p:txBody>
       </p:sp>
       <p:pic>
         <p:nvPicPr>
-          <p:cNvPr id="4" name="Picture 3" descr="takeaway_fig02b_stabilization_arithmetic.png"/>
+          <p:cNvPr id="5" name="Picture 4" descr="takeaway_fig02a_paris_and_the_long_trend.png"/>
           <p:cNvPicPr>
             <a:picLocks noChangeAspect="1"/>
           </p:cNvPicPr>
@@ -9732,8 +11115,8 @@
         </p:blipFill>
         <p:spPr>
           <a:xfrm>
-            <a:off x="963168" y="1865376"/>
-            <a:ext cx="10262616" cy="4736592"/>
+            <a:off x="1597152" y="2468880"/>
+            <a:ext cx="8994648" cy="4151376"/>
           </a:xfrm>
           <a:prstGeom prst="rect">
             <a:avLst/>
@@ -9792,7 +11175,7 @@
                 </a:solidFill>
                 <a:latin typeface="Calibri"/>
               </a:rPr>
-              <a:t>ACT I · IS THE GLOBAL BEND PARIS?</a:t>
+              <a:t>ACT I · THE ARITHMETIC</a:t>
             </a:r>
           </a:p>
           <a:p>
@@ -9808,7 +11191,7 @@
                 </a:solidFill>
                 <a:latin typeface="Calibri"/>
               </a:rPr>
-              <a:t>Why a treaty-year result needs a placebo test</a:t>
+              <a:t>Emissions bend only when intensity outruns growth — it doesn't, yet</a:t>
             </a:r>
           </a:p>
         </p:txBody>
@@ -9821,8 +11204,8 @@
         </p:nvSpPr>
         <p:spPr>
           <a:xfrm>
-            <a:off x="502920" y="1207008"/>
-            <a:ext cx="11201400" cy="603504"/>
+            <a:off x="502920" y="1188720"/>
+            <a:ext cx="11201400" cy="731520"/>
           </a:xfrm>
           <a:prstGeom prst="rect">
             <a:avLst/>
@@ -9841,29 +11224,68 @@
               </a:spcAft>
             </a:pPr>
             <a:r>
-              <a:rPr sz="1250" b="1" i="0">
+              <a:rPr sz="1300" b="0" i="0">
+                <a:solidFill>
+                  <a:srgbClr val="555555"/>
+                </a:solidFill>
+                <a:latin typeface="Calibri"/>
+              </a:rPr>
+              <a:t>By construction, emissions growth equals GDP growth plus the two intensity terms — so the dotted line, where intensity decline equals GDP growth, is the threshold for emissions to stop rising. The slowdown since Paris is real, but roughly two-thirds of it is slower economic growth; one-third is the cleaner fuel mix. The gap to the dotted line is the remaining task.</a:t>
+            </a:r>
+          </a:p>
+        </p:txBody>
+      </p:sp>
+      <p:sp>
+        <p:nvSpPr>
+          <p:cNvPr id="4" name="TextBox 3"/>
+          <p:cNvSpPr txBox="1"/>
+          <p:nvPr/>
+        </p:nvSpPr>
+        <p:spPr>
+          <a:xfrm>
+            <a:off x="502920" y="1956816"/>
+            <a:ext cx="11201400" cy="457200"/>
+          </a:xfrm>
+          <a:prstGeom prst="rect">
+            <a:avLst/>
+          </a:prstGeom>
+          <a:noFill/>
+        </p:spPr>
+        <p:txBody>
+          <a:bodyPr wrap="square">
+            <a:spAutoFit/>
+          </a:bodyPr>
+          <a:lstStyle/>
+          <a:p>
+            <a:pPr algn="l">
+              <a:spcAft>
+                <a:spcPts val="0"/>
+              </a:spcAft>
+            </a:pPr>
+            <a:r>
+              <a:rPr sz="1150" b="1" i="1">
                 <a:solidFill>
                   <a:srgbClr val="3A66A5"/>
                 </a:solidFill>
                 <a:latin typeface="Calibri"/>
               </a:rPr>
-              <a:t>How to read it:  </a:t>
-            </a:r>
-            <a:r>
-              <a:rPr sz="1250" b="0" i="0">
-                <a:solidFill>
-                  <a:srgbClr val="555555"/>
-                </a:solidFill>
-                <a:latin typeface="Calibri"/>
-              </a:rPr>
-              <a:t>Top: we place the break at every possible year, one at a time, and record how much better the model fits. Rio fits well — but so do many neighboring years, which is why a good fit at a treaty year proves little on its own. Bottom: the share of country series with a significant change at each treaty year (left point) versus the share where the treaty year also beats its neighbors (right point).</a:t>
+              <a:t>How to read it: </a:t>
+            </a:r>
+            <a:r>
+              <a:rPr sz="1150" b="0" i="1">
+                <a:solidFill>
+                  <a:srgbClr val="8A8A8A"/>
+                </a:solidFill>
+                <a:latin typeface="Calibri"/>
+              </a:rPr>
+              <a:t>Each bar is an average annual growth rate; the red bar equals the gray bar plus the two colored ones.</a:t>
             </a:r>
           </a:p>
         </p:txBody>
       </p:sp>
       <p:pic>
         <p:nvPicPr>
-          <p:cNvPr id="4" name="Picture 3" descr="takeaway_fig02_placebo_test.png"/>
+          <p:cNvPr id="5" name="Picture 4" descr="takeaway_fig02b_stabilization_arithmetic.png"/>
           <p:cNvPicPr>
             <a:picLocks noChangeAspect="1"/>
           </p:cNvPicPr>
@@ -9877,8 +11299,8 @@
         </p:blipFill>
         <p:spPr>
           <a:xfrm>
-            <a:off x="3252520" y="1865376"/>
-            <a:ext cx="5683910" cy="4736592"/>
+            <a:off x="1597152" y="2468880"/>
+            <a:ext cx="8994648" cy="4151376"/>
           </a:xfrm>
           <a:prstGeom prst="rect">
             <a:avLst/>
